--- a/presentations/20261023_弱者の戦略_発表資料.pptx
+++ b/presentations/20261023_弱者の戦略_発表資料.pptx
@@ -37,9 +37,10 @@
     <p:sldId id="285" r:id="rId31"/>
     <p:sldId id="286" r:id="rId32"/>
     <p:sldId id="287" r:id="rId33"/>
+    <p:sldId id="288" r:id="rId34"/>
   </p:sldIdLst>
   <p:notesMasterIdLst>
-    <p:notesMasterId r:id="rId34"/>
+    <p:notesMasterId r:id="rId35"/>
   </p:notesMasterIdLst>
   <p:sldSz cx="9144000" cy="5143500"/>
   <p:notesSz cx="5143500" cy="9144000"/>
@@ -138,7 +139,7 @@
   <p:extLst>
     <p:ext uri="{521415D9-36F7-43E2-AB2F-B90AF26B5E84}">
       <p14:sectionLst xmlns:p14="http://schemas.microsoft.com/office/powerpoint/2010/main">
-        <p14:section name="発表資料" id="{7c261d13-cbca-b40b-629e-24c5a22d5e1a}">
+        <p14:section name="発表資料" id="{e53c2cd0-55f2-33bc-b729-c95f102827d0}">
           <p14:sldIdLst>
             <p14:sldId id="256"/>
             <p14:sldId id="257"/>
@@ -172,6 +173,7 @@
             <p14:sldId id="285"/>
             <p14:sldId id="286"/>
             <p14:sldId id="287"/>
+            <p14:sldId id="288"/>
           </p14:sldIdLst>
         </p14:section>
       </p14:sectionLst>
@@ -1299,7 +1301,7 @@
           <a:p>
             <a:r>
               <a:rPr lang="en-US" dirty="0"/>
-              <a:t>【導入 1分】今日は、お金も信用もない人間が、3年で年間家賃収入1億円をつくった方法をお話しします。考え方はMDさんから学んだものと同じロジックです。すべてを貫くテーマは一つ、いかにお金を使わずに物件を増やすか。そして自力がついたら、再生と新築という次の段階に進みます。</a:t>
+              <a:t>【導入 1分】今日は、お金も信用もない人間が、最初の3年間で年間家賃収入1億円をつくった方法をお話しします。現在は約1.44億円です。考え方はMDさんから学んだものと同じロジックです。すべてを貫くテーマは一つ、いかにお金を使わずに物件を増やすか。そして自力がついたら、再生と新築という次の段階に進みます。</a:t>
             </a:r>
             <a:endParaRPr lang="en-US" dirty="0"/>
           </a:p>
@@ -2091,7 +2093,7 @@
           <a:p>
             <a:r>
               <a:rPr lang="en-US" dirty="0"/>
-              <a:t>【3分】2021年6月に、千葉県市原市の軽量鉄骨アパートを個人で購入。頭金500万円でした。同じ年の年末に入会して、2022年3月から地方RCを一気に買い進めます。2024年12月までの約3年で年間家賃は1億円を超え、約1.3億円になりました。そして2025年11月に三重県亀山市を頭金なしの満額融資で購入し、現在の体制になっています。</a:t>
+              <a:t>【3分】2021年6月に、千葉県市原市の軽量鉄骨アパートを個人で購入。頭金500万円でした。同じ年の年末に入会して、2022年3月から地方RCを一気に買い進めます。2024年12月までの約3年で年間家賃は1億円を超え、約1.3億円になりました。そして2025年11月に三重県亀山市を満額融資で購入し、現在は年間家賃約1.44億円です。</a:t>
             </a:r>
             <a:endParaRPr lang="en-US" dirty="0"/>
           </a:p>
@@ -2267,7 +2269,7 @@
           <a:p>
             <a:r>
               <a:rPr lang="en-US" dirty="0"/>
-              <a:t>【2分】2021年6月から2024年12月までの約3年で10物件を購入。年間家賃収入は1億円を超え、2024年12月時点で約1.3億円になりました。この間に入れた頭金は合計4,000万円。購入総額12.1億円に対して3.3%です。ほとんどを融資でまかない、家賃で返していくのが、MDさん流の弱者の戦略です。</a:t>
+              <a:t>【2分】2021年6月から2024年12月までの約3年間で10物件を購入。年間家賃収入は1億円を超え、2024年12月時点で約1.3億円になりました。その後、2025年11月の亀山を加えて、現在は約1.44億円です。この間に入れた頭金は合計4,000万円。購入総額12.1億円に対して3.3%です。ほとんどを融資でまかない、家賃で返していくのが、MDさん流の弱者の戦略です。</a:t>
             </a:r>
             <a:endParaRPr lang="en-US" dirty="0"/>
           </a:p>
@@ -2707,7 +2709,7 @@
           <a:p>
             <a:r>
               <a:rPr lang="en-US" dirty="0"/>
-              <a:t>【3分】自力がついたら、まず再生です。栃木県鹿沼市のRCマンションでは、高圧洗浄、フェンスの新設、消防設備の更新、集合ポストの交換、共用部の全面塗装などのリニューアルを2022年9月に完了しました。静岡県富士市のRCでは、内装を新しくして、ネット無料などの条件を整えて募集しました。</a:t>
+              <a:t>【3分】自力がついたら、まず再生です。岐阜市のRCマンション、ラーク21の例です。高圧洗浄のあと、下塗り・中塗り・上塗りと外壁を塗り替え、鉄部、駐輪場、ガス庫も塗装し、雨樋も交換しました。写真のとおり、外観の第一印象が大きく変わります。物件の見た目が変わると、募集のときの強みになります。</a:t>
             </a:r>
             <a:endParaRPr lang="en-US" dirty="0"/>
           </a:p>
@@ -2795,7 +2797,7 @@
           <a:p>
             <a:r>
               <a:rPr lang="en-US" dirty="0"/>
-              <a:t>【3分】地方は買いやすく、インカムも厚い。ただ、出口と資産性の面で都心には敵わない。持ってよし、売ってよしの資産を持ちたい。それが東京に戻る理由です。</a:t>
+              <a:t>【2分】工事が終わると、同じ建物とは思えない外観になります。鹿沼市のRCマンションでも、高圧洗浄、フェンス新設、共用部の塗装などを行い、入居者さまから好評をいただきました。静岡県富士市では、内装を新しくして、ネット無料などの条件を整えて募集しました。再生は、少ないお金で物件の価値と募集力を上げる方法です。</a:t>
             </a:r>
             <a:endParaRPr lang="en-US" dirty="0"/>
           </a:p>
@@ -2883,7 +2885,7 @@
           <a:p>
             <a:r>
               <a:rPr lang="en-US" dirty="0"/>
-              <a:t>【3分】西武新宿線の武蔵関駅から徒歩10分。土地は242㎡、約73坪。壁式RC造、地下1階・地上3階建てで、17戸の計画です。建物は設計着手済みで、設計は岐阜の希望社さんにお願いしています。</a:t>
+              <a:t>【3分】地方は買いやすく、インカムも厚い。ただ、出口と資産性の面で都心には敵わない。持ってよし、売ってよしの資産を持ちたい。それが東京に戻る理由です。</a:t>
             </a:r>
             <a:endParaRPr lang="en-US" dirty="0"/>
           </a:p>
@@ -2971,7 +2973,7 @@
           <a:p>
             <a:r>
               <a:rPr lang="en-US" dirty="0"/>
-              <a:t>【3分】2026年10月に設計着手、2027年5月に設計完了の予定。その後、確認申請、ゼネコン選定を経て着工。工期は約10か月を想定し、竣工は2028年3月ごろを目標にしています。総事業費は4.2億円で進めていますが、積算で確定させていきます。</a:t>
+              <a:t>【3分】西武新宿線の武蔵関駅から徒歩10分。土地は242㎡、約73坪。壁式RC造、地下1階・地上3階建てで、17戸の計画です。建物は設計着手済みで、設計は岐阜の希望社さんにお願いしています。</a:t>
             </a:r>
             <a:endParaRPr lang="en-US" dirty="0"/>
           </a:p>
@@ -3059,7 +3061,7 @@
           <a:p>
             <a:r>
               <a:rPr lang="en-US" dirty="0"/>
-              <a:t>【3分】新築は地方中古と違い、判断を間違うと取り返しがつきません。だから自分の基準を持っています。区ごとのワンルーム条例も必ず照合し、抵触する場合は設計を変更します。</a:t>
+              <a:t>【3分】2026年10月に設計着手、2027年5月に設計完了の予定。その後、確認申請、ゼネコン選定を経て着工。工期は約10か月を想定し、竣工は2028年3月ごろを目標にしています。総事業費は4.2億円で進めていますが、積算で確定させていきます。</a:t>
             </a:r>
             <a:endParaRPr lang="en-US" dirty="0"/>
           </a:p>
@@ -3147,7 +3149,7 @@
           <a:p>
             <a:r>
               <a:rPr lang="en-US" dirty="0"/>
-              <a:t>【4分】強い話ばかりしても信用されませんので、リスクもお話しします。空室、金利、建築費、出口。それぞれに備えを持っています。</a:t>
+              <a:t>【3分】新築は地方中古と違い、判断を間違うと取り返しがつきません。だから自分の基準を持っています。区ごとのワンルーム条例も必ず照合し、抵触する場合は設計を変更します。</a:t>
             </a:r>
             <a:endParaRPr lang="en-US" dirty="0"/>
           </a:p>
@@ -3323,7 +3325,7 @@
           <a:p>
             <a:r>
               <a:rPr lang="en-US" dirty="0"/>
-              <a:t>【3分】2026〜2028年は関町南の新築を軸に、他の新築計画も進めていきます。地方は維持しつつ、徐々に都市部の比率を上げていきます。</a:t>
+              <a:t>【4分】強い話ばかりしても信用されませんので、リスクもお話しします。空室、金利、建築費、出口。それぞれに備えを持っています。</a:t>
             </a:r>
             <a:endParaRPr lang="en-US" dirty="0"/>
           </a:p>
@@ -3411,7 +3413,7 @@
           <a:p>
             <a:r>
               <a:rPr lang="en-US" dirty="0"/>
-              <a:t>【4分】私は何も持っていない状態から始めました。特別な才能ではなく、MDさんの考え方どおり、条件を絞り、お金を使わずに買い、インカムで自力をつけただけです。自力がついたら、再生と新築へ進めば大丈夫です。</a:t>
+              <a:t>【3分】2026〜2028年は関町南の新築を軸に、他の新築計画も進めていきます。地方は維持しつつ、徐々に都市部の比率を上げていきます。</a:t>
             </a:r>
             <a:endParaRPr lang="en-US" dirty="0"/>
           </a:p>
@@ -3499,7 +3501,7 @@
           <a:p>
             <a:r>
               <a:rPr lang="en-US" dirty="0"/>
-              <a:t>【クロージング＋Q&amp;A】最後に一言。強い人と同じ戦い方をしなくていい。条件を絞って、数字で説明して、積み上げれば、4年で景色は変わります。</a:t>
+              <a:t>【4分】私は何も持っていない状態から始めました。特別な才能ではなく、MDさんの考え方どおり、条件を絞り、お金を使わずに買い、インカムで自力をつけただけです。自力がついたら、再生と新築へ進めば大丈夫です。</a:t>
             </a:r>
             <a:endParaRPr lang="en-US" dirty="0"/>
           </a:p>
@@ -3523,6 +3525,94 @@
             <a:fld id="{F7021451-1387-4CA6-816F-3879F97B5CBC}" type="slidenum">
               <a:rPr lang="en-US"/>
               <a:t>32</a:t>
+            </a:fld>
+            <a:endParaRPr lang="en-US"/>
+          </a:p>
+        </p:txBody>
+      </p:sp>
+    </p:spTree>
+    <p:extLst>
+      <p:ext uri="{BB962C8B-B14F-4D97-AF65-F5344CB8AC3E}">
+        <p14:creationId xmlns:p14="http://schemas.microsoft.com/office/powerpoint/2010/main" val="1024086991"/>
+      </p:ext>
+    </p:extLst>
+  </p:cSld>
+  <p:clrMapOvr>
+    <a:masterClrMapping/>
+  </p:clrMapOvr>
+</p:notes>
+</file>
+
+<file path=ppt/notesSlides/notesSlide33.xml><?xml version="1.0" encoding="utf-8"?>
+<p:notes xmlns:a="http://schemas.openxmlformats.org/drawingml/2006/main" xmlns:r="http://schemas.openxmlformats.org/officeDocument/2006/relationships" xmlns:p="http://schemas.openxmlformats.org/presentationml/2006/main">
+  <p:cSld>
+    <p:spTree>
+      <p:nvGrpSpPr>
+        <p:cNvPr id="1" name=""/>
+        <p:cNvGrpSpPr/>
+        <p:nvPr/>
+      </p:nvGrpSpPr>
+      <p:grpSpPr>
+        <a:xfrm>
+          <a:off x="0" y="0"/>
+          <a:ext cx="0" cy="0"/>
+          <a:chOff x="0" y="0"/>
+          <a:chExt cx="0" cy="0"/>
+        </a:xfrm>
+      </p:grpSpPr>
+      <p:sp>
+        <p:nvSpPr>
+          <p:cNvPr id="2" name="Slide Image Placeholder 1"/>
+          <p:cNvSpPr>
+            <a:spLocks noGrp="1" noRot="1" noChangeAspect="1"/>
+          </p:cNvSpPr>
+          <p:nvPr>
+            <p:ph type="sldImg"/>
+          </p:nvPr>
+        </p:nvSpPr>
+        <p:spPr/>
+      </p:sp>
+      <p:sp>
+        <p:nvSpPr>
+          <p:cNvPr id="3" name="Notes Placeholder 2"/>
+          <p:cNvSpPr>
+            <a:spLocks noGrp="1"/>
+          </p:cNvSpPr>
+          <p:nvPr>
+            <p:ph type="body" idx="1"/>
+          </p:nvPr>
+        </p:nvSpPr>
+        <p:spPr/>
+        <p:txBody>
+          <a:bodyPr/>
+          <a:lstStyle/>
+          <a:p>
+            <a:r>
+              <a:rPr lang="en-US" dirty="0"/>
+              <a:t>【クロージング＋Q&amp;A】最後に一言。強い人と同じ戦い方をしなくていい。条件を絞って、数字で説明して、積み上げれば、4年で景色は変わります。</a:t>
+            </a:r>
+            <a:endParaRPr lang="en-US" dirty="0"/>
+          </a:p>
+        </p:txBody>
+      </p:sp>
+      <p:sp>
+        <p:nvSpPr>
+          <p:cNvPr id="4" name="Slide Number Placeholder 3"/>
+          <p:cNvSpPr>
+            <a:spLocks noGrp="1"/>
+          </p:cNvSpPr>
+          <p:nvPr>
+            <p:ph type="sldNum" sz="quarter" idx="10"/>
+          </p:nvPr>
+        </p:nvSpPr>
+        <p:spPr/>
+        <p:txBody>
+          <a:bodyPr/>
+          <a:lstStyle/>
+          <a:p>
+            <a:fld id="{F7021451-1387-4CA6-816F-3879F97B5CBC}" type="slidenum">
+              <a:rPr lang="en-US"/>
+              <a:t>33</a:t>
             </a:fld>
             <a:endParaRPr lang="en-US"/>
           </a:p>
@@ -4726,7 +4816,7 @@
                   <a:schemeClr val="bg1"/>
                 </a:solidFill>
               </a:rPr>
-              <a:t>3年で、年間家賃収入</a:t>
+              <a:t>3年間で、年間家賃収入</a:t>
             </a:r>
             <a:endParaRPr lang="en-US" sz="4400" dirty="0"/>
           </a:p>
@@ -16483,8 +16573,8 @@
         </p:nvSpPr>
         <p:spPr>
           <a:xfrm>
-            <a:off x="365760" y="1280160"/>
-            <a:ext cx="2560320" cy="457200"/>
+            <a:off x="228600" y="1280160"/>
+            <a:ext cx="2834640" cy="457200"/>
           </a:xfrm>
           <a:prstGeom prst="rect">
             <a:avLst/>
@@ -16500,14 +16590,14 @@
               <a:buNone/>
             </a:pPr>
             <a:r>
-              <a:rPr lang="en-US" sz="1500" b="1" dirty="0">
+              <a:rPr lang="en-US" sz="1400" b="1" dirty="0">
                 <a:solidFill>
                   <a:schemeClr val="tx1"/>
                 </a:solidFill>
               </a:rPr>
               <a:t>2021年6月</a:t>
             </a:r>
-            <a:endParaRPr lang="en-US" sz="1500" dirty="0"/>
+            <a:endParaRPr lang="en-US" sz="1400" dirty="0"/>
           </a:p>
         </p:txBody>
       </p:sp>
@@ -16683,8 +16773,8 @@
         </p:nvSpPr>
         <p:spPr>
           <a:xfrm>
-            <a:off x="3200400" y="1280160"/>
-            <a:ext cx="2560320" cy="457200"/>
+            <a:off x="3063240" y="1280160"/>
+            <a:ext cx="2834640" cy="457200"/>
           </a:xfrm>
           <a:prstGeom prst="rect">
             <a:avLst/>
@@ -16700,14 +16790,14 @@
               <a:buNone/>
             </a:pPr>
             <a:r>
-              <a:rPr lang="en-US" sz="1500" b="1" dirty="0">
+              <a:rPr lang="en-US" sz="1400" b="1" dirty="0">
                 <a:solidFill>
                   <a:schemeClr val="tx1"/>
                 </a:solidFill>
               </a:rPr>
               <a:t>2022年3月〜2024年12月</a:t>
             </a:r>
-            <a:endParaRPr lang="en-US" sz="1500" dirty="0"/>
+            <a:endParaRPr lang="en-US" sz="1400" dirty="0"/>
           </a:p>
         </p:txBody>
       </p:sp>
@@ -16883,8 +16973,8 @@
         </p:nvSpPr>
         <p:spPr>
           <a:xfrm>
-            <a:off x="6035040" y="1280160"/>
-            <a:ext cx="2560320" cy="457200"/>
+            <a:off x="5897880" y="1280160"/>
+            <a:ext cx="2834640" cy="457200"/>
           </a:xfrm>
           <a:prstGeom prst="rect">
             <a:avLst/>
@@ -16900,14 +16990,14 @@
               <a:buNone/>
             </a:pPr>
             <a:r>
-              <a:rPr lang="en-US" sz="1500" b="1" dirty="0">
+              <a:rPr lang="en-US" sz="1400" b="1" dirty="0">
                 <a:solidFill>
                   <a:schemeClr val="tx1"/>
                 </a:solidFill>
               </a:rPr>
               <a:t>2025年11月</a:t>
             </a:r>
-            <a:endParaRPr lang="en-US" sz="1500" dirty="0"/>
+            <a:endParaRPr lang="en-US" sz="1400" dirty="0"/>
           </a:p>
         </p:txBody>
       </p:sp>
@@ -16963,7 +17053,7 @@
                   <a:schemeClr val="tx1"/>
                 </a:solidFill>
               </a:rPr>
-              <a:t>亀山で現在の体制へ</a:t>
+              <a:t>亀山を加えて現在の体制へ</a:t>
             </a:r>
             <a:endParaRPr lang="en-US" sz="1500" dirty="0"/>
           </a:p>
@@ -16999,7 +17089,7 @@
                   <a:schemeClr val="accent4"/>
                 </a:solidFill>
               </a:rPr>
-              <a:t>三重県亀山市15室</a:t>
+              <a:t>三重県亀山市15室（満額融資）</a:t>
             </a:r>
             <a:endParaRPr lang="en-US" sz="1300" dirty="0"/>
           </a:p>
@@ -17013,7 +17103,7 @@
                   <a:schemeClr val="accent4"/>
                 </a:solidFill>
               </a:rPr>
-              <a:t>頭金なしの満額融資</a:t>
+              <a:t>現在の年間家賃は約1.44億円</a:t>
             </a:r>
             <a:endParaRPr lang="en-US" sz="1300" dirty="0"/>
           </a:p>
@@ -17944,14 +18034,14 @@
               <a:buNone/>
             </a:pPr>
             <a:r>
-              <a:rPr lang="en-US" sz="3200" b="1" dirty="0">
+              <a:rPr lang="en-US" sz="2800" b="1" dirty="0">
                 <a:solidFill>
                   <a:schemeClr val="accent2"/>
                 </a:solidFill>
               </a:rPr>
-              <a:t>3年</a:t>
-            </a:r>
-            <a:endParaRPr lang="en-US" sz="3200" dirty="0"/>
+              <a:t>3年間</a:t>
+            </a:r>
+            <a:endParaRPr lang="en-US" sz="2800" dirty="0"/>
           </a:p>
         </p:txBody>
       </p:sp>
@@ -17986,6 +18076,20 @@
                 </a:solidFill>
               </a:rPr>
               <a:t>2021年6月〜2024年12月</a:t>
+            </a:r>
+            <a:endParaRPr lang="en-US" sz="1300" dirty="0"/>
+          </a:p>
+          <a:p>
+            <a:pPr indent="0" marL="0">
+              <a:buNone/>
+            </a:pPr>
+            <a:r>
+              <a:rPr lang="en-US" sz="1300" dirty="0">
+                <a:solidFill>
+                  <a:schemeClr val="tx2"/>
+                </a:solidFill>
+              </a:rPr>
+              <a:t>この期間に10物件を購入</a:t>
             </a:r>
             <a:endParaRPr lang="en-US" sz="1300" dirty="0"/>
           </a:p>
@@ -18038,14 +18142,14 @@
               <a:buNone/>
             </a:pPr>
             <a:r>
-              <a:rPr lang="en-US" sz="3200" b="1" dirty="0">
+              <a:rPr lang="en-US" sz="2800" b="1" dirty="0">
                 <a:solidFill>
                   <a:schemeClr val="accent2"/>
                 </a:solidFill>
               </a:rPr>
-              <a:t>10物件</a:t>
-            </a:r>
-            <a:endParaRPr lang="en-US" sz="3200" dirty="0"/>
+              <a:t>1億円超</a:t>
+            </a:r>
+            <a:endParaRPr lang="en-US" sz="2800" dirty="0"/>
           </a:p>
         </p:txBody>
       </p:sp>
@@ -18079,7 +18183,21 @@
                   <a:schemeClr val="tx2"/>
                 </a:solidFill>
               </a:rPr>
-              <a:t>地方のRCが中心</a:t>
+              <a:t>3年間でつくった</a:t>
+            </a:r>
+            <a:endParaRPr lang="en-US" sz="1300" dirty="0"/>
+          </a:p>
+          <a:p>
+            <a:pPr indent="0" marL="0">
+              <a:buNone/>
+            </a:pPr>
+            <a:r>
+              <a:rPr lang="en-US" sz="1300" dirty="0">
+                <a:solidFill>
+                  <a:schemeClr val="tx2"/>
+                </a:solidFill>
+              </a:rPr>
+              <a:t>年間家賃収入（約1.3億円）</a:t>
             </a:r>
             <a:endParaRPr lang="en-US" sz="1300" dirty="0"/>
           </a:p>
@@ -18132,14 +18250,14 @@
               <a:buNone/>
             </a:pPr>
             <a:r>
-              <a:rPr lang="en-US" sz="3200" b="1" dirty="0">
+              <a:rPr lang="en-US" sz="2800" b="1" dirty="0">
                 <a:solidFill>
                   <a:schemeClr val="accent2"/>
                 </a:solidFill>
               </a:rPr>
-              <a:t>1億円超</a:t>
-            </a:r>
-            <a:endParaRPr lang="en-US" sz="3200" dirty="0"/>
+              <a:t>1.44億円</a:t>
+            </a:r>
+            <a:endParaRPr lang="en-US" sz="2800" dirty="0"/>
           </a:p>
         </p:txBody>
       </p:sp>
@@ -18173,7 +18291,7 @@
                   <a:schemeClr val="tx2"/>
                 </a:solidFill>
               </a:rPr>
-              <a:t>年間家賃収入</a:t>
+              <a:t>現在の年間家賃収入</a:t>
             </a:r>
             <a:endParaRPr lang="en-US" sz="1300" dirty="0"/>
           </a:p>
@@ -18187,7 +18305,7 @@
                   <a:schemeClr val="tx2"/>
                 </a:solidFill>
               </a:rPr>
-              <a:t>（2024年12月で約1.3億円）</a:t>
+              <a:t>（2025年11月の亀山を加えて）</a:t>
             </a:r>
             <a:endParaRPr lang="en-US" sz="1300" dirty="0"/>
           </a:p>
@@ -18240,14 +18358,14 @@
               <a:buNone/>
             </a:pPr>
             <a:r>
-              <a:rPr lang="en-US" sz="3200" b="1" dirty="0">
+              <a:rPr lang="en-US" sz="2800" b="1" dirty="0">
                 <a:solidFill>
                   <a:schemeClr val="accent3"/>
                 </a:solidFill>
               </a:rPr>
               <a:t>3.3%</a:t>
             </a:r>
-            <a:endParaRPr lang="en-US" sz="3200" dirty="0"/>
+            <a:endParaRPr lang="en-US" sz="2800" dirty="0"/>
           </a:p>
         </p:txBody>
       </p:sp>
@@ -18295,7 +18413,7 @@
                   <a:schemeClr val="tx2"/>
                 </a:solidFill>
               </a:rPr>
-              <a:t>（購入12.1億円に対し4,000万円）</a:t>
+              <a:t>（3年間の購入12.1億円に対し4,000万円）</a:t>
             </a:r>
             <a:endParaRPr lang="en-US" sz="1300" dirty="0"/>
           </a:p>
@@ -18367,7 +18485,7 @@
                   <a:schemeClr val="accent4"/>
                 </a:solidFill>
               </a:rPr>
-              <a:t>※年間家賃は市原（売却済み）を除く。購入総額・頭金は2024年12月までの10物件</a:t>
+              <a:t>※年間家賃は市原（売却済み）を除く。現在の1.44億円は14,415万円。購入総額・頭金は2024年12月までの10物件</a:t>
             </a:r>
             <a:endParaRPr lang="en-US" sz="1000" dirty="0"/>
           </a:p>
@@ -21335,18 +21453,486 @@
       </p:sp>
       <p:sp>
         <p:nvSpPr>
-          <p:cNvPr id="4" name="card"/>
+          <p:cNvPr id="4" name="Text 1"/>
+          <p:cNvSpPr txBox="1"/>
+          <p:nvPr/>
+        </p:nvSpPr>
+        <p:spPr>
+          <a:xfrm>
+            <a:off x="457200" y="1188720"/>
+            <a:ext cx="914400" cy="274320"/>
+          </a:xfrm>
+          <a:prstGeom prst="rect">
+            <a:avLst/>
+          </a:prstGeom>
+          <a:noFill/>
+          <a:ln/>
+        </p:spPr>
+        <p:txBody>
+          <a:bodyPr wrap="square" lIns="0" tIns="0" rIns="0" bIns="0" rtlCol="0" anchor="t"/>
+          <a:lstStyle/>
+          <a:p>
+            <a:pPr indent="0" marL="0">
+              <a:buNone/>
+            </a:pPr>
+            <a:r>
+              <a:rPr lang="en-US" sz="1300" b="1" dirty="0">
+                <a:solidFill>
+                  <a:schemeClr val="accent2"/>
+                </a:solidFill>
+              </a:rPr>
+              <a:t>外壁</a:t>
+            </a:r>
+            <a:endParaRPr lang="en-US" sz="1300" dirty="0"/>
+          </a:p>
+        </p:txBody>
+      </p:sp>
+      <p:pic>
+        <p:nvPicPr>
+          <p:cNvPr id="5" name="photo wall before" descr="/tmp/claude-0/-home-user-avatars1/ff7ac518-1ad5-5c32-bb06-c962a98e323e/reno/im/L-024.jpg">    </p:cNvPr>
+          <p:cNvPicPr>
+            <a:picLocks noChangeAspect="1"/>
+          </p:cNvPicPr>
+          <p:nvPr/>
+        </p:nvPicPr>
+        <p:blipFill>
+          <a:blip r:embed="rId1"/>
+          <a:srcRect l="0" r="0" t="0" b="0"/>
+          <a:stretch/>
+        </p:blipFill>
+        <p:spPr>
+          <a:xfrm>
+            <a:off x="457200" y="1508760"/>
+            <a:ext cx="2286000" cy="1371600"/>
+          </a:xfrm>
+          <a:prstGeom prst="rect">
+            <a:avLst/>
+          </a:prstGeom>
+        </p:spPr>
+      </p:pic>
+      <p:sp>
+        <p:nvSpPr>
+          <p:cNvPr id="6" name="tag"/>
           <p:cNvSpPr/>
           <p:nvPr/>
         </p:nvSpPr>
         <p:spPr>
           <a:xfrm>
-            <a:off x="457200" y="1280160"/>
-            <a:ext cx="4023360" cy="3200400"/>
+            <a:off x="548640" y="1600200"/>
+            <a:ext cx="731520" cy="274320"/>
           </a:xfrm>
           <a:prstGeom prst="roundRect">
             <a:avLst>
-              <a:gd name="adj" fmla="val 2286"/>
+              <a:gd name="adj" fmla="val 16667"/>
+            </a:avLst>
+          </a:prstGeom>
+          <a:solidFill>
+            <a:schemeClr val="tx1"/>
+          </a:solidFill>
+          <a:ln/>
+        </p:spPr>
+      </p:sp>
+      <p:sp>
+        <p:nvSpPr>
+          <p:cNvPr id="7" name="Text 3"/>
+          <p:cNvSpPr txBox="1"/>
+          <p:nvPr/>
+        </p:nvSpPr>
+        <p:spPr>
+          <a:xfrm>
+            <a:off x="548640" y="1600200"/>
+            <a:ext cx="731520" cy="274320"/>
+          </a:xfrm>
+          <a:prstGeom prst="rect">
+            <a:avLst/>
+          </a:prstGeom>
+          <a:noFill/>
+          <a:ln/>
+        </p:spPr>
+        <p:txBody>
+          <a:bodyPr wrap="square" lIns="0" tIns="0" rIns="0" bIns="0" rtlCol="0" anchor="ctr"/>
+          <a:lstStyle/>
+          <a:p>
+            <a:pPr algn="ctr" indent="0" marL="0">
+              <a:buNone/>
+            </a:pPr>
+            <a:r>
+              <a:rPr lang="en-US" sz="1100" b="1" dirty="0">
+                <a:solidFill>
+                  <a:schemeClr val="bg1"/>
+                </a:solidFill>
+              </a:rPr>
+              <a:t>施工前</a:t>
+            </a:r>
+            <a:endParaRPr lang="en-US" sz="1100" dirty="0"/>
+          </a:p>
+        </p:txBody>
+      </p:sp>
+      <p:sp>
+        <p:nvSpPr>
+          <p:cNvPr id="8" name="Text 4"/>
+          <p:cNvSpPr txBox="1"/>
+          <p:nvPr/>
+        </p:nvSpPr>
+        <p:spPr>
+          <a:xfrm>
+            <a:off x="2743200" y="2011680"/>
+            <a:ext cx="365760" cy="365760"/>
+          </a:xfrm>
+          <a:prstGeom prst="rect">
+            <a:avLst/>
+          </a:prstGeom>
+          <a:noFill/>
+          <a:ln/>
+        </p:spPr>
+        <p:txBody>
+          <a:bodyPr wrap="square" lIns="0" tIns="0" rIns="0" bIns="0" rtlCol="0" anchor="t"/>
+          <a:lstStyle/>
+          <a:p>
+            <a:pPr algn="ctr" indent="0" marL="0">
+              <a:buNone/>
+            </a:pPr>
+            <a:r>
+              <a:rPr lang="en-US" sz="1600" dirty="0">
+                <a:solidFill>
+                  <a:schemeClr val="accent4"/>
+                </a:solidFill>
+              </a:rPr>
+              <a:t>▶</a:t>
+            </a:r>
+            <a:endParaRPr lang="en-US" sz="1600" dirty="0"/>
+          </a:p>
+        </p:txBody>
+      </p:sp>
+      <p:pic>
+        <p:nvPicPr>
+          <p:cNvPr id="9" name="photo wall after" descr="/tmp/claude-0/-home-user-avatars1/ff7ac518-1ad5-5c32-bb06-c962a98e323e/reno/im/L-050.jpg">    </p:cNvPr>
+          <p:cNvPicPr>
+            <a:picLocks noChangeAspect="1"/>
+          </p:cNvPicPr>
+          <p:nvPr/>
+        </p:nvPicPr>
+        <p:blipFill>
+          <a:blip r:embed="rId2"/>
+          <a:srcRect l="0" r="0" t="0" b="0"/>
+          <a:stretch/>
+        </p:blipFill>
+        <p:spPr>
+          <a:xfrm>
+            <a:off x="3108960" y="1508760"/>
+            <a:ext cx="2286000" cy="1371600"/>
+          </a:xfrm>
+          <a:prstGeom prst="rect">
+            <a:avLst/>
+          </a:prstGeom>
+        </p:spPr>
+      </p:pic>
+      <p:sp>
+        <p:nvSpPr>
+          <p:cNvPr id="10" name="tag"/>
+          <p:cNvSpPr/>
+          <p:nvPr/>
+        </p:nvSpPr>
+        <p:spPr>
+          <a:xfrm>
+            <a:off x="3200400" y="1600200"/>
+            <a:ext cx="731520" cy="274320"/>
+          </a:xfrm>
+          <a:prstGeom prst="roundRect">
+            <a:avLst>
+              <a:gd name="adj" fmla="val 16667"/>
+            </a:avLst>
+          </a:prstGeom>
+          <a:solidFill>
+            <a:schemeClr val="accent1"/>
+          </a:solidFill>
+          <a:ln/>
+        </p:spPr>
+      </p:sp>
+      <p:sp>
+        <p:nvSpPr>
+          <p:cNvPr id="11" name="Text 6"/>
+          <p:cNvSpPr txBox="1"/>
+          <p:nvPr/>
+        </p:nvSpPr>
+        <p:spPr>
+          <a:xfrm>
+            <a:off x="3200400" y="1600200"/>
+            <a:ext cx="731520" cy="274320"/>
+          </a:xfrm>
+          <a:prstGeom prst="rect">
+            <a:avLst/>
+          </a:prstGeom>
+          <a:noFill/>
+          <a:ln/>
+        </p:spPr>
+        <p:txBody>
+          <a:bodyPr wrap="square" lIns="0" tIns="0" rIns="0" bIns="0" rtlCol="0" anchor="ctr"/>
+          <a:lstStyle/>
+          <a:p>
+            <a:pPr algn="ctr" indent="0" marL="0">
+              <a:buNone/>
+            </a:pPr>
+            <a:r>
+              <a:rPr lang="en-US" sz="1100" b="1" dirty="0">
+                <a:solidFill>
+                  <a:schemeClr val="tx1"/>
+                </a:solidFill>
+              </a:rPr>
+              <a:t>施工後</a:t>
+            </a:r>
+            <a:endParaRPr lang="en-US" sz="1100" dirty="0"/>
+          </a:p>
+        </p:txBody>
+      </p:sp>
+      <p:sp>
+        <p:nvSpPr>
+          <p:cNvPr id="12" name="Text 7"/>
+          <p:cNvSpPr txBox="1"/>
+          <p:nvPr/>
+        </p:nvSpPr>
+        <p:spPr>
+          <a:xfrm>
+            <a:off x="457200" y="3017520"/>
+            <a:ext cx="914400" cy="274320"/>
+          </a:xfrm>
+          <a:prstGeom prst="rect">
+            <a:avLst/>
+          </a:prstGeom>
+          <a:noFill/>
+          <a:ln/>
+        </p:spPr>
+        <p:txBody>
+          <a:bodyPr wrap="square" lIns="0" tIns="0" rIns="0" bIns="0" rtlCol="0" anchor="t"/>
+          <a:lstStyle/>
+          <a:p>
+            <a:pPr indent="0" marL="0">
+              <a:buNone/>
+            </a:pPr>
+            <a:r>
+              <a:rPr lang="en-US" sz="1300" b="1" dirty="0">
+                <a:solidFill>
+                  <a:schemeClr val="accent2"/>
+                </a:solidFill>
+              </a:rPr>
+              <a:t>駐輪場</a:t>
+            </a:r>
+            <a:endParaRPr lang="en-US" sz="1300" dirty="0"/>
+          </a:p>
+        </p:txBody>
+      </p:sp>
+      <p:pic>
+        <p:nvPicPr>
+          <p:cNvPr id="13" name="photo bike before" descr="/tmp/claude-0/-home-user-avatars1/ff7ac518-1ad5-5c32-bb06-c962a98e323e/reno/im/L-066.jpg">    </p:cNvPr>
+          <p:cNvPicPr>
+            <a:picLocks noChangeAspect="1"/>
+          </p:cNvPicPr>
+          <p:nvPr/>
+        </p:nvPicPr>
+        <p:blipFill>
+          <a:blip r:embed="rId3"/>
+          <a:srcRect l="0" r="0" t="0" b="0"/>
+          <a:stretch/>
+        </p:blipFill>
+        <p:spPr>
+          <a:xfrm>
+            <a:off x="457200" y="3337560"/>
+            <a:ext cx="2286000" cy="1371600"/>
+          </a:xfrm>
+          <a:prstGeom prst="rect">
+            <a:avLst/>
+          </a:prstGeom>
+        </p:spPr>
+      </p:pic>
+      <p:sp>
+        <p:nvSpPr>
+          <p:cNvPr id="14" name="tag"/>
+          <p:cNvSpPr/>
+          <p:nvPr/>
+        </p:nvSpPr>
+        <p:spPr>
+          <a:xfrm>
+            <a:off x="548640" y="3429000"/>
+            <a:ext cx="731520" cy="274320"/>
+          </a:xfrm>
+          <a:prstGeom prst="roundRect">
+            <a:avLst>
+              <a:gd name="adj" fmla="val 16667"/>
+            </a:avLst>
+          </a:prstGeom>
+          <a:solidFill>
+            <a:schemeClr val="tx1"/>
+          </a:solidFill>
+          <a:ln/>
+        </p:spPr>
+      </p:sp>
+      <p:sp>
+        <p:nvSpPr>
+          <p:cNvPr id="15" name="Text 9"/>
+          <p:cNvSpPr txBox="1"/>
+          <p:nvPr/>
+        </p:nvSpPr>
+        <p:spPr>
+          <a:xfrm>
+            <a:off x="548640" y="3429000"/>
+            <a:ext cx="731520" cy="274320"/>
+          </a:xfrm>
+          <a:prstGeom prst="rect">
+            <a:avLst/>
+          </a:prstGeom>
+          <a:noFill/>
+          <a:ln/>
+        </p:spPr>
+        <p:txBody>
+          <a:bodyPr wrap="square" lIns="0" tIns="0" rIns="0" bIns="0" rtlCol="0" anchor="ctr"/>
+          <a:lstStyle/>
+          <a:p>
+            <a:pPr algn="ctr" indent="0" marL="0">
+              <a:buNone/>
+            </a:pPr>
+            <a:r>
+              <a:rPr lang="en-US" sz="1100" b="1" dirty="0">
+                <a:solidFill>
+                  <a:schemeClr val="bg1"/>
+                </a:solidFill>
+              </a:rPr>
+              <a:t>施工中</a:t>
+            </a:r>
+            <a:endParaRPr lang="en-US" sz="1100" dirty="0"/>
+          </a:p>
+        </p:txBody>
+      </p:sp>
+      <p:sp>
+        <p:nvSpPr>
+          <p:cNvPr id="16" name="Text 10"/>
+          <p:cNvSpPr txBox="1"/>
+          <p:nvPr/>
+        </p:nvSpPr>
+        <p:spPr>
+          <a:xfrm>
+            <a:off x="2743200" y="3840480"/>
+            <a:ext cx="365760" cy="365760"/>
+          </a:xfrm>
+          <a:prstGeom prst="rect">
+            <a:avLst/>
+          </a:prstGeom>
+          <a:noFill/>
+          <a:ln/>
+        </p:spPr>
+        <p:txBody>
+          <a:bodyPr wrap="square" lIns="0" tIns="0" rIns="0" bIns="0" rtlCol="0" anchor="t"/>
+          <a:lstStyle/>
+          <a:p>
+            <a:pPr algn="ctr" indent="0" marL="0">
+              <a:buNone/>
+            </a:pPr>
+            <a:r>
+              <a:rPr lang="en-US" sz="1600" dirty="0">
+                <a:solidFill>
+                  <a:schemeClr val="accent4"/>
+                </a:solidFill>
+              </a:rPr>
+              <a:t>▶</a:t>
+            </a:r>
+            <a:endParaRPr lang="en-US" sz="1600" dirty="0"/>
+          </a:p>
+        </p:txBody>
+      </p:sp>
+      <p:pic>
+        <p:nvPicPr>
+          <p:cNvPr id="17" name="photo bike after" descr="/tmp/claude-0/-home-user-avatars1/ff7ac518-1ad5-5c32-bb06-c962a98e323e/reno/im/L-076.jpg">    </p:cNvPr>
+          <p:cNvPicPr>
+            <a:picLocks noChangeAspect="1"/>
+          </p:cNvPicPr>
+          <p:nvPr/>
+        </p:nvPicPr>
+        <p:blipFill>
+          <a:blip r:embed="rId4"/>
+          <a:srcRect l="0" r="0" t="0" b="0"/>
+          <a:stretch/>
+        </p:blipFill>
+        <p:spPr>
+          <a:xfrm>
+            <a:off x="3108960" y="3337560"/>
+            <a:ext cx="2286000" cy="1371600"/>
+          </a:xfrm>
+          <a:prstGeom prst="rect">
+            <a:avLst/>
+          </a:prstGeom>
+        </p:spPr>
+      </p:pic>
+      <p:sp>
+        <p:nvSpPr>
+          <p:cNvPr id="18" name="tag"/>
+          <p:cNvSpPr/>
+          <p:nvPr/>
+        </p:nvSpPr>
+        <p:spPr>
+          <a:xfrm>
+            <a:off x="3200400" y="3429000"/>
+            <a:ext cx="731520" cy="274320"/>
+          </a:xfrm>
+          <a:prstGeom prst="roundRect">
+            <a:avLst>
+              <a:gd name="adj" fmla="val 16667"/>
+            </a:avLst>
+          </a:prstGeom>
+          <a:solidFill>
+            <a:schemeClr val="accent1"/>
+          </a:solidFill>
+          <a:ln/>
+        </p:spPr>
+      </p:sp>
+      <p:sp>
+        <p:nvSpPr>
+          <p:cNvPr id="19" name="Text 12"/>
+          <p:cNvSpPr txBox="1"/>
+          <p:nvPr/>
+        </p:nvSpPr>
+        <p:spPr>
+          <a:xfrm>
+            <a:off x="3200400" y="3429000"/>
+            <a:ext cx="731520" cy="274320"/>
+          </a:xfrm>
+          <a:prstGeom prst="rect">
+            <a:avLst/>
+          </a:prstGeom>
+          <a:noFill/>
+          <a:ln/>
+        </p:spPr>
+        <p:txBody>
+          <a:bodyPr wrap="square" lIns="0" tIns="0" rIns="0" bIns="0" rtlCol="0" anchor="ctr"/>
+          <a:lstStyle/>
+          <a:p>
+            <a:pPr algn="ctr" indent="0" marL="0">
+              <a:buNone/>
+            </a:pPr>
+            <a:r>
+              <a:rPr lang="en-US" sz="1100" b="1" dirty="0">
+                <a:solidFill>
+                  <a:schemeClr val="tx1"/>
+                </a:solidFill>
+              </a:rPr>
+              <a:t>施工後</a:t>
+            </a:r>
+            <a:endParaRPr lang="en-US" sz="1100" dirty="0"/>
+          </a:p>
+        </p:txBody>
+      </p:sp>
+      <p:sp>
+        <p:nvSpPr>
+          <p:cNvPr id="20" name="card"/>
+          <p:cNvSpPr/>
+          <p:nvPr/>
+        </p:nvSpPr>
+        <p:spPr>
+          <a:xfrm>
+            <a:off x="5669280" y="1188720"/>
+            <a:ext cx="3017520" cy="3520440"/>
+          </a:xfrm>
+          <a:prstGeom prst="roundRect">
+            <a:avLst>
+              <a:gd name="adj" fmla="val 2424"/>
             </a:avLst>
           </a:prstGeom>
           <a:solidFill>
@@ -21357,14 +21943,14 @@
       </p:sp>
       <p:sp>
         <p:nvSpPr>
-          <p:cNvPr id="5" name="Text 2"/>
+          <p:cNvPr id="21" name="Text 14"/>
           <p:cNvSpPr txBox="1"/>
           <p:nvPr/>
         </p:nvSpPr>
         <p:spPr>
           <a:xfrm>
-            <a:off x="685800" y="1417320"/>
-            <a:ext cx="3566160" cy="365760"/>
+            <a:off x="5852160" y="1325880"/>
+            <a:ext cx="2743200" cy="365760"/>
           </a:xfrm>
           <a:prstGeom prst="rect">
             <a:avLst/>
@@ -21380,27 +21966,27 @@
               <a:buNone/>
             </a:pPr>
             <a:r>
-              <a:rPr lang="en-US" sz="1500" b="1" dirty="0">
+              <a:rPr lang="en-US" sz="1400" b="1" dirty="0">
                 <a:solidFill>
                   <a:schemeClr val="accent2"/>
                 </a:solidFill>
               </a:rPr>
-              <a:t>栃木県鹿沼市（RC・30室）</a:t>
-            </a:r>
-            <a:endParaRPr lang="en-US" sz="1500" dirty="0"/>
-          </a:p>
-        </p:txBody>
-      </p:sp>
-      <p:sp>
-        <p:nvSpPr>
-          <p:cNvPr id="6" name="Text 3"/>
+              <a:t>岐阜市 ラーク21（RC）</a:t>
+            </a:r>
+            <a:endParaRPr lang="en-US" sz="1400" dirty="0"/>
+          </a:p>
+        </p:txBody>
+      </p:sp>
+      <p:sp>
+        <p:nvSpPr>
+          <p:cNvPr id="22" name="Text 15"/>
           <p:cNvSpPr txBox="1"/>
           <p:nvPr/>
         </p:nvSpPr>
         <p:spPr>
           <a:xfrm>
-            <a:off x="685800" y="1783080"/>
-            <a:ext cx="3566160" cy="365760"/>
+            <a:off x="5852160" y="1691640"/>
+            <a:ext cx="2743200" cy="274320"/>
           </a:xfrm>
           <a:prstGeom prst="rect">
             <a:avLst/>
@@ -21421,7 +22007,7 @@
                   <a:schemeClr val="accent4"/>
                 </a:solidFill>
               </a:rPr>
-              <a:t>リニューアル工事（2022年9月完了）</a:t>
+              <a:t>塗装・雨樋交換工事</a:t>
             </a:r>
             <a:endParaRPr lang="en-US" sz="1200" dirty="0"/>
           </a:p>
@@ -21429,14 +22015,14 @@
       </p:sp>
       <p:sp>
         <p:nvSpPr>
-          <p:cNvPr id="7" name="Text 4"/>
+          <p:cNvPr id="23" name="Text 16"/>
           <p:cNvSpPr txBox="1"/>
           <p:nvPr/>
         </p:nvSpPr>
         <p:spPr>
           <a:xfrm>
-            <a:off x="685800" y="2286000"/>
-            <a:ext cx="3566160" cy="2103120"/>
+            <a:off x="5852160" y="2103120"/>
+            <a:ext cx="2743200" cy="2560320"/>
           </a:xfrm>
           <a:prstGeom prst="rect">
             <a:avLst/>
@@ -21456,14 +22042,14 @@
               <a:buChar char="•"/>
             </a:pPr>
             <a:r>
-              <a:rPr lang="en-US" sz="1300" dirty="0">
+              <a:rPr lang="en-US" sz="1200" dirty="0">
                 <a:solidFill>
                   <a:schemeClr val="tx1"/>
                 </a:solidFill>
               </a:rPr>
-              <a:t>敷地の高圧洗浄、フェンスを新設</a:t>
-            </a:r>
-            <a:endParaRPr lang="en-US" sz="1300" dirty="0"/>
+              <a:t>高圧洗浄（ベランダ・通路・壁）</a:t>
+            </a:r>
+            <a:endParaRPr lang="en-US" sz="1200" dirty="0"/>
           </a:p>
           <a:p>
             <a:pPr marL="342900" indent="-342900">
@@ -21474,14 +22060,14 @@
               <a:buChar char="•"/>
             </a:pPr>
             <a:r>
-              <a:rPr lang="en-US" sz="1300" dirty="0">
+              <a:rPr lang="en-US" sz="1200" dirty="0">
                 <a:solidFill>
                   <a:schemeClr val="tx1"/>
                 </a:solidFill>
               </a:rPr>
-              <a:t>消防設備の更新・点検</a:t>
-            </a:r>
-            <a:endParaRPr lang="en-US" sz="1300" dirty="0"/>
+              <a:t>外壁を下塗り・中塗り・上塗り</a:t>
+            </a:r>
+            <a:endParaRPr lang="en-US" sz="1200" dirty="0"/>
           </a:p>
           <a:p>
             <a:pPr marL="342900" indent="-342900">
@@ -21492,14 +22078,14 @@
               <a:buChar char="•"/>
             </a:pPr>
             <a:r>
-              <a:rPr lang="en-US" sz="1300" dirty="0">
+              <a:rPr lang="en-US" sz="1200" dirty="0">
                 <a:solidFill>
                   <a:schemeClr val="tx1"/>
                 </a:solidFill>
               </a:rPr>
-              <a:t>集合ポストと室内札を交換</a:t>
-            </a:r>
-            <a:endParaRPr lang="en-US" sz="1300" dirty="0"/>
+              <a:t>軒天・鉄部・駐輪場・ガス庫を塗装</a:t>
+            </a:r>
+            <a:endParaRPr lang="en-US" sz="1200" dirty="0"/>
           </a:p>
           <a:p>
             <a:pPr marL="342900" indent="-342900">
@@ -21510,131 +22096,15 @@
               <a:buChar char="•"/>
             </a:pPr>
             <a:r>
-              <a:rPr lang="en-US" sz="1300" dirty="0">
+              <a:rPr lang="en-US" sz="1200" dirty="0">
                 <a:solidFill>
                   <a:schemeClr val="tx1"/>
                 </a:solidFill>
               </a:rPr>
-              <a:t>共用部の壁・天井・鉄扉を全面塗装</a:t>
-            </a:r>
-            <a:endParaRPr lang="en-US" sz="1300" dirty="0"/>
-          </a:p>
-        </p:txBody>
-      </p:sp>
-      <p:sp>
-        <p:nvSpPr>
-          <p:cNvPr id="8" name="card"/>
-          <p:cNvSpPr/>
-          <p:nvPr/>
-        </p:nvSpPr>
-        <p:spPr>
-          <a:xfrm>
-            <a:off x="4663440" y="1280160"/>
-            <a:ext cx="4023360" cy="3200400"/>
-          </a:xfrm>
-          <a:prstGeom prst="roundRect">
-            <a:avLst>
-              <a:gd name="adj" fmla="val 2286"/>
-            </a:avLst>
-          </a:prstGeom>
-          <a:solidFill>
-            <a:schemeClr val="bg2"/>
-          </a:solidFill>
-          <a:ln/>
-        </p:spPr>
-      </p:sp>
-      <p:sp>
-        <p:nvSpPr>
-          <p:cNvPr id="9" name="Text 6"/>
-          <p:cNvSpPr txBox="1"/>
-          <p:nvPr/>
-        </p:nvSpPr>
-        <p:spPr>
-          <a:xfrm>
-            <a:off x="4892040" y="1417320"/>
-            <a:ext cx="3566160" cy="365760"/>
-          </a:xfrm>
-          <a:prstGeom prst="rect">
-            <a:avLst/>
-          </a:prstGeom>
-          <a:noFill/>
-          <a:ln/>
-        </p:spPr>
-        <p:txBody>
-          <a:bodyPr wrap="square" lIns="0" tIns="0" rIns="0" bIns="0" rtlCol="0" anchor="t"/>
-          <a:lstStyle/>
-          <a:p>
-            <a:pPr indent="0" marL="0">
-              <a:buNone/>
-            </a:pPr>
-            <a:r>
-              <a:rPr lang="en-US" sz="1500" b="1" dirty="0">
-                <a:solidFill>
-                  <a:schemeClr val="accent2"/>
-                </a:solidFill>
-              </a:rPr>
-              <a:t>静岡県富士市（RC・1993年築）</a:t>
-            </a:r>
-            <a:endParaRPr lang="en-US" sz="1500" dirty="0"/>
-          </a:p>
-        </p:txBody>
-      </p:sp>
-      <p:sp>
-        <p:nvSpPr>
-          <p:cNvPr id="10" name="Text 7"/>
-          <p:cNvSpPr txBox="1"/>
-          <p:nvPr/>
-        </p:nvSpPr>
-        <p:spPr>
-          <a:xfrm>
-            <a:off x="4892040" y="1783080"/>
-            <a:ext cx="3566160" cy="365760"/>
-          </a:xfrm>
-          <a:prstGeom prst="rect">
-            <a:avLst/>
-          </a:prstGeom>
-          <a:noFill/>
-          <a:ln/>
-        </p:spPr>
-        <p:txBody>
-          <a:bodyPr wrap="square" lIns="0" tIns="0" rIns="0" bIns="0" rtlCol="0" anchor="t"/>
-          <a:lstStyle/>
-          <a:p>
-            <a:pPr indent="0" marL="0">
-              <a:buNone/>
-            </a:pPr>
-            <a:r>
-              <a:rPr lang="en-US" sz="1200" dirty="0">
-                <a:solidFill>
-                  <a:schemeClr val="accent4"/>
-                </a:solidFill>
-              </a:rPr>
-              <a:t>内装リノベーションと募集条件の見直し</a:t>
+              <a:t>駐車場の白線を引き直し</a:t>
             </a:r>
             <a:endParaRPr lang="en-US" sz="1200" dirty="0"/>
           </a:p>
-        </p:txBody>
-      </p:sp>
-      <p:sp>
-        <p:nvSpPr>
-          <p:cNvPr id="11" name="Text 8"/>
-          <p:cNvSpPr txBox="1"/>
-          <p:nvPr/>
-        </p:nvSpPr>
-        <p:spPr>
-          <a:xfrm>
-            <a:off x="4892040" y="2286000"/>
-            <a:ext cx="3566160" cy="2103120"/>
-          </a:xfrm>
-          <a:prstGeom prst="rect">
-            <a:avLst/>
-          </a:prstGeom>
-          <a:noFill/>
-          <a:ln/>
-        </p:spPr>
-        <p:txBody>
-          <a:bodyPr wrap="square" lIns="0" tIns="0" rIns="0" bIns="0" rtlCol="0" anchor="t"/>
-          <a:lstStyle/>
           <a:p>
             <a:pPr marL="342900" indent="-342900">
               <a:spcAft>
@@ -21644,50 +22114,14 @@
               <a:buChar char="•"/>
             </a:pPr>
             <a:r>
-              <a:rPr lang="en-US" sz="1300" dirty="0">
+              <a:rPr lang="en-US" sz="1200" dirty="0">
                 <a:solidFill>
                   <a:schemeClr val="tx1"/>
                 </a:solidFill>
               </a:rPr>
-              <a:t>和室を洋室に、壁紙・床・水回りを新しく</a:t>
-            </a:r>
-            <a:endParaRPr lang="en-US" sz="1300" dirty="0"/>
-          </a:p>
-          <a:p>
-            <a:pPr marL="342900" indent="-342900">
-              <a:spcAft>
-                <a:spcPts val="600"/>
-              </a:spcAft>
-              <a:buSzPct val="100000"/>
-              <a:buChar char="•"/>
-            </a:pPr>
-            <a:r>
-              <a:rPr lang="en-US" sz="1300" dirty="0">
-                <a:solidFill>
-                  <a:schemeClr val="tx1"/>
-                </a:solidFill>
-              </a:rPr>
-              <a:t>ネット・CATV無料、駐車場2台無料</a:t>
-            </a:r>
-            <a:endParaRPr lang="en-US" sz="1300" dirty="0"/>
-          </a:p>
-          <a:p>
-            <a:pPr marL="342900" indent="-342900">
-              <a:spcAft>
-                <a:spcPts val="600"/>
-              </a:spcAft>
-              <a:buSzPct val="100000"/>
-              <a:buChar char="•"/>
-            </a:pPr>
-            <a:r>
-              <a:rPr lang="en-US" sz="1300" dirty="0">
-                <a:solidFill>
-                  <a:schemeClr val="tx1"/>
-                </a:solidFill>
-              </a:rPr>
-              <a:t>広告料3か月、敷金・礼金ゼロで募集</a:t>
-            </a:r>
-            <a:endParaRPr lang="en-US" sz="1300" dirty="0"/>
+              <a:t>雨樋を交換</a:t>
+            </a:r>
+            <a:endParaRPr lang="en-US" sz="1200" dirty="0"/>
           </a:p>
         </p:txBody>
       </p:sp>
@@ -21793,142 +22227,108 @@
                   <a:schemeClr val="tx1"/>
                 </a:solidFill>
               </a:rPr>
-              <a:t>次の段階②：新築のために、東京に戻る</a:t>
+              <a:t>再生の仕上がり：第一印象が変わる</a:t>
             </a:r>
             <a:endParaRPr lang="en-US" sz="2600" dirty="0"/>
           </a:p>
         </p:txBody>
       </p:sp>
-      <p:sp>
-        <p:nvSpPr>
-          <p:cNvPr id="4" name="card"/>
+      <p:pic>
+        <p:nvPicPr>
+          <p:cNvPr id="4" name="photo completed 1" descr="/tmp/claude-0/-home-user-avatars1/ff7ac518-1ad5-5c32-bb06-c962a98e323e/reno/im/P20-000.jpg">    </p:cNvPr>
+          <p:cNvPicPr>
+            <a:picLocks noChangeAspect="1"/>
+          </p:cNvPicPr>
+          <p:nvPr/>
+        </p:nvPicPr>
+        <p:blipFill>
+          <a:blip r:embed="rId1"/>
+          <a:srcRect l="0" r="0" t="0" b="0"/>
+          <a:stretch/>
+        </p:blipFill>
+        <p:spPr>
+          <a:xfrm>
+            <a:off x="457200" y="1188720"/>
+            <a:ext cx="4023360" cy="2148840"/>
+          </a:xfrm>
+          <a:prstGeom prst="rect">
+            <a:avLst/>
+          </a:prstGeom>
+        </p:spPr>
+      </p:pic>
+      <p:pic>
+        <p:nvPicPr>
+          <p:cNvPr id="5" name="photo completed 2" descr="/tmp/claude-0/-home-user-avatars1/ff7ac518-1ad5-5c32-bb06-c962a98e323e/reno/im/P20-001.jpg">    </p:cNvPr>
+          <p:cNvPicPr>
+            <a:picLocks noChangeAspect="1"/>
+          </p:cNvPicPr>
+          <p:nvPr/>
+        </p:nvPicPr>
+        <p:blipFill>
+          <a:blip r:embed="rId2"/>
+          <a:srcRect l="0" r="0" t="0" b="0"/>
+          <a:stretch/>
+        </p:blipFill>
+        <p:spPr>
+          <a:xfrm>
+            <a:off x="4663440" y="1188720"/>
+            <a:ext cx="4023360" cy="2148840"/>
+          </a:xfrm>
+          <a:prstGeom prst="rect">
+            <a:avLst/>
+          </a:prstGeom>
+        </p:spPr>
+      </p:pic>
+      <p:sp>
+        <p:nvSpPr>
+          <p:cNvPr id="6" name="Text 1"/>
+          <p:cNvSpPr txBox="1"/>
+          <p:nvPr/>
+        </p:nvSpPr>
+        <p:spPr>
+          <a:xfrm>
+            <a:off x="457200" y="3383280"/>
+            <a:ext cx="8229600" cy="274320"/>
+          </a:xfrm>
+          <a:prstGeom prst="rect">
+            <a:avLst/>
+          </a:prstGeom>
+          <a:noFill/>
+          <a:ln/>
+        </p:spPr>
+        <p:txBody>
+          <a:bodyPr wrap="square" lIns="0" tIns="0" rIns="0" bIns="0" rtlCol="0" anchor="t"/>
+          <a:lstStyle/>
+          <a:p>
+            <a:pPr indent="0" marL="0">
+              <a:buNone/>
+            </a:pPr>
+            <a:r>
+              <a:rPr lang="en-US" sz="1100" dirty="0">
+                <a:solidFill>
+                  <a:schemeClr val="accent4"/>
+                </a:solidFill>
+              </a:rPr>
+              <a:t>ラーク21（岐阜市）工事完了</a:t>
+            </a:r>
+            <a:endParaRPr lang="en-US" sz="1100" dirty="0"/>
+          </a:p>
+        </p:txBody>
+      </p:sp>
+      <p:sp>
+        <p:nvSpPr>
+          <p:cNvPr id="7" name="card"/>
           <p:cNvSpPr/>
           <p:nvPr/>
         </p:nvSpPr>
         <p:spPr>
           <a:xfrm>
-            <a:off x="1828800" y="1280160"/>
-            <a:ext cx="3337560" cy="457200"/>
+            <a:off x="457200" y="3703320"/>
+            <a:ext cx="2651760" cy="1005840"/>
           </a:xfrm>
           <a:prstGeom prst="roundRect">
             <a:avLst>
-              <a:gd name="adj" fmla="val 16000"/>
-            </a:avLst>
-          </a:prstGeom>
-          <a:solidFill>
-            <a:schemeClr val="accent2"/>
-          </a:solidFill>
-          <a:ln/>
-        </p:spPr>
-      </p:sp>
-      <p:sp>
-        <p:nvSpPr>
-          <p:cNvPr id="5" name="Text 2"/>
-          <p:cNvSpPr txBox="1"/>
-          <p:nvPr/>
-        </p:nvSpPr>
-        <p:spPr>
-          <a:xfrm>
-            <a:off x="1828800" y="1280160"/>
-            <a:ext cx="3337560" cy="457200"/>
-          </a:xfrm>
-          <a:prstGeom prst="rect">
-            <a:avLst/>
-          </a:prstGeom>
-          <a:noFill/>
-          <a:ln/>
-        </p:spPr>
-        <p:txBody>
-          <a:bodyPr wrap="square" lIns="0" tIns="0" rIns="0" bIns="0" rtlCol="0" anchor="ctr"/>
-          <a:lstStyle/>
-          <a:p>
-            <a:pPr algn="ctr" indent="0" marL="0">
-              <a:buNone/>
-            </a:pPr>
-            <a:r>
-              <a:rPr lang="en-US" sz="1600" b="1" dirty="0">
-                <a:solidFill>
-                  <a:schemeClr val="bg1"/>
-                </a:solidFill>
-              </a:rPr>
-              <a:t>地方の中古</a:t>
-            </a:r>
-            <a:endParaRPr lang="en-US" sz="1600" dirty="0"/>
-          </a:p>
-        </p:txBody>
-      </p:sp>
-      <p:sp>
-        <p:nvSpPr>
-          <p:cNvPr id="6" name="card"/>
-          <p:cNvSpPr/>
-          <p:nvPr/>
-        </p:nvSpPr>
-        <p:spPr>
-          <a:xfrm>
-            <a:off x="5257800" y="1280160"/>
-            <a:ext cx="3337560" cy="457200"/>
-          </a:xfrm>
-          <a:prstGeom prst="roundRect">
-            <a:avLst>
-              <a:gd name="adj" fmla="val 16000"/>
-            </a:avLst>
-          </a:prstGeom>
-          <a:solidFill>
-            <a:schemeClr val="accent1"/>
-          </a:solidFill>
-          <a:ln/>
-        </p:spPr>
-      </p:sp>
-      <p:sp>
-        <p:nvSpPr>
-          <p:cNvPr id="7" name="Text 4"/>
-          <p:cNvSpPr txBox="1"/>
-          <p:nvPr/>
-        </p:nvSpPr>
-        <p:spPr>
-          <a:xfrm>
-            <a:off x="5257800" y="1280160"/>
-            <a:ext cx="3337560" cy="457200"/>
-          </a:xfrm>
-          <a:prstGeom prst="rect">
-            <a:avLst/>
-          </a:prstGeom>
-          <a:noFill/>
-          <a:ln/>
-        </p:spPr>
-        <p:txBody>
-          <a:bodyPr wrap="square" lIns="0" tIns="0" rIns="0" bIns="0" rtlCol="0" anchor="ctr"/>
-          <a:lstStyle/>
-          <a:p>
-            <a:pPr algn="ctr" indent="0" marL="0">
-              <a:buNone/>
-            </a:pPr>
-            <a:r>
-              <a:rPr lang="en-US" sz="1600" b="1" dirty="0">
-                <a:solidFill>
-                  <a:schemeClr val="tx1"/>
-                </a:solidFill>
-              </a:rPr>
-              <a:t>東京の新築</a:t>
-            </a:r>
-            <a:endParaRPr lang="en-US" sz="1600" dirty="0"/>
-          </a:p>
-        </p:txBody>
-      </p:sp>
-      <p:sp>
-        <p:nvSpPr>
-          <p:cNvPr id="8" name="card"/>
-          <p:cNvSpPr/>
-          <p:nvPr/>
-        </p:nvSpPr>
-        <p:spPr>
-          <a:xfrm>
-            <a:off x="457200" y="1828800"/>
-            <a:ext cx="1280160" cy="960120"/>
-          </a:xfrm>
-          <a:prstGeom prst="roundRect">
-            <a:avLst>
-              <a:gd name="adj" fmla="val 7619"/>
+              <a:gd name="adj" fmla="val 7273"/>
             </a:avLst>
           </a:prstGeom>
           <a:solidFill>
@@ -21939,37 +22339,87 @@
       </p:sp>
       <p:sp>
         <p:nvSpPr>
-          <p:cNvPr id="9" name="Text 6"/>
+          <p:cNvPr id="8" name="Text 3"/>
           <p:cNvSpPr txBox="1"/>
           <p:nvPr/>
         </p:nvSpPr>
         <p:spPr>
           <a:xfrm>
-            <a:off x="457200" y="1828800"/>
-            <a:ext cx="1280160" cy="960120"/>
-          </a:xfrm>
-          <a:prstGeom prst="rect">
-            <a:avLst/>
-          </a:prstGeom>
-          <a:noFill/>
-          <a:ln/>
-        </p:spPr>
-        <p:txBody>
-          <a:bodyPr wrap="square" lIns="0" tIns="0" rIns="0" bIns="0" rtlCol="0" anchor="ctr"/>
-          <a:lstStyle/>
-          <a:p>
-            <a:pPr algn="ctr" indent="0" marL="0">
-              <a:buNone/>
-            </a:pPr>
-            <a:r>
-              <a:rPr lang="en-US" sz="1400" b="1" dirty="0">
+            <a:off x="640080" y="3767328"/>
+            <a:ext cx="2377440" cy="274320"/>
+          </a:xfrm>
+          <a:prstGeom prst="rect">
+            <a:avLst/>
+          </a:prstGeom>
+          <a:noFill/>
+          <a:ln/>
+        </p:spPr>
+        <p:txBody>
+          <a:bodyPr wrap="square" lIns="0" tIns="0" rIns="0" bIns="0" rtlCol="0" anchor="t"/>
+          <a:lstStyle/>
+          <a:p>
+            <a:pPr indent="0" marL="0">
+              <a:buNone/>
+            </a:pPr>
+            <a:r>
+              <a:rPr lang="en-US" sz="1200" b="1" dirty="0">
+                <a:solidFill>
+                  <a:schemeClr val="accent2"/>
+                </a:solidFill>
+              </a:rPr>
+              <a:t>栃木県鹿沼市（RC）</a:t>
+            </a:r>
+            <a:endParaRPr lang="en-US" sz="1200" dirty="0"/>
+          </a:p>
+        </p:txBody>
+      </p:sp>
+      <p:sp>
+        <p:nvSpPr>
+          <p:cNvPr id="9" name="Text 4"/>
+          <p:cNvSpPr txBox="1"/>
+          <p:nvPr/>
+        </p:nvSpPr>
+        <p:spPr>
+          <a:xfrm>
+            <a:off x="640080" y="4069080"/>
+            <a:ext cx="2377440" cy="594360"/>
+          </a:xfrm>
+          <a:prstGeom prst="rect">
+            <a:avLst/>
+          </a:prstGeom>
+          <a:noFill/>
+          <a:ln/>
+        </p:spPr>
+        <p:txBody>
+          <a:bodyPr wrap="square" lIns="0" tIns="0" rIns="0" bIns="0" rtlCol="0" anchor="t"/>
+          <a:lstStyle/>
+          <a:p>
+            <a:pPr indent="0" marL="0">
+              <a:buNone/>
+            </a:pPr>
+            <a:r>
+              <a:rPr lang="en-US" sz="1100" dirty="0">
                 <a:solidFill>
                   <a:schemeClr val="tx1"/>
                 </a:solidFill>
               </a:rPr>
-              <a:t>強み</a:t>
-            </a:r>
-            <a:endParaRPr lang="en-US" sz="1400" dirty="0"/>
+              <a:t>高圧洗浄・フェンス新設・共用部の全面塗装</a:t>
+            </a:r>
+            <a:endParaRPr lang="en-US" sz="1100" dirty="0"/>
+          </a:p>
+          <a:p>
+            <a:pPr indent="0" marL="0">
+              <a:buNone/>
+            </a:pPr>
+            <a:r>
+              <a:rPr lang="en-US" sz="1100" dirty="0">
+                <a:solidFill>
+                  <a:schemeClr val="tx1"/>
+                </a:solidFill>
+              </a:rPr>
+              <a:t>（2022年9月完了）</a:t>
+            </a:r>
+            <a:endParaRPr lang="en-US" sz="1100" dirty="0"/>
           </a:p>
         </p:txBody>
       </p:sp>
@@ -21981,12 +22431,12 @@
         </p:nvSpPr>
         <p:spPr>
           <a:xfrm>
-            <a:off x="1828800" y="1828800"/>
-            <a:ext cx="3337560" cy="960120"/>
+            <a:off x="3291840" y="3703320"/>
+            <a:ext cx="2651760" cy="1005840"/>
           </a:xfrm>
           <a:prstGeom prst="roundRect">
             <a:avLst>
-              <a:gd name="adj" fmla="val 7619"/>
+              <a:gd name="adj" fmla="val 7273"/>
             </a:avLst>
           </a:prstGeom>
           <a:solidFill>
@@ -21997,499 +22447,195 @@
       </p:sp>
       <p:sp>
         <p:nvSpPr>
-          <p:cNvPr id="11" name="Text 8"/>
+          <p:cNvPr id="11" name="Text 6"/>
           <p:cNvSpPr txBox="1"/>
           <p:nvPr/>
         </p:nvSpPr>
         <p:spPr>
           <a:xfrm>
-            <a:off x="1828800" y="1828800"/>
-            <a:ext cx="3337560" cy="960120"/>
-          </a:xfrm>
-          <a:prstGeom prst="rect">
-            <a:avLst/>
-          </a:prstGeom>
-          <a:noFill/>
-          <a:ln/>
-        </p:spPr>
-        <p:txBody>
-          <a:bodyPr wrap="square" lIns="0" tIns="0" rIns="0" bIns="0" rtlCol="0" anchor="ctr"/>
-          <a:lstStyle/>
-          <a:p>
-            <a:pPr algn="ctr" indent="0" marL="0">
-              <a:buNone/>
-            </a:pPr>
-            <a:r>
-              <a:rPr lang="en-US" sz="1400" dirty="0">
+            <a:off x="3474720" y="3767328"/>
+            <a:ext cx="2377440" cy="274320"/>
+          </a:xfrm>
+          <a:prstGeom prst="rect">
+            <a:avLst/>
+          </a:prstGeom>
+          <a:noFill/>
+          <a:ln/>
+        </p:spPr>
+        <p:txBody>
+          <a:bodyPr wrap="square" lIns="0" tIns="0" rIns="0" bIns="0" rtlCol="0" anchor="t"/>
+          <a:lstStyle/>
+          <a:p>
+            <a:pPr indent="0" marL="0">
+              <a:buNone/>
+            </a:pPr>
+            <a:r>
+              <a:rPr lang="en-US" sz="1200" b="1" dirty="0">
+                <a:solidFill>
+                  <a:schemeClr val="accent2"/>
+                </a:solidFill>
+              </a:rPr>
+              <a:t>静岡県富士市（RC）</a:t>
+            </a:r>
+            <a:endParaRPr lang="en-US" sz="1200" dirty="0"/>
+          </a:p>
+        </p:txBody>
+      </p:sp>
+      <p:sp>
+        <p:nvSpPr>
+          <p:cNvPr id="12" name="Text 7"/>
+          <p:cNvSpPr txBox="1"/>
+          <p:nvPr/>
+        </p:nvSpPr>
+        <p:spPr>
+          <a:xfrm>
+            <a:off x="3474720" y="4069080"/>
+            <a:ext cx="2377440" cy="594360"/>
+          </a:xfrm>
+          <a:prstGeom prst="rect">
+            <a:avLst/>
+          </a:prstGeom>
+          <a:noFill/>
+          <a:ln/>
+        </p:spPr>
+        <p:txBody>
+          <a:bodyPr wrap="square" lIns="0" tIns="0" rIns="0" bIns="0" rtlCol="0" anchor="t"/>
+          <a:lstStyle/>
+          <a:p>
+            <a:pPr indent="0" marL="0">
+              <a:buNone/>
+            </a:pPr>
+            <a:r>
+              <a:rPr lang="en-US" sz="1100" dirty="0">
                 <a:solidFill>
                   <a:schemeClr val="tx1"/>
                 </a:solidFill>
               </a:rPr>
-              <a:t>高利回り・高積算</a:t>
-            </a:r>
-            <a:endParaRPr lang="en-US" sz="1400" dirty="0"/>
-          </a:p>
-          <a:p>
-            <a:pPr algn="ctr" indent="0" marL="0">
-              <a:buNone/>
-            </a:pPr>
-            <a:r>
-              <a:rPr lang="en-US" sz="1400" dirty="0">
+              <a:t>内装を新しく、ネット・CATV無料</a:t>
+            </a:r>
+            <a:endParaRPr lang="en-US" sz="1100" dirty="0"/>
+          </a:p>
+          <a:p>
+            <a:pPr indent="0" marL="0">
+              <a:buNone/>
+            </a:pPr>
+            <a:r>
+              <a:rPr lang="en-US" sz="1100" dirty="0">
                 <a:solidFill>
                   <a:schemeClr val="tx1"/>
                 </a:solidFill>
               </a:rPr>
-              <a:t>買いやすい</a:t>
-            </a:r>
-            <a:endParaRPr lang="en-US" sz="1400" dirty="0"/>
-          </a:p>
-        </p:txBody>
-      </p:sp>
-      <p:sp>
-        <p:nvSpPr>
-          <p:cNvPr id="12" name="card"/>
+              <a:t>広告料3か月・敷礼ゼロで募集</a:t>
+            </a:r>
+            <a:endParaRPr lang="en-US" sz="1100" dirty="0"/>
+          </a:p>
+        </p:txBody>
+      </p:sp>
+      <p:sp>
+        <p:nvSpPr>
+          <p:cNvPr id="13" name="card"/>
           <p:cNvSpPr/>
           <p:nvPr/>
         </p:nvSpPr>
         <p:spPr>
           <a:xfrm>
-            <a:off x="5257800" y="1828800"/>
-            <a:ext cx="3337560" cy="960120"/>
+            <a:off x="6126480" y="3703320"/>
+            <a:ext cx="2651760" cy="1005840"/>
           </a:xfrm>
           <a:prstGeom prst="roundRect">
             <a:avLst>
-              <a:gd name="adj" fmla="val 7619"/>
+              <a:gd name="adj" fmla="val 7273"/>
             </a:avLst>
           </a:prstGeom>
           <a:solidFill>
-            <a:schemeClr val="bg2"/>
+            <a:schemeClr val="accent6"/>
           </a:solidFill>
           <a:ln/>
         </p:spPr>
       </p:sp>
       <p:sp>
         <p:nvSpPr>
-          <p:cNvPr id="13" name="Text 10"/>
+          <p:cNvPr id="14" name="Text 9"/>
           <p:cNvSpPr txBox="1"/>
           <p:nvPr/>
         </p:nvSpPr>
         <p:spPr>
           <a:xfrm>
-            <a:off x="5257800" y="1828800"/>
-            <a:ext cx="3337560" cy="960120"/>
-          </a:xfrm>
-          <a:prstGeom prst="rect">
-            <a:avLst/>
-          </a:prstGeom>
-          <a:noFill/>
-          <a:ln/>
-        </p:spPr>
-        <p:txBody>
-          <a:bodyPr wrap="square" lIns="0" tIns="0" rIns="0" bIns="0" rtlCol="0" anchor="ctr"/>
-          <a:lstStyle/>
-          <a:p>
-            <a:pPr algn="ctr" indent="0" marL="0">
-              <a:buNone/>
-            </a:pPr>
-            <a:r>
-              <a:rPr lang="en-US" sz="1400" dirty="0">
+            <a:off x="6309360" y="3767328"/>
+            <a:ext cx="2377440" cy="274320"/>
+          </a:xfrm>
+          <a:prstGeom prst="rect">
+            <a:avLst/>
+          </a:prstGeom>
+          <a:noFill/>
+          <a:ln/>
+        </p:spPr>
+        <p:txBody>
+          <a:bodyPr wrap="square" lIns="0" tIns="0" rIns="0" bIns="0" rtlCol="0" anchor="t"/>
+          <a:lstStyle/>
+          <a:p>
+            <a:pPr indent="0" marL="0">
+              <a:buNone/>
+            </a:pPr>
+            <a:r>
+              <a:rPr lang="en-US" sz="1200" b="1" dirty="0">
+                <a:solidFill>
+                  <a:schemeClr val="accent2"/>
+                </a:solidFill>
+              </a:rPr>
+              <a:t>再生のねらい</a:t>
+            </a:r>
+            <a:endParaRPr lang="en-US" sz="1200" dirty="0"/>
+          </a:p>
+        </p:txBody>
+      </p:sp>
+      <p:sp>
+        <p:nvSpPr>
+          <p:cNvPr id="15" name="Text 10"/>
+          <p:cNvSpPr txBox="1"/>
+          <p:nvPr/>
+        </p:nvSpPr>
+        <p:spPr>
+          <a:xfrm>
+            <a:off x="6309360" y="4069080"/>
+            <a:ext cx="2377440" cy="594360"/>
+          </a:xfrm>
+          <a:prstGeom prst="rect">
+            <a:avLst/>
+          </a:prstGeom>
+          <a:noFill/>
+          <a:ln/>
+        </p:spPr>
+        <p:txBody>
+          <a:bodyPr wrap="square" lIns="0" tIns="0" rIns="0" bIns="0" rtlCol="0" anchor="t"/>
+          <a:lstStyle/>
+          <a:p>
+            <a:pPr indent="0" marL="0">
+              <a:buNone/>
+            </a:pPr>
+            <a:r>
+              <a:rPr lang="en-US" sz="1100" dirty="0">
                 <a:solidFill>
                   <a:schemeClr val="tx1"/>
                 </a:solidFill>
               </a:rPr>
-              <a:t>資産性が高い</a:t>
-            </a:r>
-            <a:endParaRPr lang="en-US" sz="1400" dirty="0"/>
-          </a:p>
-          <a:p>
-            <a:pPr algn="ctr" indent="0" marL="0">
-              <a:buNone/>
-            </a:pPr>
-            <a:r>
-              <a:rPr lang="en-US" sz="1400" dirty="0">
+              <a:t>少ないお金で、見た目と</a:t>
+            </a:r>
+            <a:endParaRPr lang="en-US" sz="1100" dirty="0"/>
+          </a:p>
+          <a:p>
+            <a:pPr indent="0" marL="0">
+              <a:buNone/>
+            </a:pPr>
+            <a:r>
+              <a:rPr lang="en-US" sz="1100" dirty="0">
                 <a:solidFill>
                   <a:schemeClr val="tx1"/>
                 </a:solidFill>
               </a:rPr>
-              <a:t>売りやすい・貸しやすい</a:t>
-            </a:r>
-            <a:endParaRPr lang="en-US" sz="1400" dirty="0"/>
-          </a:p>
-        </p:txBody>
-      </p:sp>
-      <p:sp>
-        <p:nvSpPr>
-          <p:cNvPr id="14" name="card"/>
-          <p:cNvSpPr/>
-          <p:nvPr/>
-        </p:nvSpPr>
-        <p:spPr>
-          <a:xfrm>
-            <a:off x="457200" y="2880360"/>
-            <a:ext cx="1280160" cy="960120"/>
-          </a:xfrm>
-          <a:prstGeom prst="roundRect">
-            <a:avLst>
-              <a:gd name="adj" fmla="val 7619"/>
-            </a:avLst>
-          </a:prstGeom>
-          <a:solidFill>
-            <a:schemeClr val="bg2"/>
-          </a:solidFill>
-          <a:ln/>
-        </p:spPr>
-      </p:sp>
-      <p:sp>
-        <p:nvSpPr>
-          <p:cNvPr id="15" name="Text 12"/>
-          <p:cNvSpPr txBox="1"/>
-          <p:nvPr/>
-        </p:nvSpPr>
-        <p:spPr>
-          <a:xfrm>
-            <a:off x="457200" y="2880360"/>
-            <a:ext cx="1280160" cy="960120"/>
-          </a:xfrm>
-          <a:prstGeom prst="rect">
-            <a:avLst/>
-          </a:prstGeom>
-          <a:noFill/>
-          <a:ln/>
-        </p:spPr>
-        <p:txBody>
-          <a:bodyPr wrap="square" lIns="0" tIns="0" rIns="0" bIns="0" rtlCol="0" anchor="ctr"/>
-          <a:lstStyle/>
-          <a:p>
-            <a:pPr algn="ctr" indent="0" marL="0">
-              <a:buNone/>
-            </a:pPr>
-            <a:r>
-              <a:rPr lang="en-US" sz="1400" b="1" dirty="0">
-                <a:solidFill>
-                  <a:schemeClr val="tx1"/>
-                </a:solidFill>
-              </a:rPr>
-              <a:t>弱み</a:t>
-            </a:r>
-            <a:endParaRPr lang="en-US" sz="1400" dirty="0"/>
-          </a:p>
-        </p:txBody>
-      </p:sp>
-      <p:sp>
-        <p:nvSpPr>
-          <p:cNvPr id="16" name="card"/>
-          <p:cNvSpPr/>
-          <p:nvPr/>
-        </p:nvSpPr>
-        <p:spPr>
-          <a:xfrm>
-            <a:off x="1828800" y="2880360"/>
-            <a:ext cx="3337560" cy="960120"/>
-          </a:xfrm>
-          <a:prstGeom prst="roundRect">
-            <a:avLst>
-              <a:gd name="adj" fmla="val 7619"/>
-            </a:avLst>
-          </a:prstGeom>
-          <a:solidFill>
-            <a:schemeClr val="bg2"/>
-          </a:solidFill>
-          <a:ln/>
-        </p:spPr>
-      </p:sp>
-      <p:sp>
-        <p:nvSpPr>
-          <p:cNvPr id="17" name="Text 14"/>
-          <p:cNvSpPr txBox="1"/>
-          <p:nvPr/>
-        </p:nvSpPr>
-        <p:spPr>
-          <a:xfrm>
-            <a:off x="1828800" y="2880360"/>
-            <a:ext cx="3337560" cy="960120"/>
-          </a:xfrm>
-          <a:prstGeom prst="rect">
-            <a:avLst/>
-          </a:prstGeom>
-          <a:noFill/>
-          <a:ln/>
-        </p:spPr>
-        <p:txBody>
-          <a:bodyPr wrap="square" lIns="0" tIns="0" rIns="0" bIns="0" rtlCol="0" anchor="ctr"/>
-          <a:lstStyle/>
-          <a:p>
-            <a:pPr algn="ctr" indent="0" marL="0">
-              <a:buNone/>
-            </a:pPr>
-            <a:r>
-              <a:rPr lang="en-US" sz="1400" dirty="0">
-                <a:solidFill>
-                  <a:schemeClr val="tx1"/>
-                </a:solidFill>
-              </a:rPr>
-              <a:t>出口が読みにくい</a:t>
-            </a:r>
-            <a:endParaRPr lang="en-US" sz="1400" dirty="0"/>
-          </a:p>
-          <a:p>
-            <a:pPr algn="ctr" indent="0" marL="0">
-              <a:buNone/>
-            </a:pPr>
-            <a:r>
-              <a:rPr lang="en-US" sz="1400" dirty="0">
-                <a:solidFill>
-                  <a:schemeClr val="tx1"/>
-                </a:solidFill>
-              </a:rPr>
-              <a:t>人口減少</a:t>
-            </a:r>
-            <a:endParaRPr lang="en-US" sz="1400" dirty="0"/>
-          </a:p>
-        </p:txBody>
-      </p:sp>
-      <p:sp>
-        <p:nvSpPr>
-          <p:cNvPr id="18" name="card"/>
-          <p:cNvSpPr/>
-          <p:nvPr/>
-        </p:nvSpPr>
-        <p:spPr>
-          <a:xfrm>
-            <a:off x="5257800" y="2880360"/>
-            <a:ext cx="3337560" cy="960120"/>
-          </a:xfrm>
-          <a:prstGeom prst="roundRect">
-            <a:avLst>
-              <a:gd name="adj" fmla="val 7619"/>
-            </a:avLst>
-          </a:prstGeom>
-          <a:solidFill>
-            <a:schemeClr val="bg2"/>
-          </a:solidFill>
-          <a:ln/>
-        </p:spPr>
-      </p:sp>
-      <p:sp>
-        <p:nvSpPr>
-          <p:cNvPr id="19" name="Text 16"/>
-          <p:cNvSpPr txBox="1"/>
-          <p:nvPr/>
-        </p:nvSpPr>
-        <p:spPr>
-          <a:xfrm>
-            <a:off x="5257800" y="2880360"/>
-            <a:ext cx="3337560" cy="960120"/>
-          </a:xfrm>
-          <a:prstGeom prst="rect">
-            <a:avLst/>
-          </a:prstGeom>
-          <a:noFill/>
-          <a:ln/>
-        </p:spPr>
-        <p:txBody>
-          <a:bodyPr wrap="square" lIns="0" tIns="0" rIns="0" bIns="0" rtlCol="0" anchor="ctr"/>
-          <a:lstStyle/>
-          <a:p>
-            <a:pPr algn="ctr" indent="0" marL="0">
-              <a:buNone/>
-            </a:pPr>
-            <a:r>
-              <a:rPr lang="en-US" sz="1400" dirty="0">
-                <a:solidFill>
-                  <a:schemeClr val="tx1"/>
-                </a:solidFill>
-              </a:rPr>
-              <a:t>利回りは低め</a:t>
-            </a:r>
-            <a:endParaRPr lang="en-US" sz="1400" dirty="0"/>
-          </a:p>
-          <a:p>
-            <a:pPr algn="ctr" indent="0" marL="0">
-              <a:buNone/>
-            </a:pPr>
-            <a:r>
-              <a:rPr lang="en-US" sz="1400" dirty="0">
-                <a:solidFill>
-                  <a:schemeClr val="tx1"/>
-                </a:solidFill>
-              </a:rPr>
-              <a:t>土地が高い</a:t>
-            </a:r>
-            <a:endParaRPr lang="en-US" sz="1400" dirty="0"/>
-          </a:p>
-        </p:txBody>
-      </p:sp>
-      <p:sp>
-        <p:nvSpPr>
-          <p:cNvPr id="20" name="card"/>
-          <p:cNvSpPr/>
-          <p:nvPr/>
-        </p:nvSpPr>
-        <p:spPr>
-          <a:xfrm>
-            <a:off x="457200" y="3931920"/>
-            <a:ext cx="1280160" cy="960120"/>
-          </a:xfrm>
-          <a:prstGeom prst="roundRect">
-            <a:avLst>
-              <a:gd name="adj" fmla="val 7619"/>
-            </a:avLst>
-          </a:prstGeom>
-          <a:solidFill>
-            <a:schemeClr val="bg2"/>
-          </a:solidFill>
-          <a:ln/>
-        </p:spPr>
-      </p:sp>
-      <p:sp>
-        <p:nvSpPr>
-          <p:cNvPr id="21" name="Text 18"/>
-          <p:cNvSpPr txBox="1"/>
-          <p:nvPr/>
-        </p:nvSpPr>
-        <p:spPr>
-          <a:xfrm>
-            <a:off x="457200" y="3931920"/>
-            <a:ext cx="1280160" cy="960120"/>
-          </a:xfrm>
-          <a:prstGeom prst="rect">
-            <a:avLst/>
-          </a:prstGeom>
-          <a:noFill/>
-          <a:ln/>
-        </p:spPr>
-        <p:txBody>
-          <a:bodyPr wrap="square" lIns="0" tIns="0" rIns="0" bIns="0" rtlCol="0" anchor="ctr"/>
-          <a:lstStyle/>
-          <a:p>
-            <a:pPr algn="ctr" indent="0" marL="0">
-              <a:buNone/>
-            </a:pPr>
-            <a:r>
-              <a:rPr lang="en-US" sz="1400" b="1" dirty="0">
-                <a:solidFill>
-                  <a:schemeClr val="tx1"/>
-                </a:solidFill>
-              </a:rPr>
-              <a:t>役割</a:t>
-            </a:r>
-            <a:endParaRPr lang="en-US" sz="1400" dirty="0"/>
-          </a:p>
-        </p:txBody>
-      </p:sp>
-      <p:sp>
-        <p:nvSpPr>
-          <p:cNvPr id="22" name="card"/>
-          <p:cNvSpPr/>
-          <p:nvPr/>
-        </p:nvSpPr>
-        <p:spPr>
-          <a:xfrm>
-            <a:off x="1828800" y="3931920"/>
-            <a:ext cx="3337560" cy="960120"/>
-          </a:xfrm>
-          <a:prstGeom prst="roundRect">
-            <a:avLst>
-              <a:gd name="adj" fmla="val 7619"/>
-            </a:avLst>
-          </a:prstGeom>
-          <a:solidFill>
-            <a:schemeClr val="bg2"/>
-          </a:solidFill>
-          <a:ln/>
-        </p:spPr>
-      </p:sp>
-      <p:sp>
-        <p:nvSpPr>
-          <p:cNvPr id="23" name="Text 20"/>
-          <p:cNvSpPr txBox="1"/>
-          <p:nvPr/>
-        </p:nvSpPr>
-        <p:spPr>
-          <a:xfrm>
-            <a:off x="1828800" y="3931920"/>
-            <a:ext cx="3337560" cy="960120"/>
-          </a:xfrm>
-          <a:prstGeom prst="rect">
-            <a:avLst/>
-          </a:prstGeom>
-          <a:noFill/>
-          <a:ln/>
-        </p:spPr>
-        <p:txBody>
-          <a:bodyPr wrap="square" lIns="0" tIns="0" rIns="0" bIns="0" rtlCol="0" anchor="ctr"/>
-          <a:lstStyle/>
-          <a:p>
-            <a:pPr algn="ctr" indent="0" marL="0">
-              <a:buNone/>
-            </a:pPr>
-            <a:r>
-              <a:rPr lang="en-US" sz="1400" dirty="0">
-                <a:solidFill>
-                  <a:schemeClr val="tx1"/>
-                </a:solidFill>
-              </a:rPr>
-              <a:t>インカムで種銭づくり</a:t>
-            </a:r>
-            <a:endParaRPr lang="en-US" sz="1400" dirty="0"/>
-          </a:p>
-        </p:txBody>
-      </p:sp>
-      <p:sp>
-        <p:nvSpPr>
-          <p:cNvPr id="24" name="card"/>
-          <p:cNvSpPr/>
-          <p:nvPr/>
-        </p:nvSpPr>
-        <p:spPr>
-          <a:xfrm>
-            <a:off x="5257800" y="3931920"/>
-            <a:ext cx="3337560" cy="960120"/>
-          </a:xfrm>
-          <a:prstGeom prst="roundRect">
-            <a:avLst>
-              <a:gd name="adj" fmla="val 7619"/>
-            </a:avLst>
-          </a:prstGeom>
-          <a:solidFill>
-            <a:schemeClr val="bg2"/>
-          </a:solidFill>
-          <a:ln/>
-        </p:spPr>
-      </p:sp>
-      <p:sp>
-        <p:nvSpPr>
-          <p:cNvPr id="25" name="Text 22"/>
-          <p:cNvSpPr txBox="1"/>
-          <p:nvPr/>
-        </p:nvSpPr>
-        <p:spPr>
-          <a:xfrm>
-            <a:off x="5257800" y="3931920"/>
-            <a:ext cx="3337560" cy="960120"/>
-          </a:xfrm>
-          <a:prstGeom prst="rect">
-            <a:avLst/>
-          </a:prstGeom>
-          <a:noFill/>
-          <a:ln/>
-        </p:spPr>
-        <p:txBody>
-          <a:bodyPr wrap="square" lIns="0" tIns="0" rIns="0" bIns="0" rtlCol="0" anchor="ctr"/>
-          <a:lstStyle/>
-          <a:p>
-            <a:pPr algn="ctr" indent="0" marL="0">
-              <a:buNone/>
-            </a:pPr>
-            <a:r>
-              <a:rPr lang="en-US" sz="1400" dirty="0">
-                <a:solidFill>
-                  <a:schemeClr val="tx1"/>
-                </a:solidFill>
-              </a:rPr>
-              <a:t>資産の質を高める</a:t>
-            </a:r>
-            <a:endParaRPr lang="en-US" sz="1400" dirty="0"/>
+              <a:t>募集力を上げる</a:t>
+            </a:r>
+            <a:endParaRPr lang="en-US" sz="1100" dirty="0"/>
           </a:p>
         </p:txBody>
       </p:sp>
@@ -22595,7 +22741,7 @@
                   <a:schemeClr val="tx1"/>
                 </a:solidFill>
               </a:rPr>
-              <a:t>練馬区関町南の新築RCマンション</a:t>
+              <a:t>次の段階②：新築のために、東京に戻る</a:t>
             </a:r>
             <a:endParaRPr lang="en-US" sz="2600" dirty="0"/>
           </a:p>
@@ -22609,16 +22755,16 @@
         </p:nvSpPr>
         <p:spPr>
           <a:xfrm>
-            <a:off x="457200" y="1280160"/>
-            <a:ext cx="4023360" cy="3200400"/>
+            <a:off x="1828800" y="1280160"/>
+            <a:ext cx="3337560" cy="457200"/>
           </a:xfrm>
           <a:prstGeom prst="roundRect">
             <a:avLst>
-              <a:gd name="adj" fmla="val 2286"/>
+              <a:gd name="adj" fmla="val 16000"/>
             </a:avLst>
           </a:prstGeom>
           <a:solidFill>
-            <a:schemeClr val="tx1"/>
+            <a:schemeClr val="accent2"/>
           </a:solidFill>
           <a:ln/>
         </p:spPr>
@@ -22631,69 +22777,55 @@
         </p:nvSpPr>
         <p:spPr>
           <a:xfrm>
-            <a:off x="731520" y="1463040"/>
-            <a:ext cx="3474720" cy="914400"/>
-          </a:xfrm>
-          <a:prstGeom prst="rect">
-            <a:avLst/>
-          </a:prstGeom>
-          <a:noFill/>
-          <a:ln/>
-        </p:spPr>
-        <p:txBody>
-          <a:bodyPr wrap="square" lIns="0" tIns="0" rIns="0" bIns="0" rtlCol="0" anchor="t"/>
-          <a:lstStyle/>
-          <a:p>
-            <a:pPr indent="0" marL="0">
-              <a:buNone/>
-            </a:pPr>
-            <a:r>
-              <a:rPr lang="en-US" sz="5400" b="1" dirty="0">
-                <a:solidFill>
-                  <a:schemeClr val="accent1"/>
-                </a:solidFill>
-              </a:rPr>
-              <a:t>17戸</a:t>
-            </a:r>
-            <a:endParaRPr lang="en-US" sz="5400" dirty="0"/>
-          </a:p>
-        </p:txBody>
-      </p:sp>
-      <p:sp>
-        <p:nvSpPr>
-          <p:cNvPr id="6" name="Text 3"/>
-          <p:cNvSpPr txBox="1"/>
-          <p:nvPr/>
-        </p:nvSpPr>
-        <p:spPr>
-          <a:xfrm>
-            <a:off x="731520" y="2468880"/>
-            <a:ext cx="3474720" cy="365760"/>
-          </a:xfrm>
-          <a:prstGeom prst="rect">
-            <a:avLst/>
-          </a:prstGeom>
-          <a:noFill/>
-          <a:ln/>
-        </p:spPr>
-        <p:txBody>
-          <a:bodyPr wrap="square" lIns="0" tIns="0" rIns="0" bIns="0" rtlCol="0" anchor="t"/>
-          <a:lstStyle/>
-          <a:p>
-            <a:pPr indent="0" marL="0">
-              <a:buNone/>
-            </a:pPr>
-            <a:r>
-              <a:rPr lang="en-US" sz="1600" dirty="0">
+            <a:off x="1828800" y="1280160"/>
+            <a:ext cx="3337560" cy="457200"/>
+          </a:xfrm>
+          <a:prstGeom prst="rect">
+            <a:avLst/>
+          </a:prstGeom>
+          <a:noFill/>
+          <a:ln/>
+        </p:spPr>
+        <p:txBody>
+          <a:bodyPr wrap="square" lIns="0" tIns="0" rIns="0" bIns="0" rtlCol="0" anchor="ctr"/>
+          <a:lstStyle/>
+          <a:p>
+            <a:pPr algn="ctr" indent="0" marL="0">
+              <a:buNone/>
+            </a:pPr>
+            <a:r>
+              <a:rPr lang="en-US" sz="1600" b="1" dirty="0">
                 <a:solidFill>
                   <a:schemeClr val="bg1"/>
                 </a:solidFill>
               </a:rPr>
-              <a:t>壁式RC造 地下1階・地上3階</a:t>
+              <a:t>地方の中古</a:t>
             </a:r>
             <a:endParaRPr lang="en-US" sz="1600" dirty="0"/>
           </a:p>
         </p:txBody>
+      </p:sp>
+      <p:sp>
+        <p:nvSpPr>
+          <p:cNvPr id="6" name="card"/>
+          <p:cNvSpPr/>
+          <p:nvPr/>
+        </p:nvSpPr>
+        <p:spPr>
+          <a:xfrm>
+            <a:off x="5257800" y="1280160"/>
+            <a:ext cx="3337560" cy="457200"/>
+          </a:xfrm>
+          <a:prstGeom prst="roundRect">
+            <a:avLst>
+              <a:gd name="adj" fmla="val 16000"/>
+            </a:avLst>
+          </a:prstGeom>
+          <a:solidFill>
+            <a:schemeClr val="accent1"/>
+          </a:solidFill>
+          <a:ln/>
+        </p:spPr>
       </p:sp>
       <p:sp>
         <p:nvSpPr>
@@ -22703,29 +22835,29 @@
         </p:nvSpPr>
         <p:spPr>
           <a:xfrm>
-            <a:off x="731520" y="2926080"/>
-            <a:ext cx="3474720" cy="365760"/>
-          </a:xfrm>
-          <a:prstGeom prst="rect">
-            <a:avLst/>
-          </a:prstGeom>
-          <a:noFill/>
-          <a:ln/>
-        </p:spPr>
-        <p:txBody>
-          <a:bodyPr wrap="square" lIns="0" tIns="0" rIns="0" bIns="0" rtlCol="0" anchor="t"/>
-          <a:lstStyle/>
-          <a:p>
-            <a:pPr indent="0" marL="0">
+            <a:off x="5257800" y="1280160"/>
+            <a:ext cx="3337560" cy="457200"/>
+          </a:xfrm>
+          <a:prstGeom prst="rect">
+            <a:avLst/>
+          </a:prstGeom>
+          <a:noFill/>
+          <a:ln/>
+        </p:spPr>
+        <p:txBody>
+          <a:bodyPr wrap="square" lIns="0" tIns="0" rIns="0" bIns="0" rtlCol="0" anchor="ctr"/>
+          <a:lstStyle/>
+          <a:p>
+            <a:pPr algn="ctr" indent="0" marL="0">
               <a:buNone/>
             </a:pPr>
             <a:r>
               <a:rPr lang="en-US" sz="1600" b="1" dirty="0">
                 <a:solidFill>
-                  <a:schemeClr val="accent6"/>
-                </a:solidFill>
-              </a:rPr>
-              <a:t>総事業費 約4.2億円（未確定）</a:t>
+                  <a:schemeClr val="tx1"/>
+                </a:solidFill>
+              </a:rPr>
+              <a:t>東京の新築</a:t>
             </a:r>
             <a:endParaRPr lang="en-US" sz="1600" dirty="0"/>
           </a:p>
@@ -22733,39 +22865,25 @@
       </p:sp>
       <p:sp>
         <p:nvSpPr>
-          <p:cNvPr id="8" name="Text 5"/>
-          <p:cNvSpPr txBox="1"/>
-          <p:nvPr/>
-        </p:nvSpPr>
-        <p:spPr>
-          <a:xfrm>
-            <a:off x="731520" y="3840480"/>
-            <a:ext cx="3474720" cy="365760"/>
-          </a:xfrm>
-          <a:prstGeom prst="rect">
-            <a:avLst/>
-          </a:prstGeom>
-          <a:noFill/>
-          <a:ln/>
-        </p:spPr>
-        <p:txBody>
-          <a:bodyPr wrap="square" lIns="0" tIns="0" rIns="0" bIns="0" rtlCol="0" anchor="t"/>
-          <a:lstStyle/>
-          <a:p>
-            <a:pPr indent="0" marL="0">
-              <a:buNone/>
-            </a:pPr>
-            <a:r>
-              <a:rPr lang="en-US" sz="1300" dirty="0">
-                <a:solidFill>
-                  <a:schemeClr val="bg2"/>
-                </a:solidFill>
-              </a:rPr>
-              <a:t>東京都練馬区関町南4丁目</a:t>
-            </a:r>
-            <a:endParaRPr lang="en-US" sz="1300" dirty="0"/>
-          </a:p>
-        </p:txBody>
+          <p:cNvPr id="8" name="card"/>
+          <p:cNvSpPr/>
+          <p:nvPr/>
+        </p:nvSpPr>
+        <p:spPr>
+          <a:xfrm>
+            <a:off x="457200" y="1828800"/>
+            <a:ext cx="1280160" cy="960120"/>
+          </a:xfrm>
+          <a:prstGeom prst="roundRect">
+            <a:avLst>
+              <a:gd name="adj" fmla="val 7619"/>
+            </a:avLst>
+          </a:prstGeom>
+          <a:solidFill>
+            <a:schemeClr val="bg2"/>
+          </a:solidFill>
+          <a:ln/>
+        </p:spPr>
       </p:sp>
       <p:sp>
         <p:nvSpPr>
@@ -22775,8 +22893,8 @@
         </p:nvSpPr>
         <p:spPr>
           <a:xfrm>
-            <a:off x="4754880" y="1325880"/>
-            <a:ext cx="1188720" cy="502920"/>
+            <a:off x="457200" y="1828800"/>
+            <a:ext cx="1280160" cy="960120"/>
           </a:xfrm>
           <a:prstGeom prst="rect">
             <a:avLst/>
@@ -22788,56 +22906,42 @@
           <a:bodyPr wrap="square" lIns="0" tIns="0" rIns="0" bIns="0" rtlCol="0" anchor="ctr"/>
           <a:lstStyle/>
           <a:p>
-            <a:pPr indent="0" marL="0">
-              <a:buNone/>
-            </a:pPr>
-            <a:r>
-              <a:rPr lang="en-US" sz="1300" b="1" dirty="0">
-                <a:solidFill>
-                  <a:schemeClr val="accent2"/>
-                </a:solidFill>
-              </a:rPr>
-              <a:t>最寄駅</a:t>
-            </a:r>
-            <a:endParaRPr lang="en-US" sz="1300" dirty="0"/>
-          </a:p>
-        </p:txBody>
-      </p:sp>
-      <p:sp>
-        <p:nvSpPr>
-          <p:cNvPr id="10" name="Text 7"/>
-          <p:cNvSpPr txBox="1"/>
-          <p:nvPr/>
-        </p:nvSpPr>
-        <p:spPr>
-          <a:xfrm>
-            <a:off x="5897880" y="1325880"/>
-            <a:ext cx="2834640" cy="502920"/>
-          </a:xfrm>
-          <a:prstGeom prst="rect">
-            <a:avLst/>
-          </a:prstGeom>
-          <a:noFill/>
-          <a:ln/>
-        </p:spPr>
-        <p:txBody>
-          <a:bodyPr wrap="square" lIns="0" tIns="0" rIns="0" bIns="0" rtlCol="0" anchor="ctr"/>
-          <a:lstStyle/>
-          <a:p>
-            <a:pPr indent="0" marL="0">
-              <a:buNone/>
-            </a:pPr>
-            <a:r>
-              <a:rPr lang="en-US" sz="1300" dirty="0">
+            <a:pPr algn="ctr" indent="0" marL="0">
+              <a:buNone/>
+            </a:pPr>
+            <a:r>
+              <a:rPr lang="en-US" sz="1400" b="1" dirty="0">
                 <a:solidFill>
                   <a:schemeClr val="tx1"/>
                 </a:solidFill>
               </a:rPr>
-              <a:t>西武新宿線 武蔵関駅 徒歩10分</a:t>
-            </a:r>
-            <a:endParaRPr lang="en-US" sz="1300" dirty="0"/>
-          </a:p>
-        </p:txBody>
+              <a:t>強み</a:t>
+            </a:r>
+            <a:endParaRPr lang="en-US" sz="1400" dirty="0"/>
+          </a:p>
+        </p:txBody>
+      </p:sp>
+      <p:sp>
+        <p:nvSpPr>
+          <p:cNvPr id="10" name="card"/>
+          <p:cNvSpPr/>
+          <p:nvPr/>
+        </p:nvSpPr>
+        <p:spPr>
+          <a:xfrm>
+            <a:off x="1828800" y="1828800"/>
+            <a:ext cx="3337560" cy="960120"/>
+          </a:xfrm>
+          <a:prstGeom prst="roundRect">
+            <a:avLst>
+              <a:gd name="adj" fmla="val 7619"/>
+            </a:avLst>
+          </a:prstGeom>
+          <a:solidFill>
+            <a:schemeClr val="bg2"/>
+          </a:solidFill>
+          <a:ln/>
+        </p:spPr>
       </p:sp>
       <p:sp>
         <p:nvSpPr>
@@ -22847,8 +22951,8 @@
         </p:nvSpPr>
         <p:spPr>
           <a:xfrm>
-            <a:off x="4754880" y="1965960"/>
-            <a:ext cx="1188720" cy="502920"/>
+            <a:off x="1828800" y="1828800"/>
+            <a:ext cx="3337560" cy="960120"/>
           </a:xfrm>
           <a:prstGeom prst="rect">
             <a:avLst/>
@@ -22860,56 +22964,56 @@
           <a:bodyPr wrap="square" lIns="0" tIns="0" rIns="0" bIns="0" rtlCol="0" anchor="ctr"/>
           <a:lstStyle/>
           <a:p>
-            <a:pPr indent="0" marL="0">
-              <a:buNone/>
-            </a:pPr>
-            <a:r>
-              <a:rPr lang="en-US" sz="1300" b="1" dirty="0">
-                <a:solidFill>
-                  <a:schemeClr val="accent2"/>
-                </a:solidFill>
-              </a:rPr>
-              <a:t>土地面積</a:t>
-            </a:r>
-            <a:endParaRPr lang="en-US" sz="1300" dirty="0"/>
-          </a:p>
-        </p:txBody>
-      </p:sp>
-      <p:sp>
-        <p:nvSpPr>
-          <p:cNvPr id="12" name="Text 9"/>
-          <p:cNvSpPr txBox="1"/>
-          <p:nvPr/>
-        </p:nvSpPr>
-        <p:spPr>
-          <a:xfrm>
-            <a:off x="5897880" y="1965960"/>
-            <a:ext cx="2834640" cy="502920"/>
-          </a:xfrm>
-          <a:prstGeom prst="rect">
-            <a:avLst/>
-          </a:prstGeom>
-          <a:noFill/>
-          <a:ln/>
-        </p:spPr>
-        <p:txBody>
-          <a:bodyPr wrap="square" lIns="0" tIns="0" rIns="0" bIns="0" rtlCol="0" anchor="ctr"/>
-          <a:lstStyle/>
-          <a:p>
-            <a:pPr indent="0" marL="0">
-              <a:buNone/>
-            </a:pPr>
-            <a:r>
-              <a:rPr lang="en-US" sz="1300" dirty="0">
+            <a:pPr algn="ctr" indent="0" marL="0">
+              <a:buNone/>
+            </a:pPr>
+            <a:r>
+              <a:rPr lang="en-US" sz="1400" dirty="0">
                 <a:solidFill>
                   <a:schemeClr val="tx1"/>
                 </a:solidFill>
               </a:rPr>
-              <a:t>242.21㎡（約73.3坪）</a:t>
-            </a:r>
-            <a:endParaRPr lang="en-US" sz="1300" dirty="0"/>
-          </a:p>
-        </p:txBody>
+              <a:t>高利回り・高積算</a:t>
+            </a:r>
+            <a:endParaRPr lang="en-US" sz="1400" dirty="0"/>
+          </a:p>
+          <a:p>
+            <a:pPr algn="ctr" indent="0" marL="0">
+              <a:buNone/>
+            </a:pPr>
+            <a:r>
+              <a:rPr lang="en-US" sz="1400" dirty="0">
+                <a:solidFill>
+                  <a:schemeClr val="tx1"/>
+                </a:solidFill>
+              </a:rPr>
+              <a:t>買いやすい</a:t>
+            </a:r>
+            <a:endParaRPr lang="en-US" sz="1400" dirty="0"/>
+          </a:p>
+        </p:txBody>
+      </p:sp>
+      <p:sp>
+        <p:nvSpPr>
+          <p:cNvPr id="12" name="card"/>
+          <p:cNvSpPr/>
+          <p:nvPr/>
+        </p:nvSpPr>
+        <p:spPr>
+          <a:xfrm>
+            <a:off x="5257800" y="1828800"/>
+            <a:ext cx="3337560" cy="960120"/>
+          </a:xfrm>
+          <a:prstGeom prst="roundRect">
+            <a:avLst>
+              <a:gd name="adj" fmla="val 7619"/>
+            </a:avLst>
+          </a:prstGeom>
+          <a:solidFill>
+            <a:schemeClr val="bg2"/>
+          </a:solidFill>
+          <a:ln/>
+        </p:spPr>
       </p:sp>
       <p:sp>
         <p:nvSpPr>
@@ -22919,8 +23023,8 @@
         </p:nvSpPr>
         <p:spPr>
           <a:xfrm>
-            <a:off x="4754880" y="2606040"/>
-            <a:ext cx="1188720" cy="502920"/>
+            <a:off x="5257800" y="1828800"/>
+            <a:ext cx="3337560" cy="960120"/>
           </a:xfrm>
           <a:prstGeom prst="rect">
             <a:avLst/>
@@ -22932,56 +23036,56 @@
           <a:bodyPr wrap="square" lIns="0" tIns="0" rIns="0" bIns="0" rtlCol="0" anchor="ctr"/>
           <a:lstStyle/>
           <a:p>
-            <a:pPr indent="0" marL="0">
-              <a:buNone/>
-            </a:pPr>
-            <a:r>
-              <a:rPr lang="en-US" sz="1300" b="1" dirty="0">
-                <a:solidFill>
-                  <a:schemeClr val="accent2"/>
-                </a:solidFill>
-              </a:rPr>
-              <a:t>延床面積</a:t>
-            </a:r>
-            <a:endParaRPr lang="en-US" sz="1300" dirty="0"/>
-          </a:p>
-        </p:txBody>
-      </p:sp>
-      <p:sp>
-        <p:nvSpPr>
-          <p:cNvPr id="14" name="Text 11"/>
-          <p:cNvSpPr txBox="1"/>
-          <p:nvPr/>
-        </p:nvSpPr>
-        <p:spPr>
-          <a:xfrm>
-            <a:off x="5897880" y="2606040"/>
-            <a:ext cx="2834640" cy="502920"/>
-          </a:xfrm>
-          <a:prstGeom prst="rect">
-            <a:avLst/>
-          </a:prstGeom>
-          <a:noFill/>
-          <a:ln/>
-        </p:spPr>
-        <p:txBody>
-          <a:bodyPr wrap="square" lIns="0" tIns="0" rIns="0" bIns="0" rtlCol="0" anchor="ctr"/>
-          <a:lstStyle/>
-          <a:p>
-            <a:pPr indent="0" marL="0">
-              <a:buNone/>
-            </a:pPr>
-            <a:r>
-              <a:rPr lang="en-US" sz="1300" dirty="0">
+            <a:pPr algn="ctr" indent="0" marL="0">
+              <a:buNone/>
+            </a:pPr>
+            <a:r>
+              <a:rPr lang="en-US" sz="1400" dirty="0">
                 <a:solidFill>
                   <a:schemeClr val="tx1"/>
                 </a:solidFill>
               </a:rPr>
-              <a:t>617.84㎡（約186.9坪）</a:t>
-            </a:r>
-            <a:endParaRPr lang="en-US" sz="1300" dirty="0"/>
-          </a:p>
-        </p:txBody>
+              <a:t>資産性が高い</a:t>
+            </a:r>
+            <a:endParaRPr lang="en-US" sz="1400" dirty="0"/>
+          </a:p>
+          <a:p>
+            <a:pPr algn="ctr" indent="0" marL="0">
+              <a:buNone/>
+            </a:pPr>
+            <a:r>
+              <a:rPr lang="en-US" sz="1400" dirty="0">
+                <a:solidFill>
+                  <a:schemeClr val="tx1"/>
+                </a:solidFill>
+              </a:rPr>
+              <a:t>売りやすい・貸しやすい</a:t>
+            </a:r>
+            <a:endParaRPr lang="en-US" sz="1400" dirty="0"/>
+          </a:p>
+        </p:txBody>
+      </p:sp>
+      <p:sp>
+        <p:nvSpPr>
+          <p:cNvPr id="14" name="card"/>
+          <p:cNvSpPr/>
+          <p:nvPr/>
+        </p:nvSpPr>
+        <p:spPr>
+          <a:xfrm>
+            <a:off x="457200" y="2880360"/>
+            <a:ext cx="1280160" cy="960120"/>
+          </a:xfrm>
+          <a:prstGeom prst="roundRect">
+            <a:avLst>
+              <a:gd name="adj" fmla="val 7619"/>
+            </a:avLst>
+          </a:prstGeom>
+          <a:solidFill>
+            <a:schemeClr val="bg2"/>
+          </a:solidFill>
+          <a:ln/>
+        </p:spPr>
       </p:sp>
       <p:sp>
         <p:nvSpPr>
@@ -22991,8 +23095,8 @@
         </p:nvSpPr>
         <p:spPr>
           <a:xfrm>
-            <a:off x="4754880" y="3246120"/>
-            <a:ext cx="1188720" cy="502920"/>
+            <a:off x="457200" y="2880360"/>
+            <a:ext cx="1280160" cy="960120"/>
           </a:xfrm>
           <a:prstGeom prst="rect">
             <a:avLst/>
@@ -23004,56 +23108,42 @@
           <a:bodyPr wrap="square" lIns="0" tIns="0" rIns="0" bIns="0" rtlCol="0" anchor="ctr"/>
           <a:lstStyle/>
           <a:p>
-            <a:pPr indent="0" marL="0">
-              <a:buNone/>
-            </a:pPr>
-            <a:r>
-              <a:rPr lang="en-US" sz="1300" b="1" dirty="0">
-                <a:solidFill>
-                  <a:schemeClr val="accent2"/>
-                </a:solidFill>
-              </a:rPr>
-              <a:t>用途地域</a:t>
-            </a:r>
-            <a:endParaRPr lang="en-US" sz="1300" dirty="0"/>
-          </a:p>
-        </p:txBody>
-      </p:sp>
-      <p:sp>
-        <p:nvSpPr>
-          <p:cNvPr id="16" name="Text 13"/>
-          <p:cNvSpPr txBox="1"/>
-          <p:nvPr/>
-        </p:nvSpPr>
-        <p:spPr>
-          <a:xfrm>
-            <a:off x="5897880" y="3246120"/>
-            <a:ext cx="2834640" cy="502920"/>
-          </a:xfrm>
-          <a:prstGeom prst="rect">
-            <a:avLst/>
-          </a:prstGeom>
-          <a:noFill/>
-          <a:ln/>
-        </p:spPr>
-        <p:txBody>
-          <a:bodyPr wrap="square" lIns="0" tIns="0" rIns="0" bIns="0" rtlCol="0" anchor="ctr"/>
-          <a:lstStyle/>
-          <a:p>
-            <a:pPr indent="0" marL="0">
-              <a:buNone/>
-            </a:pPr>
-            <a:r>
-              <a:rPr lang="en-US" sz="1300" dirty="0">
+            <a:pPr algn="ctr" indent="0" marL="0">
+              <a:buNone/>
+            </a:pPr>
+            <a:r>
+              <a:rPr lang="en-US" sz="1400" b="1" dirty="0">
                 <a:solidFill>
                   <a:schemeClr val="tx1"/>
                 </a:solidFill>
               </a:rPr>
-              <a:t>近隣商業 / 第一種低層住居専用</a:t>
-            </a:r>
-            <a:endParaRPr lang="en-US" sz="1300" dirty="0"/>
-          </a:p>
-        </p:txBody>
+              <a:t>弱み</a:t>
+            </a:r>
+            <a:endParaRPr lang="en-US" sz="1400" dirty="0"/>
+          </a:p>
+        </p:txBody>
+      </p:sp>
+      <p:sp>
+        <p:nvSpPr>
+          <p:cNvPr id="16" name="card"/>
+          <p:cNvSpPr/>
+          <p:nvPr/>
+        </p:nvSpPr>
+        <p:spPr>
+          <a:xfrm>
+            <a:off x="1828800" y="2880360"/>
+            <a:ext cx="3337560" cy="960120"/>
+          </a:xfrm>
+          <a:prstGeom prst="roundRect">
+            <a:avLst>
+              <a:gd name="adj" fmla="val 7619"/>
+            </a:avLst>
+          </a:prstGeom>
+          <a:solidFill>
+            <a:schemeClr val="bg2"/>
+          </a:solidFill>
+          <a:ln/>
+        </p:spPr>
       </p:sp>
       <p:sp>
         <p:nvSpPr>
@@ -23063,8 +23153,8 @@
         </p:nvSpPr>
         <p:spPr>
           <a:xfrm>
-            <a:off x="4754880" y="3886200"/>
-            <a:ext cx="1188720" cy="502920"/>
+            <a:off x="1828800" y="2880360"/>
+            <a:ext cx="3337560" cy="960120"/>
           </a:xfrm>
           <a:prstGeom prst="rect">
             <a:avLst/>
@@ -23076,31 +23166,67 @@
           <a:bodyPr wrap="square" lIns="0" tIns="0" rIns="0" bIns="0" rtlCol="0" anchor="ctr"/>
           <a:lstStyle/>
           <a:p>
-            <a:pPr indent="0" marL="0">
-              <a:buNone/>
-            </a:pPr>
-            <a:r>
-              <a:rPr lang="en-US" sz="1300" b="1" dirty="0">
-                <a:solidFill>
-                  <a:schemeClr val="accent2"/>
-                </a:solidFill>
-              </a:rPr>
-              <a:t>住戸構成</a:t>
-            </a:r>
-            <a:endParaRPr lang="en-US" sz="1300" dirty="0"/>
-          </a:p>
-        </p:txBody>
-      </p:sp>
-      <p:sp>
-        <p:nvSpPr>
-          <p:cNvPr id="18" name="Text 15"/>
+            <a:pPr algn="ctr" indent="0" marL="0">
+              <a:buNone/>
+            </a:pPr>
+            <a:r>
+              <a:rPr lang="en-US" sz="1400" dirty="0">
+                <a:solidFill>
+                  <a:schemeClr val="tx1"/>
+                </a:solidFill>
+              </a:rPr>
+              <a:t>出口が読みにくい</a:t>
+            </a:r>
+            <a:endParaRPr lang="en-US" sz="1400" dirty="0"/>
+          </a:p>
+          <a:p>
+            <a:pPr algn="ctr" indent="0" marL="0">
+              <a:buNone/>
+            </a:pPr>
+            <a:r>
+              <a:rPr lang="en-US" sz="1400" dirty="0">
+                <a:solidFill>
+                  <a:schemeClr val="tx1"/>
+                </a:solidFill>
+              </a:rPr>
+              <a:t>人口減少</a:t>
+            </a:r>
+            <a:endParaRPr lang="en-US" sz="1400" dirty="0"/>
+          </a:p>
+        </p:txBody>
+      </p:sp>
+      <p:sp>
+        <p:nvSpPr>
+          <p:cNvPr id="18" name="card"/>
+          <p:cNvSpPr/>
+          <p:nvPr/>
+        </p:nvSpPr>
+        <p:spPr>
+          <a:xfrm>
+            <a:off x="5257800" y="2880360"/>
+            <a:ext cx="3337560" cy="960120"/>
+          </a:xfrm>
+          <a:prstGeom prst="roundRect">
+            <a:avLst>
+              <a:gd name="adj" fmla="val 7619"/>
+            </a:avLst>
+          </a:prstGeom>
+          <a:solidFill>
+            <a:schemeClr val="bg2"/>
+          </a:solidFill>
+          <a:ln/>
+        </p:spPr>
+      </p:sp>
+      <p:sp>
+        <p:nvSpPr>
+          <p:cNvPr id="19" name="Text 16"/>
           <p:cNvSpPr txBox="1"/>
           <p:nvPr/>
         </p:nvSpPr>
         <p:spPr>
           <a:xfrm>
-            <a:off x="5897880" y="3886200"/>
-            <a:ext cx="2834640" cy="502920"/>
+            <a:off x="5257800" y="2880360"/>
+            <a:ext cx="3337560" cy="960120"/>
           </a:xfrm>
           <a:prstGeom prst="rect">
             <a:avLst/>
@@ -23112,18 +23238,206 @@
           <a:bodyPr wrap="square" lIns="0" tIns="0" rIns="0" bIns="0" rtlCol="0" anchor="ctr"/>
           <a:lstStyle/>
           <a:p>
-            <a:pPr indent="0" marL="0">
-              <a:buNone/>
-            </a:pPr>
-            <a:r>
-              <a:rPr lang="en-US" sz="1300" dirty="0">
+            <a:pPr algn="ctr" indent="0" marL="0">
+              <a:buNone/>
+            </a:pPr>
+            <a:r>
+              <a:rPr lang="en-US" sz="1400" dirty="0">
                 <a:solidFill>
                   <a:schemeClr val="tx1"/>
                 </a:solidFill>
               </a:rPr>
-              <a:t>1K・1LDK・2LDK（17戸）</a:t>
-            </a:r>
-            <a:endParaRPr lang="en-US" sz="1300" dirty="0"/>
+              <a:t>利回りは低め</a:t>
+            </a:r>
+            <a:endParaRPr lang="en-US" sz="1400" dirty="0"/>
+          </a:p>
+          <a:p>
+            <a:pPr algn="ctr" indent="0" marL="0">
+              <a:buNone/>
+            </a:pPr>
+            <a:r>
+              <a:rPr lang="en-US" sz="1400" dirty="0">
+                <a:solidFill>
+                  <a:schemeClr val="tx1"/>
+                </a:solidFill>
+              </a:rPr>
+              <a:t>土地が高い</a:t>
+            </a:r>
+            <a:endParaRPr lang="en-US" sz="1400" dirty="0"/>
+          </a:p>
+        </p:txBody>
+      </p:sp>
+      <p:sp>
+        <p:nvSpPr>
+          <p:cNvPr id="20" name="card"/>
+          <p:cNvSpPr/>
+          <p:nvPr/>
+        </p:nvSpPr>
+        <p:spPr>
+          <a:xfrm>
+            <a:off x="457200" y="3931920"/>
+            <a:ext cx="1280160" cy="960120"/>
+          </a:xfrm>
+          <a:prstGeom prst="roundRect">
+            <a:avLst>
+              <a:gd name="adj" fmla="val 7619"/>
+            </a:avLst>
+          </a:prstGeom>
+          <a:solidFill>
+            <a:schemeClr val="bg2"/>
+          </a:solidFill>
+          <a:ln/>
+        </p:spPr>
+      </p:sp>
+      <p:sp>
+        <p:nvSpPr>
+          <p:cNvPr id="21" name="Text 18"/>
+          <p:cNvSpPr txBox="1"/>
+          <p:nvPr/>
+        </p:nvSpPr>
+        <p:spPr>
+          <a:xfrm>
+            <a:off x="457200" y="3931920"/>
+            <a:ext cx="1280160" cy="960120"/>
+          </a:xfrm>
+          <a:prstGeom prst="rect">
+            <a:avLst/>
+          </a:prstGeom>
+          <a:noFill/>
+          <a:ln/>
+        </p:spPr>
+        <p:txBody>
+          <a:bodyPr wrap="square" lIns="0" tIns="0" rIns="0" bIns="0" rtlCol="0" anchor="ctr"/>
+          <a:lstStyle/>
+          <a:p>
+            <a:pPr algn="ctr" indent="0" marL="0">
+              <a:buNone/>
+            </a:pPr>
+            <a:r>
+              <a:rPr lang="en-US" sz="1400" b="1" dirty="0">
+                <a:solidFill>
+                  <a:schemeClr val="tx1"/>
+                </a:solidFill>
+              </a:rPr>
+              <a:t>役割</a:t>
+            </a:r>
+            <a:endParaRPr lang="en-US" sz="1400" dirty="0"/>
+          </a:p>
+        </p:txBody>
+      </p:sp>
+      <p:sp>
+        <p:nvSpPr>
+          <p:cNvPr id="22" name="card"/>
+          <p:cNvSpPr/>
+          <p:nvPr/>
+        </p:nvSpPr>
+        <p:spPr>
+          <a:xfrm>
+            <a:off x="1828800" y="3931920"/>
+            <a:ext cx="3337560" cy="960120"/>
+          </a:xfrm>
+          <a:prstGeom prst="roundRect">
+            <a:avLst>
+              <a:gd name="adj" fmla="val 7619"/>
+            </a:avLst>
+          </a:prstGeom>
+          <a:solidFill>
+            <a:schemeClr val="bg2"/>
+          </a:solidFill>
+          <a:ln/>
+        </p:spPr>
+      </p:sp>
+      <p:sp>
+        <p:nvSpPr>
+          <p:cNvPr id="23" name="Text 20"/>
+          <p:cNvSpPr txBox="1"/>
+          <p:nvPr/>
+        </p:nvSpPr>
+        <p:spPr>
+          <a:xfrm>
+            <a:off x="1828800" y="3931920"/>
+            <a:ext cx="3337560" cy="960120"/>
+          </a:xfrm>
+          <a:prstGeom prst="rect">
+            <a:avLst/>
+          </a:prstGeom>
+          <a:noFill/>
+          <a:ln/>
+        </p:spPr>
+        <p:txBody>
+          <a:bodyPr wrap="square" lIns="0" tIns="0" rIns="0" bIns="0" rtlCol="0" anchor="ctr"/>
+          <a:lstStyle/>
+          <a:p>
+            <a:pPr algn="ctr" indent="0" marL="0">
+              <a:buNone/>
+            </a:pPr>
+            <a:r>
+              <a:rPr lang="en-US" sz="1400" dirty="0">
+                <a:solidFill>
+                  <a:schemeClr val="tx1"/>
+                </a:solidFill>
+              </a:rPr>
+              <a:t>インカムで種銭づくり</a:t>
+            </a:r>
+            <a:endParaRPr lang="en-US" sz="1400" dirty="0"/>
+          </a:p>
+        </p:txBody>
+      </p:sp>
+      <p:sp>
+        <p:nvSpPr>
+          <p:cNvPr id="24" name="card"/>
+          <p:cNvSpPr/>
+          <p:nvPr/>
+        </p:nvSpPr>
+        <p:spPr>
+          <a:xfrm>
+            <a:off x="5257800" y="3931920"/>
+            <a:ext cx="3337560" cy="960120"/>
+          </a:xfrm>
+          <a:prstGeom prst="roundRect">
+            <a:avLst>
+              <a:gd name="adj" fmla="val 7619"/>
+            </a:avLst>
+          </a:prstGeom>
+          <a:solidFill>
+            <a:schemeClr val="bg2"/>
+          </a:solidFill>
+          <a:ln/>
+        </p:spPr>
+      </p:sp>
+      <p:sp>
+        <p:nvSpPr>
+          <p:cNvPr id="25" name="Text 22"/>
+          <p:cNvSpPr txBox="1"/>
+          <p:nvPr/>
+        </p:nvSpPr>
+        <p:spPr>
+          <a:xfrm>
+            <a:off x="5257800" y="3931920"/>
+            <a:ext cx="3337560" cy="960120"/>
+          </a:xfrm>
+          <a:prstGeom prst="rect">
+            <a:avLst/>
+          </a:prstGeom>
+          <a:noFill/>
+          <a:ln/>
+        </p:spPr>
+        <p:txBody>
+          <a:bodyPr wrap="square" lIns="0" tIns="0" rIns="0" bIns="0" rtlCol="0" anchor="ctr"/>
+          <a:lstStyle/>
+          <a:p>
+            <a:pPr algn="ctr" indent="0" marL="0">
+              <a:buNone/>
+            </a:pPr>
+            <a:r>
+              <a:rPr lang="en-US" sz="1400" dirty="0">
+                <a:solidFill>
+                  <a:schemeClr val="tx1"/>
+                </a:solidFill>
+              </a:rPr>
+              <a:t>資産の質を高める</a:t>
+            </a:r>
+            <a:endParaRPr lang="en-US" sz="1400" dirty="0"/>
           </a:p>
         </p:txBody>
       </p:sp>
@@ -23229,7 +23543,7 @@
                   <a:schemeClr val="tx1"/>
                 </a:solidFill>
               </a:rPr>
-              <a:t>計画の進め方：竣工は2028年3月ごろを想定</a:t>
+              <a:t>練馬区関町南の新築RCマンション</a:t>
             </a:r>
             <a:endParaRPr lang="en-US" sz="2600" dirty="0"/>
           </a:p>
@@ -23237,46 +23551,61 @@
       </p:sp>
       <p:sp>
         <p:nvSpPr>
-          <p:cNvPr id="4" name="Shape 1"/>
+          <p:cNvPr id="4" name="card"/>
           <p:cNvSpPr/>
           <p:nvPr/>
         </p:nvSpPr>
         <p:spPr>
           <a:xfrm>
-            <a:off x="1097280" y="2011680"/>
-            <a:ext cx="6949440" cy="0"/>
-          </a:xfrm>
-          <a:prstGeom prst="line">
-            <a:avLst/>
-          </a:prstGeom>
-          <a:noFill/>
-          <a:ln w="25400">
-            <a:solidFill>
-              <a:schemeClr val="accent4"/>
-            </a:solidFill>
-            <a:prstDash val="solid"/>
-          </a:ln>
-        </p:spPr>
-      </p:sp>
-      <p:sp>
-        <p:nvSpPr>
-          <p:cNvPr id="5" name="badge"/>
-          <p:cNvSpPr/>
-          <p:nvPr/>
-        </p:nvSpPr>
-        <p:spPr>
-          <a:xfrm>
-            <a:off x="1097280" y="1737360"/>
-            <a:ext cx="548640" cy="548640"/>
-          </a:xfrm>
-          <a:prstGeom prst="ellipse">
-            <a:avLst/>
+            <a:off x="457200" y="1280160"/>
+            <a:ext cx="4023360" cy="3200400"/>
+          </a:xfrm>
+          <a:prstGeom prst="roundRect">
+            <a:avLst>
+              <a:gd name="adj" fmla="val 2286"/>
+            </a:avLst>
           </a:prstGeom>
           <a:solidFill>
-            <a:schemeClr val="accent1"/>
+            <a:schemeClr val="tx1"/>
           </a:solidFill>
           <a:ln/>
         </p:spPr>
+      </p:sp>
+      <p:sp>
+        <p:nvSpPr>
+          <p:cNvPr id="5" name="Text 2"/>
+          <p:cNvSpPr txBox="1"/>
+          <p:nvPr/>
+        </p:nvSpPr>
+        <p:spPr>
+          <a:xfrm>
+            <a:off x="731520" y="1463040"/>
+            <a:ext cx="3474720" cy="914400"/>
+          </a:xfrm>
+          <a:prstGeom prst="rect">
+            <a:avLst/>
+          </a:prstGeom>
+          <a:noFill/>
+          <a:ln/>
+        </p:spPr>
+        <p:txBody>
+          <a:bodyPr wrap="square" lIns="0" tIns="0" rIns="0" bIns="0" rtlCol="0" anchor="t"/>
+          <a:lstStyle/>
+          <a:p>
+            <a:pPr indent="0" marL="0">
+              <a:buNone/>
+            </a:pPr>
+            <a:r>
+              <a:rPr lang="en-US" sz="5400" b="1" dirty="0">
+                <a:solidFill>
+                  <a:schemeClr val="accent1"/>
+                </a:solidFill>
+              </a:rPr>
+              <a:t>17戸</a:t>
+            </a:r>
+            <a:endParaRPr lang="en-US" sz="5400" dirty="0"/>
+          </a:p>
+        </p:txBody>
       </p:sp>
       <p:sp>
         <p:nvSpPr>
@@ -23286,31 +23615,31 @@
         </p:nvSpPr>
         <p:spPr>
           <a:xfrm>
-            <a:off x="1097280" y="1737360"/>
-            <a:ext cx="548640" cy="548640"/>
-          </a:xfrm>
-          <a:prstGeom prst="rect">
-            <a:avLst/>
-          </a:prstGeom>
-          <a:noFill/>
-          <a:ln/>
-        </p:spPr>
-        <p:txBody>
-          <a:bodyPr wrap="square" lIns="0" tIns="0" rIns="0" bIns="0" rtlCol="0" anchor="ctr"/>
-          <a:lstStyle/>
-          <a:p>
-            <a:pPr algn="ctr" indent="0" marL="0">
-              <a:buNone/>
-            </a:pPr>
-            <a:r>
-              <a:rPr lang="en-US" sz="1800" b="1" dirty="0">
-                <a:solidFill>
-                  <a:schemeClr val="tx1"/>
-                </a:solidFill>
-              </a:rPr>
-              <a:t>1</a:t>
-            </a:r>
-            <a:endParaRPr lang="en-US" sz="1800" dirty="0"/>
+            <a:off x="731520" y="2468880"/>
+            <a:ext cx="3474720" cy="365760"/>
+          </a:xfrm>
+          <a:prstGeom prst="rect">
+            <a:avLst/>
+          </a:prstGeom>
+          <a:noFill/>
+          <a:ln/>
+        </p:spPr>
+        <p:txBody>
+          <a:bodyPr wrap="square" lIns="0" tIns="0" rIns="0" bIns="0" rtlCol="0" anchor="t"/>
+          <a:lstStyle/>
+          <a:p>
+            <a:pPr indent="0" marL="0">
+              <a:buNone/>
+            </a:pPr>
+            <a:r>
+              <a:rPr lang="en-US" sz="1600" dirty="0">
+                <a:solidFill>
+                  <a:schemeClr val="bg1"/>
+                </a:solidFill>
+              </a:rPr>
+              <a:t>壁式RC造 地下1階・地上3階</a:t>
+            </a:r>
+            <a:endParaRPr lang="en-US" sz="1600" dirty="0"/>
           </a:p>
         </p:txBody>
       </p:sp>
@@ -23322,8 +23651,8 @@
         </p:nvSpPr>
         <p:spPr>
           <a:xfrm>
-            <a:off x="457200" y="1188720"/>
-            <a:ext cx="1828800" cy="365760"/>
+            <a:off x="731520" y="2926080"/>
+            <a:ext cx="3474720" cy="365760"/>
           </a:xfrm>
           <a:prstGeom prst="rect">
             <a:avLst/>
@@ -23335,18 +23664,18 @@
           <a:bodyPr wrap="square" lIns="0" tIns="0" rIns="0" bIns="0" rtlCol="0" anchor="t"/>
           <a:lstStyle/>
           <a:p>
-            <a:pPr algn="ctr" indent="0" marL="0">
-              <a:buNone/>
-            </a:pPr>
-            <a:r>
-              <a:rPr lang="en-US" sz="1400" b="1" dirty="0">
-                <a:solidFill>
-                  <a:schemeClr val="tx1"/>
-                </a:solidFill>
-              </a:rPr>
-              <a:t>2026年10月</a:t>
-            </a:r>
-            <a:endParaRPr lang="en-US" sz="1400" dirty="0"/>
+            <a:pPr indent="0" marL="0">
+              <a:buNone/>
+            </a:pPr>
+            <a:r>
+              <a:rPr lang="en-US" sz="1600" b="1" dirty="0">
+                <a:solidFill>
+                  <a:schemeClr val="accent6"/>
+                </a:solidFill>
+              </a:rPr>
+              <a:t>総事業費 約4.2億円（未確定）</a:t>
+            </a:r>
+            <a:endParaRPr lang="en-US" sz="1600" dirty="0"/>
           </a:p>
         </p:txBody>
       </p:sp>
@@ -23358,8 +23687,8 @@
         </p:nvSpPr>
         <p:spPr>
           <a:xfrm>
-            <a:off x="457200" y="2468880"/>
-            <a:ext cx="1828800" cy="731520"/>
+            <a:off x="731520" y="3840480"/>
+            <a:ext cx="3474720" cy="365760"/>
           </a:xfrm>
           <a:prstGeom prst="rect">
             <a:avLst/>
@@ -23371,40 +23700,56 @@
           <a:bodyPr wrap="square" lIns="0" tIns="0" rIns="0" bIns="0" rtlCol="0" anchor="t"/>
           <a:lstStyle/>
           <a:p>
-            <a:pPr algn="ctr" indent="0" marL="0">
-              <a:buNone/>
-            </a:pPr>
-            <a:r>
-              <a:rPr lang="en-US" sz="1400" dirty="0">
-                <a:solidFill>
-                  <a:schemeClr val="tx1"/>
-                </a:solidFill>
-              </a:rPr>
-              <a:t>設計着手</a:t>
-            </a:r>
-            <a:endParaRPr lang="en-US" sz="1400" dirty="0"/>
-          </a:p>
-        </p:txBody>
-      </p:sp>
-      <p:sp>
-        <p:nvSpPr>
-          <p:cNvPr id="9" name="badge"/>
-          <p:cNvSpPr/>
-          <p:nvPr/>
-        </p:nvSpPr>
-        <p:spPr>
-          <a:xfrm>
-            <a:off x="3246120" y="1737360"/>
-            <a:ext cx="548640" cy="548640"/>
-          </a:xfrm>
-          <a:prstGeom prst="ellipse">
-            <a:avLst/>
-          </a:prstGeom>
-          <a:solidFill>
-            <a:schemeClr val="accent1"/>
-          </a:solidFill>
-          <a:ln/>
-        </p:spPr>
+            <a:pPr indent="0" marL="0">
+              <a:buNone/>
+            </a:pPr>
+            <a:r>
+              <a:rPr lang="en-US" sz="1300" dirty="0">
+                <a:solidFill>
+                  <a:schemeClr val="bg2"/>
+                </a:solidFill>
+              </a:rPr>
+              <a:t>東京都練馬区関町南4丁目</a:t>
+            </a:r>
+            <a:endParaRPr lang="en-US" sz="1300" dirty="0"/>
+          </a:p>
+        </p:txBody>
+      </p:sp>
+      <p:sp>
+        <p:nvSpPr>
+          <p:cNvPr id="9" name="Text 6"/>
+          <p:cNvSpPr txBox="1"/>
+          <p:nvPr/>
+        </p:nvSpPr>
+        <p:spPr>
+          <a:xfrm>
+            <a:off x="4754880" y="1325880"/>
+            <a:ext cx="1188720" cy="502920"/>
+          </a:xfrm>
+          <a:prstGeom prst="rect">
+            <a:avLst/>
+          </a:prstGeom>
+          <a:noFill/>
+          <a:ln/>
+        </p:spPr>
+        <p:txBody>
+          <a:bodyPr wrap="square" lIns="0" tIns="0" rIns="0" bIns="0" rtlCol="0" anchor="ctr"/>
+          <a:lstStyle/>
+          <a:p>
+            <a:pPr indent="0" marL="0">
+              <a:buNone/>
+            </a:pPr>
+            <a:r>
+              <a:rPr lang="en-US" sz="1300" b="1" dirty="0">
+                <a:solidFill>
+                  <a:schemeClr val="accent2"/>
+                </a:solidFill>
+              </a:rPr>
+              <a:t>最寄駅</a:t>
+            </a:r>
+            <a:endParaRPr lang="en-US" sz="1300" dirty="0"/>
+          </a:p>
+        </p:txBody>
       </p:sp>
       <p:sp>
         <p:nvSpPr>
@@ -23414,8 +23759,8 @@
         </p:nvSpPr>
         <p:spPr>
           <a:xfrm>
-            <a:off x="3246120" y="1737360"/>
-            <a:ext cx="548640" cy="548640"/>
+            <a:off x="5897880" y="1325880"/>
+            <a:ext cx="2834640" cy="502920"/>
           </a:xfrm>
           <a:prstGeom prst="rect">
             <a:avLst/>
@@ -23427,18 +23772,18 @@
           <a:bodyPr wrap="square" lIns="0" tIns="0" rIns="0" bIns="0" rtlCol="0" anchor="ctr"/>
           <a:lstStyle/>
           <a:p>
-            <a:pPr algn="ctr" indent="0" marL="0">
-              <a:buNone/>
-            </a:pPr>
-            <a:r>
-              <a:rPr lang="en-US" sz="1800" b="1" dirty="0">
+            <a:pPr indent="0" marL="0">
+              <a:buNone/>
+            </a:pPr>
+            <a:r>
+              <a:rPr lang="en-US" sz="1300" dirty="0">
                 <a:solidFill>
                   <a:schemeClr val="tx1"/>
                 </a:solidFill>
               </a:rPr>
-              <a:t>2</a:t>
-            </a:r>
-            <a:endParaRPr lang="en-US" sz="1800" dirty="0"/>
+              <a:t>西武新宿線 武蔵関駅 徒歩10分</a:t>
+            </a:r>
+            <a:endParaRPr lang="en-US" sz="1300" dirty="0"/>
           </a:p>
         </p:txBody>
       </p:sp>
@@ -23450,31 +23795,31 @@
         </p:nvSpPr>
         <p:spPr>
           <a:xfrm>
-            <a:off x="2606040" y="1188720"/>
-            <a:ext cx="1828800" cy="365760"/>
-          </a:xfrm>
-          <a:prstGeom prst="rect">
-            <a:avLst/>
-          </a:prstGeom>
-          <a:noFill/>
-          <a:ln/>
-        </p:spPr>
-        <p:txBody>
-          <a:bodyPr wrap="square" lIns="0" tIns="0" rIns="0" bIns="0" rtlCol="0" anchor="t"/>
-          <a:lstStyle/>
-          <a:p>
-            <a:pPr algn="ctr" indent="0" marL="0">
-              <a:buNone/>
-            </a:pPr>
-            <a:r>
-              <a:rPr lang="en-US" sz="1400" b="1" dirty="0">
-                <a:solidFill>
-                  <a:schemeClr val="tx1"/>
-                </a:solidFill>
-              </a:rPr>
-              <a:t>2027年5月</a:t>
-            </a:r>
-            <a:endParaRPr lang="en-US" sz="1400" dirty="0"/>
+            <a:off x="4754880" y="1965960"/>
+            <a:ext cx="1188720" cy="502920"/>
+          </a:xfrm>
+          <a:prstGeom prst="rect">
+            <a:avLst/>
+          </a:prstGeom>
+          <a:noFill/>
+          <a:ln/>
+        </p:spPr>
+        <p:txBody>
+          <a:bodyPr wrap="square" lIns="0" tIns="0" rIns="0" bIns="0" rtlCol="0" anchor="ctr"/>
+          <a:lstStyle/>
+          <a:p>
+            <a:pPr indent="0" marL="0">
+              <a:buNone/>
+            </a:pPr>
+            <a:r>
+              <a:rPr lang="en-US" sz="1300" b="1" dirty="0">
+                <a:solidFill>
+                  <a:schemeClr val="accent2"/>
+                </a:solidFill>
+              </a:rPr>
+              <a:t>土地面積</a:t>
+            </a:r>
+            <a:endParaRPr lang="en-US" sz="1300" dirty="0"/>
           </a:p>
         </p:txBody>
       </p:sp>
@@ -23486,67 +23831,69 @@
         </p:nvSpPr>
         <p:spPr>
           <a:xfrm>
-            <a:off x="2606040" y="2468880"/>
-            <a:ext cx="1828800" cy="731520"/>
-          </a:xfrm>
-          <a:prstGeom prst="rect">
-            <a:avLst/>
-          </a:prstGeom>
-          <a:noFill/>
-          <a:ln/>
-        </p:spPr>
-        <p:txBody>
-          <a:bodyPr wrap="square" lIns="0" tIns="0" rIns="0" bIns="0" rtlCol="0" anchor="t"/>
-          <a:lstStyle/>
-          <a:p>
-            <a:pPr algn="ctr" indent="0" marL="0">
-              <a:buNone/>
-            </a:pPr>
-            <a:r>
-              <a:rPr lang="en-US" sz="1400" dirty="0">
+            <a:off x="5897880" y="1965960"/>
+            <a:ext cx="2834640" cy="502920"/>
+          </a:xfrm>
+          <a:prstGeom prst="rect">
+            <a:avLst/>
+          </a:prstGeom>
+          <a:noFill/>
+          <a:ln/>
+        </p:spPr>
+        <p:txBody>
+          <a:bodyPr wrap="square" lIns="0" tIns="0" rIns="0" bIns="0" rtlCol="0" anchor="ctr"/>
+          <a:lstStyle/>
+          <a:p>
+            <a:pPr indent="0" marL="0">
+              <a:buNone/>
+            </a:pPr>
+            <a:r>
+              <a:rPr lang="en-US" sz="1300" dirty="0">
                 <a:solidFill>
                   <a:schemeClr val="tx1"/>
                 </a:solidFill>
               </a:rPr>
-              <a:t>設計完了</a:t>
-            </a:r>
-            <a:endParaRPr lang="en-US" sz="1400" dirty="0"/>
-          </a:p>
-          <a:p>
-            <a:pPr algn="ctr" indent="0" marL="0">
-              <a:buNone/>
-            </a:pPr>
-            <a:r>
-              <a:rPr lang="en-US" sz="1400" dirty="0">
-                <a:solidFill>
-                  <a:schemeClr val="tx1"/>
-                </a:solidFill>
-              </a:rPr>
-              <a:t>確認申請へ</a:t>
-            </a:r>
-            <a:endParaRPr lang="en-US" sz="1400" dirty="0"/>
-          </a:p>
-        </p:txBody>
-      </p:sp>
-      <p:sp>
-        <p:nvSpPr>
-          <p:cNvPr id="13" name="badge"/>
-          <p:cNvSpPr/>
-          <p:nvPr/>
-        </p:nvSpPr>
-        <p:spPr>
-          <a:xfrm>
-            <a:off x="5394960" y="1737360"/>
-            <a:ext cx="548640" cy="548640"/>
-          </a:xfrm>
-          <a:prstGeom prst="ellipse">
-            <a:avLst/>
-          </a:prstGeom>
-          <a:solidFill>
-            <a:schemeClr val="accent1"/>
-          </a:solidFill>
-          <a:ln/>
-        </p:spPr>
+              <a:t>242.21㎡（約73.3坪）</a:t>
+            </a:r>
+            <a:endParaRPr lang="en-US" sz="1300" dirty="0"/>
+          </a:p>
+        </p:txBody>
+      </p:sp>
+      <p:sp>
+        <p:nvSpPr>
+          <p:cNvPr id="13" name="Text 10"/>
+          <p:cNvSpPr txBox="1"/>
+          <p:nvPr/>
+        </p:nvSpPr>
+        <p:spPr>
+          <a:xfrm>
+            <a:off x="4754880" y="2606040"/>
+            <a:ext cx="1188720" cy="502920"/>
+          </a:xfrm>
+          <a:prstGeom prst="rect">
+            <a:avLst/>
+          </a:prstGeom>
+          <a:noFill/>
+          <a:ln/>
+        </p:spPr>
+        <p:txBody>
+          <a:bodyPr wrap="square" lIns="0" tIns="0" rIns="0" bIns="0" rtlCol="0" anchor="ctr"/>
+          <a:lstStyle/>
+          <a:p>
+            <a:pPr indent="0" marL="0">
+              <a:buNone/>
+            </a:pPr>
+            <a:r>
+              <a:rPr lang="en-US" sz="1300" b="1" dirty="0">
+                <a:solidFill>
+                  <a:schemeClr val="accent2"/>
+                </a:solidFill>
+              </a:rPr>
+              <a:t>延床面積</a:t>
+            </a:r>
+            <a:endParaRPr lang="en-US" sz="1300" dirty="0"/>
+          </a:p>
+        </p:txBody>
       </p:sp>
       <p:sp>
         <p:nvSpPr>
@@ -23556,8 +23903,8 @@
         </p:nvSpPr>
         <p:spPr>
           <a:xfrm>
-            <a:off x="5394960" y="1737360"/>
-            <a:ext cx="548640" cy="548640"/>
+            <a:off x="5897880" y="2606040"/>
+            <a:ext cx="2834640" cy="502920"/>
           </a:xfrm>
           <a:prstGeom prst="rect">
             <a:avLst/>
@@ -23569,18 +23916,18 @@
           <a:bodyPr wrap="square" lIns="0" tIns="0" rIns="0" bIns="0" rtlCol="0" anchor="ctr"/>
           <a:lstStyle/>
           <a:p>
-            <a:pPr algn="ctr" indent="0" marL="0">
-              <a:buNone/>
-            </a:pPr>
-            <a:r>
-              <a:rPr lang="en-US" sz="1800" b="1" dirty="0">
+            <a:pPr indent="0" marL="0">
+              <a:buNone/>
+            </a:pPr>
+            <a:r>
+              <a:rPr lang="en-US" sz="1300" dirty="0">
                 <a:solidFill>
                   <a:schemeClr val="tx1"/>
                 </a:solidFill>
               </a:rPr>
-              <a:t>3</a:t>
-            </a:r>
-            <a:endParaRPr lang="en-US" sz="1800" dirty="0"/>
+              <a:t>617.84㎡（約186.9坪）</a:t>
+            </a:r>
+            <a:endParaRPr lang="en-US" sz="1300" dirty="0"/>
           </a:p>
         </p:txBody>
       </p:sp>
@@ -23592,31 +23939,31 @@
         </p:nvSpPr>
         <p:spPr>
           <a:xfrm>
-            <a:off x="4754880" y="1188720"/>
-            <a:ext cx="1828800" cy="365760"/>
-          </a:xfrm>
-          <a:prstGeom prst="rect">
-            <a:avLst/>
-          </a:prstGeom>
-          <a:noFill/>
-          <a:ln/>
-        </p:spPr>
-        <p:txBody>
-          <a:bodyPr wrap="square" lIns="0" tIns="0" rIns="0" bIns="0" rtlCol="0" anchor="t"/>
-          <a:lstStyle/>
-          <a:p>
-            <a:pPr algn="ctr" indent="0" marL="0">
-              <a:buNone/>
-            </a:pPr>
-            <a:r>
-              <a:rPr lang="en-US" sz="1400" b="1" dirty="0">
-                <a:solidFill>
-                  <a:schemeClr val="tx1"/>
-                </a:solidFill>
-              </a:rPr>
-              <a:t>2027年中</a:t>
-            </a:r>
-            <a:endParaRPr lang="en-US" sz="1400" dirty="0"/>
+            <a:off x="4754880" y="3246120"/>
+            <a:ext cx="1188720" cy="502920"/>
+          </a:xfrm>
+          <a:prstGeom prst="rect">
+            <a:avLst/>
+          </a:prstGeom>
+          <a:noFill/>
+          <a:ln/>
+        </p:spPr>
+        <p:txBody>
+          <a:bodyPr wrap="square" lIns="0" tIns="0" rIns="0" bIns="0" rtlCol="0" anchor="ctr"/>
+          <a:lstStyle/>
+          <a:p>
+            <a:pPr indent="0" marL="0">
+              <a:buNone/>
+            </a:pPr>
+            <a:r>
+              <a:rPr lang="en-US" sz="1300" b="1" dirty="0">
+                <a:solidFill>
+                  <a:schemeClr val="accent2"/>
+                </a:solidFill>
+              </a:rPr>
+              <a:t>用途地域</a:t>
+            </a:r>
+            <a:endParaRPr lang="en-US" sz="1300" dirty="0"/>
           </a:p>
         </p:txBody>
       </p:sp>
@@ -23628,67 +23975,69 @@
         </p:nvSpPr>
         <p:spPr>
           <a:xfrm>
-            <a:off x="4754880" y="2468880"/>
-            <a:ext cx="1828800" cy="731520"/>
-          </a:xfrm>
-          <a:prstGeom prst="rect">
-            <a:avLst/>
-          </a:prstGeom>
-          <a:noFill/>
-          <a:ln/>
-        </p:spPr>
-        <p:txBody>
-          <a:bodyPr wrap="square" lIns="0" tIns="0" rIns="0" bIns="0" rtlCol="0" anchor="t"/>
-          <a:lstStyle/>
-          <a:p>
-            <a:pPr algn="ctr" indent="0" marL="0">
-              <a:buNone/>
-            </a:pPr>
-            <a:r>
-              <a:rPr lang="en-US" sz="1400" dirty="0">
+            <a:off x="5897880" y="3246120"/>
+            <a:ext cx="2834640" cy="502920"/>
+          </a:xfrm>
+          <a:prstGeom prst="rect">
+            <a:avLst/>
+          </a:prstGeom>
+          <a:noFill/>
+          <a:ln/>
+        </p:spPr>
+        <p:txBody>
+          <a:bodyPr wrap="square" lIns="0" tIns="0" rIns="0" bIns="0" rtlCol="0" anchor="ctr"/>
+          <a:lstStyle/>
+          <a:p>
+            <a:pPr indent="0" marL="0">
+              <a:buNone/>
+            </a:pPr>
+            <a:r>
+              <a:rPr lang="en-US" sz="1300" dirty="0">
                 <a:solidFill>
                   <a:schemeClr val="tx1"/>
                 </a:solidFill>
               </a:rPr>
-              <a:t>ゼネコン選定</a:t>
-            </a:r>
-            <a:endParaRPr lang="en-US" sz="1400" dirty="0"/>
-          </a:p>
-          <a:p>
-            <a:pPr algn="ctr" indent="0" marL="0">
-              <a:buNone/>
-            </a:pPr>
-            <a:r>
-              <a:rPr lang="en-US" sz="1400" dirty="0">
-                <a:solidFill>
-                  <a:schemeClr val="tx1"/>
-                </a:solidFill>
-              </a:rPr>
-              <a:t>着工</a:t>
-            </a:r>
-            <a:endParaRPr lang="en-US" sz="1400" dirty="0"/>
-          </a:p>
-        </p:txBody>
-      </p:sp>
-      <p:sp>
-        <p:nvSpPr>
-          <p:cNvPr id="17" name="badge"/>
-          <p:cNvSpPr/>
-          <p:nvPr/>
-        </p:nvSpPr>
-        <p:spPr>
-          <a:xfrm>
-            <a:off x="7543800" y="1737360"/>
-            <a:ext cx="548640" cy="548640"/>
-          </a:xfrm>
-          <a:prstGeom prst="ellipse">
-            <a:avLst/>
-          </a:prstGeom>
-          <a:solidFill>
-            <a:schemeClr val="accent3"/>
-          </a:solidFill>
-          <a:ln/>
-        </p:spPr>
+              <a:t>近隣商業 / 第一種低層住居専用</a:t>
+            </a:r>
+            <a:endParaRPr lang="en-US" sz="1300" dirty="0"/>
+          </a:p>
+        </p:txBody>
+      </p:sp>
+      <p:sp>
+        <p:nvSpPr>
+          <p:cNvPr id="17" name="Text 14"/>
+          <p:cNvSpPr txBox="1"/>
+          <p:nvPr/>
+        </p:nvSpPr>
+        <p:spPr>
+          <a:xfrm>
+            <a:off x="4754880" y="3886200"/>
+            <a:ext cx="1188720" cy="502920"/>
+          </a:xfrm>
+          <a:prstGeom prst="rect">
+            <a:avLst/>
+          </a:prstGeom>
+          <a:noFill/>
+          <a:ln/>
+        </p:spPr>
+        <p:txBody>
+          <a:bodyPr wrap="square" lIns="0" tIns="0" rIns="0" bIns="0" rtlCol="0" anchor="ctr"/>
+          <a:lstStyle/>
+          <a:p>
+            <a:pPr indent="0" marL="0">
+              <a:buNone/>
+            </a:pPr>
+            <a:r>
+              <a:rPr lang="en-US" sz="1300" b="1" dirty="0">
+                <a:solidFill>
+                  <a:schemeClr val="accent2"/>
+                </a:solidFill>
+              </a:rPr>
+              <a:t>住戸構成</a:t>
+            </a:r>
+            <a:endParaRPr lang="en-US" sz="1300" dirty="0"/>
+          </a:p>
+        </p:txBody>
       </p:sp>
       <p:sp>
         <p:nvSpPr>
@@ -23698,8 +24047,8 @@
         </p:nvSpPr>
         <p:spPr>
           <a:xfrm>
-            <a:off x="7543800" y="1737360"/>
-            <a:ext cx="548640" cy="548640"/>
+            <a:off x="5897880" y="3886200"/>
+            <a:ext cx="2834640" cy="502920"/>
           </a:xfrm>
           <a:prstGeom prst="rect">
             <a:avLst/>
@@ -23711,148 +24060,18 @@
           <a:bodyPr wrap="square" lIns="0" tIns="0" rIns="0" bIns="0" rtlCol="0" anchor="ctr"/>
           <a:lstStyle/>
           <a:p>
-            <a:pPr algn="ctr" indent="0" marL="0">
-              <a:buNone/>
-            </a:pPr>
-            <a:r>
-              <a:rPr lang="en-US" sz="1800" b="1" dirty="0">
-                <a:solidFill>
-                  <a:schemeClr val="bg1"/>
-                </a:solidFill>
-              </a:rPr>
-              <a:t>4</a:t>
-            </a:r>
-            <a:endParaRPr lang="en-US" sz="1800" dirty="0"/>
-          </a:p>
-        </p:txBody>
-      </p:sp>
-      <p:sp>
-        <p:nvSpPr>
-          <p:cNvPr id="19" name="Text 16"/>
-          <p:cNvSpPr txBox="1"/>
-          <p:nvPr/>
-        </p:nvSpPr>
-        <p:spPr>
-          <a:xfrm>
-            <a:off x="6903720" y="1188720"/>
-            <a:ext cx="1828800" cy="365760"/>
-          </a:xfrm>
-          <a:prstGeom prst="rect">
-            <a:avLst/>
-          </a:prstGeom>
-          <a:noFill/>
-          <a:ln/>
-        </p:spPr>
-        <p:txBody>
-          <a:bodyPr wrap="square" lIns="0" tIns="0" rIns="0" bIns="0" rtlCol="0" anchor="t"/>
-          <a:lstStyle/>
-          <a:p>
-            <a:pPr algn="ctr" indent="0" marL="0">
-              <a:buNone/>
-            </a:pPr>
-            <a:r>
-              <a:rPr lang="en-US" sz="1400" b="1" dirty="0">
+            <a:pPr indent="0" marL="0">
+              <a:buNone/>
+            </a:pPr>
+            <a:r>
+              <a:rPr lang="en-US" sz="1300" dirty="0">
                 <a:solidFill>
                   <a:schemeClr val="tx1"/>
                 </a:solidFill>
               </a:rPr>
-              <a:t>2028年3月ごろ</a:t>
-            </a:r>
-            <a:endParaRPr lang="en-US" sz="1400" dirty="0"/>
-          </a:p>
-        </p:txBody>
-      </p:sp>
-      <p:sp>
-        <p:nvSpPr>
-          <p:cNvPr id="20" name="Text 17"/>
-          <p:cNvSpPr txBox="1"/>
-          <p:nvPr/>
-        </p:nvSpPr>
-        <p:spPr>
-          <a:xfrm>
-            <a:off x="6903720" y="2468880"/>
-            <a:ext cx="1828800" cy="731520"/>
-          </a:xfrm>
-          <a:prstGeom prst="rect">
-            <a:avLst/>
-          </a:prstGeom>
-          <a:noFill/>
-          <a:ln/>
-        </p:spPr>
-        <p:txBody>
-          <a:bodyPr wrap="square" lIns="0" tIns="0" rIns="0" bIns="0" rtlCol="0" anchor="t"/>
-          <a:lstStyle/>
-          <a:p>
-            <a:pPr algn="ctr" indent="0" marL="0">
-              <a:buNone/>
-            </a:pPr>
-            <a:r>
-              <a:rPr lang="en-US" sz="1400" dirty="0">
-                <a:solidFill>
-                  <a:schemeClr val="tx1"/>
-                </a:solidFill>
-              </a:rPr>
-              <a:t>竣工・募集</a:t>
-            </a:r>
-            <a:endParaRPr lang="en-US" sz="1400" dirty="0"/>
-          </a:p>
-        </p:txBody>
-      </p:sp>
-      <p:sp>
-        <p:nvSpPr>
-          <p:cNvPr id="21" name="card"/>
-          <p:cNvSpPr/>
-          <p:nvPr/>
-        </p:nvSpPr>
-        <p:spPr>
-          <a:xfrm>
-            <a:off x="457200" y="3474720"/>
-            <a:ext cx="8229600" cy="1005840"/>
-          </a:xfrm>
-          <a:prstGeom prst="roundRect">
-            <a:avLst>
-              <a:gd name="adj" fmla="val 7273"/>
-            </a:avLst>
-          </a:prstGeom>
-          <a:solidFill>
-            <a:schemeClr val="accent6"/>
-          </a:solidFill>
-          <a:ln/>
-        </p:spPr>
-      </p:sp>
-      <p:sp>
-        <p:nvSpPr>
-          <p:cNvPr id="22" name="Text 19"/>
-          <p:cNvSpPr txBox="1"/>
-          <p:nvPr/>
-        </p:nvSpPr>
-        <p:spPr>
-          <a:xfrm>
-            <a:off x="731520" y="3474720"/>
-            <a:ext cx="7680960" cy="1005840"/>
-          </a:xfrm>
-          <a:prstGeom prst="rect">
-            <a:avLst/>
-          </a:prstGeom>
-          <a:noFill/>
-          <a:ln/>
-        </p:spPr>
-        <p:txBody>
-          <a:bodyPr wrap="square" lIns="0" tIns="0" rIns="0" bIns="0" rtlCol="0" anchor="ctr"/>
-          <a:lstStyle/>
-          <a:p>
-            <a:pPr indent="0" marL="0">
-              <a:buNone/>
-            </a:pPr>
-            <a:r>
-              <a:rPr lang="en-US" sz="1600" b="1" dirty="0">
-                <a:solidFill>
-                  <a:schemeClr val="tx1"/>
-                </a:solidFill>
-              </a:rPr>
-              <a:t>総事業費 約4.2億円は暫定。設計が固まった段階で積算を取り、収支を確定させます。</a:t>
-            </a:r>
-            <a:endParaRPr lang="en-US" sz="1600" dirty="0"/>
+              <a:t>1K・1LDK・2LDK（17戸）</a:t>
+            </a:r>
+            <a:endParaRPr lang="en-US" sz="1300" dirty="0"/>
           </a:p>
         </p:txBody>
       </p:sp>
@@ -23958,7 +24177,7 @@
                   <a:schemeClr val="tx1"/>
                 </a:solidFill>
               </a:rPr>
-              <a:t>新築を始めるときの、私の判断基準</a:t>
+              <a:t>計画の進め方：竣工は2028年3月ごろを想定</a:t>
             </a:r>
             <a:endParaRPr lang="en-US" sz="2600" dirty="0"/>
           </a:p>
@@ -23966,621 +24185,622 @@
       </p:sp>
       <p:sp>
         <p:nvSpPr>
-          <p:cNvPr id="4" name="card"/>
+          <p:cNvPr id="4" name="Shape 1"/>
           <p:cNvSpPr/>
           <p:nvPr/>
         </p:nvSpPr>
         <p:spPr>
           <a:xfrm>
-            <a:off x="457200" y="1280160"/>
-            <a:ext cx="2651760" cy="1463040"/>
+            <a:off x="1097280" y="2011680"/>
+            <a:ext cx="6949440" cy="0"/>
+          </a:xfrm>
+          <a:prstGeom prst="line">
+            <a:avLst/>
+          </a:prstGeom>
+          <a:noFill/>
+          <a:ln w="25400">
+            <a:solidFill>
+              <a:schemeClr val="accent4"/>
+            </a:solidFill>
+            <a:prstDash val="solid"/>
+          </a:ln>
+        </p:spPr>
+      </p:sp>
+      <p:sp>
+        <p:nvSpPr>
+          <p:cNvPr id="5" name="badge"/>
+          <p:cNvSpPr/>
+          <p:nvPr/>
+        </p:nvSpPr>
+        <p:spPr>
+          <a:xfrm>
+            <a:off x="1097280" y="1737360"/>
+            <a:ext cx="548640" cy="548640"/>
+          </a:xfrm>
+          <a:prstGeom prst="ellipse">
+            <a:avLst/>
+          </a:prstGeom>
+          <a:solidFill>
+            <a:schemeClr val="accent1"/>
+          </a:solidFill>
+          <a:ln/>
+        </p:spPr>
+      </p:sp>
+      <p:sp>
+        <p:nvSpPr>
+          <p:cNvPr id="6" name="Text 3"/>
+          <p:cNvSpPr txBox="1"/>
+          <p:nvPr/>
+        </p:nvSpPr>
+        <p:spPr>
+          <a:xfrm>
+            <a:off x="1097280" y="1737360"/>
+            <a:ext cx="548640" cy="548640"/>
+          </a:xfrm>
+          <a:prstGeom prst="rect">
+            <a:avLst/>
+          </a:prstGeom>
+          <a:noFill/>
+          <a:ln/>
+        </p:spPr>
+        <p:txBody>
+          <a:bodyPr wrap="square" lIns="0" tIns="0" rIns="0" bIns="0" rtlCol="0" anchor="ctr"/>
+          <a:lstStyle/>
+          <a:p>
+            <a:pPr algn="ctr" indent="0" marL="0">
+              <a:buNone/>
+            </a:pPr>
+            <a:r>
+              <a:rPr lang="en-US" sz="1800" b="1" dirty="0">
+                <a:solidFill>
+                  <a:schemeClr val="tx1"/>
+                </a:solidFill>
+              </a:rPr>
+              <a:t>1</a:t>
+            </a:r>
+            <a:endParaRPr lang="en-US" sz="1800" dirty="0"/>
+          </a:p>
+        </p:txBody>
+      </p:sp>
+      <p:sp>
+        <p:nvSpPr>
+          <p:cNvPr id="7" name="Text 4"/>
+          <p:cNvSpPr txBox="1"/>
+          <p:nvPr/>
+        </p:nvSpPr>
+        <p:spPr>
+          <a:xfrm>
+            <a:off x="457200" y="1188720"/>
+            <a:ext cx="1828800" cy="365760"/>
+          </a:xfrm>
+          <a:prstGeom prst="rect">
+            <a:avLst/>
+          </a:prstGeom>
+          <a:noFill/>
+          <a:ln/>
+        </p:spPr>
+        <p:txBody>
+          <a:bodyPr wrap="square" lIns="0" tIns="0" rIns="0" bIns="0" rtlCol="0" anchor="t"/>
+          <a:lstStyle/>
+          <a:p>
+            <a:pPr algn="ctr" indent="0" marL="0">
+              <a:buNone/>
+            </a:pPr>
+            <a:r>
+              <a:rPr lang="en-US" sz="1400" b="1" dirty="0">
+                <a:solidFill>
+                  <a:schemeClr val="tx1"/>
+                </a:solidFill>
+              </a:rPr>
+              <a:t>2026年10月</a:t>
+            </a:r>
+            <a:endParaRPr lang="en-US" sz="1400" dirty="0"/>
+          </a:p>
+        </p:txBody>
+      </p:sp>
+      <p:sp>
+        <p:nvSpPr>
+          <p:cNvPr id="8" name="Text 5"/>
+          <p:cNvSpPr txBox="1"/>
+          <p:nvPr/>
+        </p:nvSpPr>
+        <p:spPr>
+          <a:xfrm>
+            <a:off x="457200" y="2468880"/>
+            <a:ext cx="1828800" cy="731520"/>
+          </a:xfrm>
+          <a:prstGeom prst="rect">
+            <a:avLst/>
+          </a:prstGeom>
+          <a:noFill/>
+          <a:ln/>
+        </p:spPr>
+        <p:txBody>
+          <a:bodyPr wrap="square" lIns="0" tIns="0" rIns="0" bIns="0" rtlCol="0" anchor="t"/>
+          <a:lstStyle/>
+          <a:p>
+            <a:pPr algn="ctr" indent="0" marL="0">
+              <a:buNone/>
+            </a:pPr>
+            <a:r>
+              <a:rPr lang="en-US" sz="1400" dirty="0">
+                <a:solidFill>
+                  <a:schemeClr val="tx1"/>
+                </a:solidFill>
+              </a:rPr>
+              <a:t>設計着手</a:t>
+            </a:r>
+            <a:endParaRPr lang="en-US" sz="1400" dirty="0"/>
+          </a:p>
+        </p:txBody>
+      </p:sp>
+      <p:sp>
+        <p:nvSpPr>
+          <p:cNvPr id="9" name="badge"/>
+          <p:cNvSpPr/>
+          <p:nvPr/>
+        </p:nvSpPr>
+        <p:spPr>
+          <a:xfrm>
+            <a:off x="3246120" y="1737360"/>
+            <a:ext cx="548640" cy="548640"/>
+          </a:xfrm>
+          <a:prstGeom prst="ellipse">
+            <a:avLst/>
+          </a:prstGeom>
+          <a:solidFill>
+            <a:schemeClr val="accent1"/>
+          </a:solidFill>
+          <a:ln/>
+        </p:spPr>
+      </p:sp>
+      <p:sp>
+        <p:nvSpPr>
+          <p:cNvPr id="10" name="Text 7"/>
+          <p:cNvSpPr txBox="1"/>
+          <p:nvPr/>
+        </p:nvSpPr>
+        <p:spPr>
+          <a:xfrm>
+            <a:off x="3246120" y="1737360"/>
+            <a:ext cx="548640" cy="548640"/>
+          </a:xfrm>
+          <a:prstGeom prst="rect">
+            <a:avLst/>
+          </a:prstGeom>
+          <a:noFill/>
+          <a:ln/>
+        </p:spPr>
+        <p:txBody>
+          <a:bodyPr wrap="square" lIns="0" tIns="0" rIns="0" bIns="0" rtlCol="0" anchor="ctr"/>
+          <a:lstStyle/>
+          <a:p>
+            <a:pPr algn="ctr" indent="0" marL="0">
+              <a:buNone/>
+            </a:pPr>
+            <a:r>
+              <a:rPr lang="en-US" sz="1800" b="1" dirty="0">
+                <a:solidFill>
+                  <a:schemeClr val="tx1"/>
+                </a:solidFill>
+              </a:rPr>
+              <a:t>2</a:t>
+            </a:r>
+            <a:endParaRPr lang="en-US" sz="1800" dirty="0"/>
+          </a:p>
+        </p:txBody>
+      </p:sp>
+      <p:sp>
+        <p:nvSpPr>
+          <p:cNvPr id="11" name="Text 8"/>
+          <p:cNvSpPr txBox="1"/>
+          <p:nvPr/>
+        </p:nvSpPr>
+        <p:spPr>
+          <a:xfrm>
+            <a:off x="2606040" y="1188720"/>
+            <a:ext cx="1828800" cy="365760"/>
+          </a:xfrm>
+          <a:prstGeom prst="rect">
+            <a:avLst/>
+          </a:prstGeom>
+          <a:noFill/>
+          <a:ln/>
+        </p:spPr>
+        <p:txBody>
+          <a:bodyPr wrap="square" lIns="0" tIns="0" rIns="0" bIns="0" rtlCol="0" anchor="t"/>
+          <a:lstStyle/>
+          <a:p>
+            <a:pPr algn="ctr" indent="0" marL="0">
+              <a:buNone/>
+            </a:pPr>
+            <a:r>
+              <a:rPr lang="en-US" sz="1400" b="1" dirty="0">
+                <a:solidFill>
+                  <a:schemeClr val="tx1"/>
+                </a:solidFill>
+              </a:rPr>
+              <a:t>2027年5月</a:t>
+            </a:r>
+            <a:endParaRPr lang="en-US" sz="1400" dirty="0"/>
+          </a:p>
+        </p:txBody>
+      </p:sp>
+      <p:sp>
+        <p:nvSpPr>
+          <p:cNvPr id="12" name="Text 9"/>
+          <p:cNvSpPr txBox="1"/>
+          <p:nvPr/>
+        </p:nvSpPr>
+        <p:spPr>
+          <a:xfrm>
+            <a:off x="2606040" y="2468880"/>
+            <a:ext cx="1828800" cy="731520"/>
+          </a:xfrm>
+          <a:prstGeom prst="rect">
+            <a:avLst/>
+          </a:prstGeom>
+          <a:noFill/>
+          <a:ln/>
+        </p:spPr>
+        <p:txBody>
+          <a:bodyPr wrap="square" lIns="0" tIns="0" rIns="0" bIns="0" rtlCol="0" anchor="t"/>
+          <a:lstStyle/>
+          <a:p>
+            <a:pPr algn="ctr" indent="0" marL="0">
+              <a:buNone/>
+            </a:pPr>
+            <a:r>
+              <a:rPr lang="en-US" sz="1400" dirty="0">
+                <a:solidFill>
+                  <a:schemeClr val="tx1"/>
+                </a:solidFill>
+              </a:rPr>
+              <a:t>設計完了</a:t>
+            </a:r>
+            <a:endParaRPr lang="en-US" sz="1400" dirty="0"/>
+          </a:p>
+          <a:p>
+            <a:pPr algn="ctr" indent="0" marL="0">
+              <a:buNone/>
+            </a:pPr>
+            <a:r>
+              <a:rPr lang="en-US" sz="1400" dirty="0">
+                <a:solidFill>
+                  <a:schemeClr val="tx1"/>
+                </a:solidFill>
+              </a:rPr>
+              <a:t>確認申請へ</a:t>
+            </a:r>
+            <a:endParaRPr lang="en-US" sz="1400" dirty="0"/>
+          </a:p>
+        </p:txBody>
+      </p:sp>
+      <p:sp>
+        <p:nvSpPr>
+          <p:cNvPr id="13" name="badge"/>
+          <p:cNvSpPr/>
+          <p:nvPr/>
+        </p:nvSpPr>
+        <p:spPr>
+          <a:xfrm>
+            <a:off x="5394960" y="1737360"/>
+            <a:ext cx="548640" cy="548640"/>
+          </a:xfrm>
+          <a:prstGeom prst="ellipse">
+            <a:avLst/>
+          </a:prstGeom>
+          <a:solidFill>
+            <a:schemeClr val="accent1"/>
+          </a:solidFill>
+          <a:ln/>
+        </p:spPr>
+      </p:sp>
+      <p:sp>
+        <p:nvSpPr>
+          <p:cNvPr id="14" name="Text 11"/>
+          <p:cNvSpPr txBox="1"/>
+          <p:nvPr/>
+        </p:nvSpPr>
+        <p:spPr>
+          <a:xfrm>
+            <a:off x="5394960" y="1737360"/>
+            <a:ext cx="548640" cy="548640"/>
+          </a:xfrm>
+          <a:prstGeom prst="rect">
+            <a:avLst/>
+          </a:prstGeom>
+          <a:noFill/>
+          <a:ln/>
+        </p:spPr>
+        <p:txBody>
+          <a:bodyPr wrap="square" lIns="0" tIns="0" rIns="0" bIns="0" rtlCol="0" anchor="ctr"/>
+          <a:lstStyle/>
+          <a:p>
+            <a:pPr algn="ctr" indent="0" marL="0">
+              <a:buNone/>
+            </a:pPr>
+            <a:r>
+              <a:rPr lang="en-US" sz="1800" b="1" dirty="0">
+                <a:solidFill>
+                  <a:schemeClr val="tx1"/>
+                </a:solidFill>
+              </a:rPr>
+              <a:t>3</a:t>
+            </a:r>
+            <a:endParaRPr lang="en-US" sz="1800" dirty="0"/>
+          </a:p>
+        </p:txBody>
+      </p:sp>
+      <p:sp>
+        <p:nvSpPr>
+          <p:cNvPr id="15" name="Text 12"/>
+          <p:cNvSpPr txBox="1"/>
+          <p:nvPr/>
+        </p:nvSpPr>
+        <p:spPr>
+          <a:xfrm>
+            <a:off x="4754880" y="1188720"/>
+            <a:ext cx="1828800" cy="365760"/>
+          </a:xfrm>
+          <a:prstGeom prst="rect">
+            <a:avLst/>
+          </a:prstGeom>
+          <a:noFill/>
+          <a:ln/>
+        </p:spPr>
+        <p:txBody>
+          <a:bodyPr wrap="square" lIns="0" tIns="0" rIns="0" bIns="0" rtlCol="0" anchor="t"/>
+          <a:lstStyle/>
+          <a:p>
+            <a:pPr algn="ctr" indent="0" marL="0">
+              <a:buNone/>
+            </a:pPr>
+            <a:r>
+              <a:rPr lang="en-US" sz="1400" b="1" dirty="0">
+                <a:solidFill>
+                  <a:schemeClr val="tx1"/>
+                </a:solidFill>
+              </a:rPr>
+              <a:t>2027年中</a:t>
+            </a:r>
+            <a:endParaRPr lang="en-US" sz="1400" dirty="0"/>
+          </a:p>
+        </p:txBody>
+      </p:sp>
+      <p:sp>
+        <p:nvSpPr>
+          <p:cNvPr id="16" name="Text 13"/>
+          <p:cNvSpPr txBox="1"/>
+          <p:nvPr/>
+        </p:nvSpPr>
+        <p:spPr>
+          <a:xfrm>
+            <a:off x="4754880" y="2468880"/>
+            <a:ext cx="1828800" cy="731520"/>
+          </a:xfrm>
+          <a:prstGeom prst="rect">
+            <a:avLst/>
+          </a:prstGeom>
+          <a:noFill/>
+          <a:ln/>
+        </p:spPr>
+        <p:txBody>
+          <a:bodyPr wrap="square" lIns="0" tIns="0" rIns="0" bIns="0" rtlCol="0" anchor="t"/>
+          <a:lstStyle/>
+          <a:p>
+            <a:pPr algn="ctr" indent="0" marL="0">
+              <a:buNone/>
+            </a:pPr>
+            <a:r>
+              <a:rPr lang="en-US" sz="1400" dirty="0">
+                <a:solidFill>
+                  <a:schemeClr val="tx1"/>
+                </a:solidFill>
+              </a:rPr>
+              <a:t>ゼネコン選定</a:t>
+            </a:r>
+            <a:endParaRPr lang="en-US" sz="1400" dirty="0"/>
+          </a:p>
+          <a:p>
+            <a:pPr algn="ctr" indent="0" marL="0">
+              <a:buNone/>
+            </a:pPr>
+            <a:r>
+              <a:rPr lang="en-US" sz="1400" dirty="0">
+                <a:solidFill>
+                  <a:schemeClr val="tx1"/>
+                </a:solidFill>
+              </a:rPr>
+              <a:t>着工</a:t>
+            </a:r>
+            <a:endParaRPr lang="en-US" sz="1400" dirty="0"/>
+          </a:p>
+        </p:txBody>
+      </p:sp>
+      <p:sp>
+        <p:nvSpPr>
+          <p:cNvPr id="17" name="badge"/>
+          <p:cNvSpPr/>
+          <p:nvPr/>
+        </p:nvSpPr>
+        <p:spPr>
+          <a:xfrm>
+            <a:off x="7543800" y="1737360"/>
+            <a:ext cx="548640" cy="548640"/>
+          </a:xfrm>
+          <a:prstGeom prst="ellipse">
+            <a:avLst/>
+          </a:prstGeom>
+          <a:solidFill>
+            <a:schemeClr val="accent3"/>
+          </a:solidFill>
+          <a:ln/>
+        </p:spPr>
+      </p:sp>
+      <p:sp>
+        <p:nvSpPr>
+          <p:cNvPr id="18" name="Text 15"/>
+          <p:cNvSpPr txBox="1"/>
+          <p:nvPr/>
+        </p:nvSpPr>
+        <p:spPr>
+          <a:xfrm>
+            <a:off x="7543800" y="1737360"/>
+            <a:ext cx="548640" cy="548640"/>
+          </a:xfrm>
+          <a:prstGeom prst="rect">
+            <a:avLst/>
+          </a:prstGeom>
+          <a:noFill/>
+          <a:ln/>
+        </p:spPr>
+        <p:txBody>
+          <a:bodyPr wrap="square" lIns="0" tIns="0" rIns="0" bIns="0" rtlCol="0" anchor="ctr"/>
+          <a:lstStyle/>
+          <a:p>
+            <a:pPr algn="ctr" indent="0" marL="0">
+              <a:buNone/>
+            </a:pPr>
+            <a:r>
+              <a:rPr lang="en-US" sz="1800" b="1" dirty="0">
+                <a:solidFill>
+                  <a:schemeClr val="bg1"/>
+                </a:solidFill>
+              </a:rPr>
+              <a:t>4</a:t>
+            </a:r>
+            <a:endParaRPr lang="en-US" sz="1800" dirty="0"/>
+          </a:p>
+        </p:txBody>
+      </p:sp>
+      <p:sp>
+        <p:nvSpPr>
+          <p:cNvPr id="19" name="Text 16"/>
+          <p:cNvSpPr txBox="1"/>
+          <p:nvPr/>
+        </p:nvSpPr>
+        <p:spPr>
+          <a:xfrm>
+            <a:off x="6903720" y="1188720"/>
+            <a:ext cx="1828800" cy="365760"/>
+          </a:xfrm>
+          <a:prstGeom prst="rect">
+            <a:avLst/>
+          </a:prstGeom>
+          <a:noFill/>
+          <a:ln/>
+        </p:spPr>
+        <p:txBody>
+          <a:bodyPr wrap="square" lIns="0" tIns="0" rIns="0" bIns="0" rtlCol="0" anchor="t"/>
+          <a:lstStyle/>
+          <a:p>
+            <a:pPr algn="ctr" indent="0" marL="0">
+              <a:buNone/>
+            </a:pPr>
+            <a:r>
+              <a:rPr lang="en-US" sz="1400" b="1" dirty="0">
+                <a:solidFill>
+                  <a:schemeClr val="tx1"/>
+                </a:solidFill>
+              </a:rPr>
+              <a:t>2028年3月ごろ</a:t>
+            </a:r>
+            <a:endParaRPr lang="en-US" sz="1400" dirty="0"/>
+          </a:p>
+        </p:txBody>
+      </p:sp>
+      <p:sp>
+        <p:nvSpPr>
+          <p:cNvPr id="20" name="Text 17"/>
+          <p:cNvSpPr txBox="1"/>
+          <p:nvPr/>
+        </p:nvSpPr>
+        <p:spPr>
+          <a:xfrm>
+            <a:off x="6903720" y="2468880"/>
+            <a:ext cx="1828800" cy="731520"/>
+          </a:xfrm>
+          <a:prstGeom prst="rect">
+            <a:avLst/>
+          </a:prstGeom>
+          <a:noFill/>
+          <a:ln/>
+        </p:spPr>
+        <p:txBody>
+          <a:bodyPr wrap="square" lIns="0" tIns="0" rIns="0" bIns="0" rtlCol="0" anchor="t"/>
+          <a:lstStyle/>
+          <a:p>
+            <a:pPr algn="ctr" indent="0" marL="0">
+              <a:buNone/>
+            </a:pPr>
+            <a:r>
+              <a:rPr lang="en-US" sz="1400" dirty="0">
+                <a:solidFill>
+                  <a:schemeClr val="tx1"/>
+                </a:solidFill>
+              </a:rPr>
+              <a:t>竣工・募集</a:t>
+            </a:r>
+            <a:endParaRPr lang="en-US" sz="1400" dirty="0"/>
+          </a:p>
+        </p:txBody>
+      </p:sp>
+      <p:sp>
+        <p:nvSpPr>
+          <p:cNvPr id="21" name="card"/>
+          <p:cNvSpPr/>
+          <p:nvPr/>
+        </p:nvSpPr>
+        <p:spPr>
+          <a:xfrm>
+            <a:off x="457200" y="3474720"/>
+            <a:ext cx="8229600" cy="1005840"/>
           </a:xfrm>
           <a:prstGeom prst="roundRect">
             <a:avLst>
-              <a:gd name="adj" fmla="val 5000"/>
+              <a:gd name="adj" fmla="val 7273"/>
             </a:avLst>
           </a:prstGeom>
           <a:solidFill>
-            <a:schemeClr val="bg2"/>
+            <a:schemeClr val="accent6"/>
           </a:solidFill>
           <a:ln/>
         </p:spPr>
       </p:sp>
       <p:sp>
         <p:nvSpPr>
-          <p:cNvPr id="5" name="Text 2"/>
+          <p:cNvPr id="22" name="Text 19"/>
           <p:cNvSpPr txBox="1"/>
           <p:nvPr/>
         </p:nvSpPr>
         <p:spPr>
           <a:xfrm>
-            <a:off x="640080" y="1417320"/>
-            <a:ext cx="2286000" cy="365760"/>
-          </a:xfrm>
-          <a:prstGeom prst="rect">
-            <a:avLst/>
-          </a:prstGeom>
-          <a:noFill/>
-          <a:ln/>
-        </p:spPr>
-        <p:txBody>
-          <a:bodyPr wrap="square" lIns="0" tIns="0" rIns="0" bIns="0" rtlCol="0" anchor="t"/>
+            <a:off x="731520" y="3474720"/>
+            <a:ext cx="7680960" cy="1005840"/>
+          </a:xfrm>
+          <a:prstGeom prst="rect">
+            <a:avLst/>
+          </a:prstGeom>
+          <a:noFill/>
+          <a:ln/>
+        </p:spPr>
+        <p:txBody>
+          <a:bodyPr wrap="square" lIns="0" tIns="0" rIns="0" bIns="0" rtlCol="0" anchor="ctr"/>
           <a:lstStyle/>
           <a:p>
             <a:pPr indent="0" marL="0">
               <a:buNone/>
             </a:pPr>
             <a:r>
-              <a:rPr lang="en-US" sz="1300" b="1" dirty="0">
-                <a:solidFill>
-                  <a:schemeClr val="accent2"/>
-                </a:solidFill>
-              </a:rPr>
-              <a:t>住戸面積</a:t>
-            </a:r>
-            <a:endParaRPr lang="en-US" sz="1300" dirty="0"/>
-          </a:p>
-        </p:txBody>
-      </p:sp>
-      <p:sp>
-        <p:nvSpPr>
-          <p:cNvPr id="6" name="Text 3"/>
-          <p:cNvSpPr txBox="1"/>
-          <p:nvPr/>
-        </p:nvSpPr>
-        <p:spPr>
-          <a:xfrm>
-            <a:off x="640080" y="1828800"/>
-            <a:ext cx="2286000" cy="822960"/>
-          </a:xfrm>
-          <a:prstGeom prst="rect">
-            <a:avLst/>
-          </a:prstGeom>
-          <a:noFill/>
-          <a:ln/>
-        </p:spPr>
-        <p:txBody>
-          <a:bodyPr wrap="square" lIns="0" tIns="0" rIns="0" bIns="0" rtlCol="0" anchor="t"/>
-          <a:lstStyle/>
-          <a:p>
-            <a:pPr indent="0" marL="0">
-              <a:buNone/>
-            </a:pPr>
-            <a:r>
-              <a:rPr lang="en-US" sz="1500" b="1" dirty="0">
+              <a:rPr lang="en-US" sz="1600" b="1" dirty="0">
                 <a:solidFill>
                   <a:schemeClr val="tx1"/>
                 </a:solidFill>
               </a:rPr>
-              <a:t>15㎡以上</a:t>
-            </a:r>
-            <a:endParaRPr lang="en-US" sz="1500" dirty="0"/>
-          </a:p>
-        </p:txBody>
-      </p:sp>
-      <p:sp>
-        <p:nvSpPr>
-          <p:cNvPr id="7" name="card"/>
-          <p:cNvSpPr/>
-          <p:nvPr/>
-        </p:nvSpPr>
-        <p:spPr>
-          <a:xfrm>
-            <a:off x="3291840" y="1280160"/>
-            <a:ext cx="2651760" cy="1463040"/>
-          </a:xfrm>
-          <a:prstGeom prst="roundRect">
-            <a:avLst>
-              <a:gd name="adj" fmla="val 5000"/>
-            </a:avLst>
-          </a:prstGeom>
-          <a:solidFill>
-            <a:schemeClr val="bg2"/>
-          </a:solidFill>
-          <a:ln/>
-        </p:spPr>
-      </p:sp>
-      <p:sp>
-        <p:nvSpPr>
-          <p:cNvPr id="8" name="Text 5"/>
-          <p:cNvSpPr txBox="1"/>
-          <p:nvPr/>
-        </p:nvSpPr>
-        <p:spPr>
-          <a:xfrm>
-            <a:off x="3474720" y="1417320"/>
-            <a:ext cx="2286000" cy="365760"/>
-          </a:xfrm>
-          <a:prstGeom prst="rect">
-            <a:avLst/>
-          </a:prstGeom>
-          <a:noFill/>
-          <a:ln/>
-        </p:spPr>
-        <p:txBody>
-          <a:bodyPr wrap="square" lIns="0" tIns="0" rIns="0" bIns="0" rtlCol="0" anchor="t"/>
-          <a:lstStyle/>
-          <a:p>
-            <a:pPr indent="0" marL="0">
-              <a:buNone/>
-            </a:pPr>
-            <a:r>
-              <a:rPr lang="en-US" sz="1300" b="1" dirty="0">
-                <a:solidFill>
-                  <a:schemeClr val="accent2"/>
-                </a:solidFill>
-              </a:rPr>
-              <a:t>構造</a:t>
-            </a:r>
-            <a:endParaRPr lang="en-US" sz="1300" dirty="0"/>
-          </a:p>
-        </p:txBody>
-      </p:sp>
-      <p:sp>
-        <p:nvSpPr>
-          <p:cNvPr id="9" name="Text 6"/>
-          <p:cNvSpPr txBox="1"/>
-          <p:nvPr/>
-        </p:nvSpPr>
-        <p:spPr>
-          <a:xfrm>
-            <a:off x="3474720" y="1828800"/>
-            <a:ext cx="2286000" cy="822960"/>
-          </a:xfrm>
-          <a:prstGeom prst="rect">
-            <a:avLst/>
-          </a:prstGeom>
-          <a:noFill/>
-          <a:ln/>
-        </p:spPr>
-        <p:txBody>
-          <a:bodyPr wrap="square" lIns="0" tIns="0" rIns="0" bIns="0" rtlCol="0" anchor="t"/>
-          <a:lstStyle/>
-          <a:p>
-            <a:pPr indent="0" marL="0">
-              <a:buNone/>
-            </a:pPr>
-            <a:r>
-              <a:rPr lang="en-US" sz="1500" b="1" dirty="0">
-                <a:solidFill>
-                  <a:schemeClr val="tx1"/>
-                </a:solidFill>
-              </a:rPr>
-              <a:t>木造3階を基本</a:t>
-            </a:r>
-            <a:endParaRPr lang="en-US" sz="1500" dirty="0"/>
-          </a:p>
-          <a:p>
-            <a:pPr indent="0" marL="0">
-              <a:buNone/>
-            </a:pPr>
-            <a:r>
-              <a:rPr lang="en-US" sz="1500" b="1" dirty="0">
-                <a:solidFill>
-                  <a:schemeClr val="tx1"/>
-                </a:solidFill>
-              </a:rPr>
-              <a:t>（RCは立地次第）</a:t>
-            </a:r>
-            <a:endParaRPr lang="en-US" sz="1500" dirty="0"/>
-          </a:p>
-        </p:txBody>
-      </p:sp>
-      <p:sp>
-        <p:nvSpPr>
-          <p:cNvPr id="10" name="card"/>
-          <p:cNvSpPr/>
-          <p:nvPr/>
-        </p:nvSpPr>
-        <p:spPr>
-          <a:xfrm>
-            <a:off x="6126480" y="1280160"/>
-            <a:ext cx="2651760" cy="1463040"/>
-          </a:xfrm>
-          <a:prstGeom prst="roundRect">
-            <a:avLst>
-              <a:gd name="adj" fmla="val 5000"/>
-            </a:avLst>
-          </a:prstGeom>
-          <a:solidFill>
-            <a:schemeClr val="bg2"/>
-          </a:solidFill>
-          <a:ln/>
-        </p:spPr>
-      </p:sp>
-      <p:sp>
-        <p:nvSpPr>
-          <p:cNvPr id="11" name="Text 8"/>
-          <p:cNvSpPr txBox="1"/>
-          <p:nvPr/>
-        </p:nvSpPr>
-        <p:spPr>
-          <a:xfrm>
-            <a:off x="6309360" y="1417320"/>
-            <a:ext cx="2286000" cy="365760"/>
-          </a:xfrm>
-          <a:prstGeom prst="rect">
-            <a:avLst/>
-          </a:prstGeom>
-          <a:noFill/>
-          <a:ln/>
-        </p:spPr>
-        <p:txBody>
-          <a:bodyPr wrap="square" lIns="0" tIns="0" rIns="0" bIns="0" rtlCol="0" anchor="t"/>
-          <a:lstStyle/>
-          <a:p>
-            <a:pPr indent="0" marL="0">
-              <a:buNone/>
-            </a:pPr>
-            <a:r>
-              <a:rPr lang="en-US" sz="1300" b="1" dirty="0">
-                <a:solidFill>
-                  <a:schemeClr val="accent2"/>
-                </a:solidFill>
-              </a:rPr>
-              <a:t>有効率</a:t>
-            </a:r>
-            <a:endParaRPr lang="en-US" sz="1300" dirty="0"/>
-          </a:p>
-        </p:txBody>
-      </p:sp>
-      <p:sp>
-        <p:nvSpPr>
-          <p:cNvPr id="12" name="Text 9"/>
-          <p:cNvSpPr txBox="1"/>
-          <p:nvPr/>
-        </p:nvSpPr>
-        <p:spPr>
-          <a:xfrm>
-            <a:off x="6309360" y="1828800"/>
-            <a:ext cx="2286000" cy="822960"/>
-          </a:xfrm>
-          <a:prstGeom prst="rect">
-            <a:avLst/>
-          </a:prstGeom>
-          <a:noFill/>
-          <a:ln/>
-        </p:spPr>
-        <p:txBody>
-          <a:bodyPr wrap="square" lIns="0" tIns="0" rIns="0" bIns="0" rtlCol="0" anchor="t"/>
-          <a:lstStyle/>
-          <a:p>
-            <a:pPr indent="0" marL="0">
-              <a:buNone/>
-            </a:pPr>
-            <a:r>
-              <a:rPr lang="en-US" sz="1500" b="1" dirty="0">
-                <a:solidFill>
-                  <a:schemeClr val="tx1"/>
-                </a:solidFill>
-              </a:rPr>
-              <a:t>80%</a:t>
-            </a:r>
-            <a:endParaRPr lang="en-US" sz="1500" dirty="0"/>
-          </a:p>
-        </p:txBody>
-      </p:sp>
-      <p:sp>
-        <p:nvSpPr>
-          <p:cNvPr id="13" name="card"/>
-          <p:cNvSpPr/>
-          <p:nvPr/>
-        </p:nvSpPr>
-        <p:spPr>
-          <a:xfrm>
-            <a:off x="457200" y="2926080"/>
-            <a:ext cx="2651760" cy="1463040"/>
-          </a:xfrm>
-          <a:prstGeom prst="roundRect">
-            <a:avLst>
-              <a:gd name="adj" fmla="val 5000"/>
-            </a:avLst>
-          </a:prstGeom>
-          <a:solidFill>
-            <a:schemeClr val="bg2"/>
-          </a:solidFill>
-          <a:ln/>
-        </p:spPr>
-      </p:sp>
-      <p:sp>
-        <p:nvSpPr>
-          <p:cNvPr id="14" name="Text 11"/>
-          <p:cNvSpPr txBox="1"/>
-          <p:nvPr/>
-        </p:nvSpPr>
-        <p:spPr>
-          <a:xfrm>
-            <a:off x="640080" y="3063240"/>
-            <a:ext cx="2286000" cy="365760"/>
-          </a:xfrm>
-          <a:prstGeom prst="rect">
-            <a:avLst/>
-          </a:prstGeom>
-          <a:noFill/>
-          <a:ln/>
-        </p:spPr>
-        <p:txBody>
-          <a:bodyPr wrap="square" lIns="0" tIns="0" rIns="0" bIns="0" rtlCol="0" anchor="t"/>
-          <a:lstStyle/>
-          <a:p>
-            <a:pPr indent="0" marL="0">
-              <a:buNone/>
-            </a:pPr>
-            <a:r>
-              <a:rPr lang="en-US" sz="1300" b="1" dirty="0">
-                <a:solidFill>
-                  <a:schemeClr val="accent2"/>
-                </a:solidFill>
-              </a:rPr>
-              <a:t>利回り目安</a:t>
-            </a:r>
-            <a:endParaRPr lang="en-US" sz="1300" dirty="0"/>
-          </a:p>
-        </p:txBody>
-      </p:sp>
-      <p:sp>
-        <p:nvSpPr>
-          <p:cNvPr id="15" name="Text 12"/>
-          <p:cNvSpPr txBox="1"/>
-          <p:nvPr/>
-        </p:nvSpPr>
-        <p:spPr>
-          <a:xfrm>
-            <a:off x="640080" y="3474720"/>
-            <a:ext cx="2286000" cy="822960"/>
-          </a:xfrm>
-          <a:prstGeom prst="rect">
-            <a:avLst/>
-          </a:prstGeom>
-          <a:noFill/>
-          <a:ln/>
-        </p:spPr>
-        <p:txBody>
-          <a:bodyPr wrap="square" lIns="0" tIns="0" rIns="0" bIns="0" rtlCol="0" anchor="t"/>
-          <a:lstStyle/>
-          <a:p>
-            <a:pPr indent="0" marL="0">
-              <a:buNone/>
-            </a:pPr>
-            <a:r>
-              <a:rPr lang="en-US" sz="1500" b="1" dirty="0">
-                <a:solidFill>
-                  <a:schemeClr val="tx1"/>
-                </a:solidFill>
-              </a:rPr>
-              <a:t>木造は8.5%以上</a:t>
-            </a:r>
-            <a:endParaRPr lang="en-US" sz="1500" dirty="0"/>
-          </a:p>
-          <a:p>
-            <a:pPr indent="0" marL="0">
-              <a:buNone/>
-            </a:pPr>
-            <a:r>
-              <a:rPr lang="en-US" sz="1500" b="1" dirty="0">
-                <a:solidFill>
-                  <a:schemeClr val="tx1"/>
-                </a:solidFill>
-              </a:rPr>
-              <a:t>（16号線内側）</a:t>
-            </a:r>
-            <a:endParaRPr lang="en-US" sz="1500" dirty="0"/>
-          </a:p>
-        </p:txBody>
-      </p:sp>
-      <p:sp>
-        <p:nvSpPr>
-          <p:cNvPr id="16" name="card"/>
-          <p:cNvSpPr/>
-          <p:nvPr/>
-        </p:nvSpPr>
-        <p:spPr>
-          <a:xfrm>
-            <a:off x="3291840" y="2926080"/>
-            <a:ext cx="2651760" cy="1463040"/>
-          </a:xfrm>
-          <a:prstGeom prst="roundRect">
-            <a:avLst>
-              <a:gd name="adj" fmla="val 5000"/>
-            </a:avLst>
-          </a:prstGeom>
-          <a:solidFill>
-            <a:schemeClr val="bg2"/>
-          </a:solidFill>
-          <a:ln/>
-        </p:spPr>
-      </p:sp>
-      <p:sp>
-        <p:nvSpPr>
-          <p:cNvPr id="17" name="Text 14"/>
-          <p:cNvSpPr txBox="1"/>
-          <p:nvPr/>
-        </p:nvSpPr>
-        <p:spPr>
-          <a:xfrm>
-            <a:off x="3474720" y="3063240"/>
-            <a:ext cx="2286000" cy="365760"/>
-          </a:xfrm>
-          <a:prstGeom prst="rect">
-            <a:avLst/>
-          </a:prstGeom>
-          <a:noFill/>
-          <a:ln/>
-        </p:spPr>
-        <p:txBody>
-          <a:bodyPr wrap="square" lIns="0" tIns="0" rIns="0" bIns="0" rtlCol="0" anchor="t"/>
-          <a:lstStyle/>
-          <a:p>
-            <a:pPr indent="0" marL="0">
-              <a:buNone/>
-            </a:pPr>
-            <a:r>
-              <a:rPr lang="en-US" sz="1300" b="1" dirty="0">
-                <a:solidFill>
-                  <a:schemeClr val="accent2"/>
-                </a:solidFill>
-              </a:rPr>
-              <a:t>規制確認</a:t>
-            </a:r>
-            <a:endParaRPr lang="en-US" sz="1300" dirty="0"/>
-          </a:p>
-        </p:txBody>
-      </p:sp>
-      <p:sp>
-        <p:nvSpPr>
-          <p:cNvPr id="18" name="Text 15"/>
-          <p:cNvSpPr txBox="1"/>
-          <p:nvPr/>
-        </p:nvSpPr>
-        <p:spPr>
-          <a:xfrm>
-            <a:off x="3474720" y="3474720"/>
-            <a:ext cx="2286000" cy="822960"/>
-          </a:xfrm>
-          <a:prstGeom prst="rect">
-            <a:avLst/>
-          </a:prstGeom>
-          <a:noFill/>
-          <a:ln/>
-        </p:spPr>
-        <p:txBody>
-          <a:bodyPr wrap="square" lIns="0" tIns="0" rIns="0" bIns="0" rtlCol="0" anchor="t"/>
-          <a:lstStyle/>
-          <a:p>
-            <a:pPr indent="0" marL="0">
-              <a:buNone/>
-            </a:pPr>
-            <a:r>
-              <a:rPr lang="en-US" sz="1500" b="1" dirty="0">
-                <a:solidFill>
-                  <a:schemeClr val="tx1"/>
-                </a:solidFill>
-              </a:rPr>
-              <a:t>区のワンルーム条例・</a:t>
-            </a:r>
-            <a:endParaRPr lang="en-US" sz="1500" dirty="0"/>
-          </a:p>
-          <a:p>
-            <a:pPr indent="0" marL="0">
-              <a:buNone/>
-            </a:pPr>
-            <a:r>
-              <a:rPr lang="en-US" sz="1500" b="1" dirty="0">
-                <a:solidFill>
-                  <a:schemeClr val="tx1"/>
-                </a:solidFill>
-              </a:rPr>
-              <a:t>指導要綱に必ず照合</a:t>
-            </a:r>
-            <a:endParaRPr lang="en-US" sz="1500" dirty="0"/>
-          </a:p>
-        </p:txBody>
-      </p:sp>
-      <p:sp>
-        <p:nvSpPr>
-          <p:cNvPr id="19" name="card"/>
-          <p:cNvSpPr/>
-          <p:nvPr/>
-        </p:nvSpPr>
-        <p:spPr>
-          <a:xfrm>
-            <a:off x="6126480" y="2926080"/>
-            <a:ext cx="2651760" cy="1463040"/>
-          </a:xfrm>
-          <a:prstGeom prst="roundRect">
-            <a:avLst>
-              <a:gd name="adj" fmla="val 5000"/>
-            </a:avLst>
-          </a:prstGeom>
-          <a:solidFill>
-            <a:schemeClr val="bg2"/>
-          </a:solidFill>
-          <a:ln/>
-        </p:spPr>
-      </p:sp>
-      <p:sp>
-        <p:nvSpPr>
-          <p:cNvPr id="20" name="Text 17"/>
-          <p:cNvSpPr txBox="1"/>
-          <p:nvPr/>
-        </p:nvSpPr>
-        <p:spPr>
-          <a:xfrm>
-            <a:off x="6309360" y="3063240"/>
-            <a:ext cx="2286000" cy="365760"/>
-          </a:xfrm>
-          <a:prstGeom prst="rect">
-            <a:avLst/>
-          </a:prstGeom>
-          <a:noFill/>
-          <a:ln/>
-        </p:spPr>
-        <p:txBody>
-          <a:bodyPr wrap="square" lIns="0" tIns="0" rIns="0" bIns="0" rtlCol="0" anchor="t"/>
-          <a:lstStyle/>
-          <a:p>
-            <a:pPr indent="0" marL="0">
-              <a:buNone/>
-            </a:pPr>
-            <a:r>
-              <a:rPr lang="en-US" sz="1300" b="1" dirty="0">
-                <a:solidFill>
-                  <a:schemeClr val="accent2"/>
-                </a:solidFill>
-              </a:rPr>
-              <a:t>建築費</a:t>
-            </a:r>
-            <a:endParaRPr lang="en-US" sz="1300" dirty="0"/>
-          </a:p>
-        </p:txBody>
-      </p:sp>
-      <p:sp>
-        <p:nvSpPr>
-          <p:cNvPr id="21" name="Text 18"/>
-          <p:cNvSpPr txBox="1"/>
-          <p:nvPr/>
-        </p:nvSpPr>
-        <p:spPr>
-          <a:xfrm>
-            <a:off x="6309360" y="3474720"/>
-            <a:ext cx="2286000" cy="822960"/>
-          </a:xfrm>
-          <a:prstGeom prst="rect">
-            <a:avLst/>
-          </a:prstGeom>
-          <a:noFill/>
-          <a:ln/>
-        </p:spPr>
-        <p:txBody>
-          <a:bodyPr wrap="square" lIns="0" tIns="0" rIns="0" bIns="0" rtlCol="0" anchor="t"/>
-          <a:lstStyle/>
-          <a:p>
-            <a:pPr indent="0" marL="0">
-              <a:buNone/>
-            </a:pPr>
-            <a:r>
-              <a:rPr lang="en-US" sz="1500" b="1" dirty="0">
-                <a:solidFill>
-                  <a:schemeClr val="tx1"/>
-                </a:solidFill>
-              </a:rPr>
-              <a:t>木造 坪70万円</a:t>
-            </a:r>
-            <a:endParaRPr lang="en-US" sz="1500" dirty="0"/>
-          </a:p>
-          <a:p>
-            <a:pPr indent="0" marL="0">
-              <a:buNone/>
-            </a:pPr>
-            <a:r>
-              <a:rPr lang="en-US" sz="1500" b="1" dirty="0">
-                <a:solidFill>
-                  <a:schemeClr val="tx1"/>
-                </a:solidFill>
-              </a:rPr>
-              <a:t>（解体・諸費用は別）</a:t>
-            </a:r>
-            <a:endParaRPr lang="en-US" sz="1500" dirty="0"/>
+              <a:t>総事業費 約4.2億円は暫定。設計が固まった段階で積算を取り、収支を確定させます。</a:t>
+            </a:r>
+            <a:endParaRPr lang="en-US" sz="1600" dirty="0"/>
           </a:p>
         </p:txBody>
       </p:sp>
@@ -24686,7 +24906,7 @@
                   <a:schemeClr val="tx1"/>
                 </a:solidFill>
               </a:rPr>
-              <a:t>リスクと、その備え</a:t>
+              <a:t>新築を始めるときの、私の判断基準</a:t>
             </a:r>
             <a:endParaRPr lang="en-US" sz="2600" dirty="0"/>
           </a:p>
@@ -24701,11 +24921,11 @@
         <p:spPr>
           <a:xfrm>
             <a:off x="457200" y="1280160"/>
-            <a:ext cx="8229600" cy="713232"/>
+            <a:ext cx="2651760" cy="1463040"/>
           </a:xfrm>
           <a:prstGeom prst="roundRect">
             <a:avLst>
-              <a:gd name="adj" fmla="val 10256"/>
+              <a:gd name="adj" fmla="val 5000"/>
             </a:avLst>
           </a:prstGeom>
           <a:solidFill>
@@ -24722,31 +24942,31 @@
         </p:nvSpPr>
         <p:spPr>
           <a:xfrm>
-            <a:off x="685800" y="1280160"/>
-            <a:ext cx="2011680" cy="713232"/>
-          </a:xfrm>
-          <a:prstGeom prst="rect">
-            <a:avLst/>
-          </a:prstGeom>
-          <a:noFill/>
-          <a:ln/>
-        </p:spPr>
-        <p:txBody>
-          <a:bodyPr wrap="square" lIns="0" tIns="0" rIns="0" bIns="0" rtlCol="0" anchor="ctr"/>
+            <a:off x="640080" y="1417320"/>
+            <a:ext cx="2286000" cy="365760"/>
+          </a:xfrm>
+          <a:prstGeom prst="rect">
+            <a:avLst/>
+          </a:prstGeom>
+          <a:noFill/>
+          <a:ln/>
+        </p:spPr>
+        <p:txBody>
+          <a:bodyPr wrap="square" lIns="0" tIns="0" rIns="0" bIns="0" rtlCol="0" anchor="t"/>
           <a:lstStyle/>
           <a:p>
             <a:pPr indent="0" marL="0">
               <a:buNone/>
             </a:pPr>
             <a:r>
-              <a:rPr lang="en-US" sz="1600" b="1" dirty="0">
-                <a:solidFill>
-                  <a:schemeClr val="accent3"/>
-                </a:solidFill>
-              </a:rPr>
-              <a:t>空室</a:t>
-            </a:r>
-            <a:endParaRPr lang="en-US" sz="1600" dirty="0"/>
+              <a:rPr lang="en-US" sz="1300" b="1" dirty="0">
+                <a:solidFill>
+                  <a:schemeClr val="accent2"/>
+                </a:solidFill>
+              </a:rPr>
+              <a:t>住戸面積</a:t>
+            </a:r>
+            <a:endParaRPr lang="en-US" sz="1300" dirty="0"/>
           </a:p>
         </p:txBody>
       </p:sp>
@@ -24758,31 +24978,31 @@
         </p:nvSpPr>
         <p:spPr>
           <a:xfrm>
-            <a:off x="2743200" y="1280160"/>
-            <a:ext cx="5760720" cy="713232"/>
-          </a:xfrm>
-          <a:prstGeom prst="rect">
-            <a:avLst/>
-          </a:prstGeom>
-          <a:noFill/>
-          <a:ln/>
-        </p:spPr>
-        <p:txBody>
-          <a:bodyPr wrap="square" lIns="0" tIns="0" rIns="0" bIns="0" rtlCol="0" anchor="ctr"/>
+            <a:off x="640080" y="1828800"/>
+            <a:ext cx="2286000" cy="822960"/>
+          </a:xfrm>
+          <a:prstGeom prst="rect">
+            <a:avLst/>
+          </a:prstGeom>
+          <a:noFill/>
+          <a:ln/>
+        </p:spPr>
+        <p:txBody>
+          <a:bodyPr wrap="square" lIns="0" tIns="0" rIns="0" bIns="0" rtlCol="0" anchor="t"/>
           <a:lstStyle/>
           <a:p>
             <a:pPr indent="0" marL="0">
               <a:buNone/>
             </a:pPr>
             <a:r>
-              <a:rPr lang="en-US" sz="1400" dirty="0">
+              <a:rPr lang="en-US" sz="1500" b="1" dirty="0">
                 <a:solidFill>
                   <a:schemeClr val="tx1"/>
                 </a:solidFill>
               </a:rPr>
-              <a:t>満室想定でなく、安い賃料でも回る物件を選ぶ</a:t>
-            </a:r>
-            <a:endParaRPr lang="en-US" sz="1400" dirty="0"/>
+              <a:t>15㎡以上</a:t>
+            </a:r>
+            <a:endParaRPr lang="en-US" sz="1500" dirty="0"/>
           </a:p>
         </p:txBody>
       </p:sp>
@@ -24794,12 +25014,12 @@
         </p:nvSpPr>
         <p:spPr>
           <a:xfrm>
-            <a:off x="457200" y="2103120"/>
-            <a:ext cx="8229600" cy="713232"/>
+            <a:off x="3291840" y="1280160"/>
+            <a:ext cx="2651760" cy="1463040"/>
           </a:xfrm>
           <a:prstGeom prst="roundRect">
             <a:avLst>
-              <a:gd name="adj" fmla="val 10256"/>
+              <a:gd name="adj" fmla="val 5000"/>
             </a:avLst>
           </a:prstGeom>
           <a:solidFill>
@@ -24816,31 +25036,31 @@
         </p:nvSpPr>
         <p:spPr>
           <a:xfrm>
-            <a:off x="685800" y="2103120"/>
-            <a:ext cx="2011680" cy="713232"/>
-          </a:xfrm>
-          <a:prstGeom prst="rect">
-            <a:avLst/>
-          </a:prstGeom>
-          <a:noFill/>
-          <a:ln/>
-        </p:spPr>
-        <p:txBody>
-          <a:bodyPr wrap="square" lIns="0" tIns="0" rIns="0" bIns="0" rtlCol="0" anchor="ctr"/>
+            <a:off x="3474720" y="1417320"/>
+            <a:ext cx="2286000" cy="365760"/>
+          </a:xfrm>
+          <a:prstGeom prst="rect">
+            <a:avLst/>
+          </a:prstGeom>
+          <a:noFill/>
+          <a:ln/>
+        </p:spPr>
+        <p:txBody>
+          <a:bodyPr wrap="square" lIns="0" tIns="0" rIns="0" bIns="0" rtlCol="0" anchor="t"/>
           <a:lstStyle/>
           <a:p>
             <a:pPr indent="0" marL="0">
               <a:buNone/>
             </a:pPr>
             <a:r>
-              <a:rPr lang="en-US" sz="1600" b="1" dirty="0">
-                <a:solidFill>
-                  <a:schemeClr val="accent3"/>
-                </a:solidFill>
-              </a:rPr>
-              <a:t>金利上昇</a:t>
-            </a:r>
-            <a:endParaRPr lang="en-US" sz="1600" dirty="0"/>
+              <a:rPr lang="en-US" sz="1300" b="1" dirty="0">
+                <a:solidFill>
+                  <a:schemeClr val="accent2"/>
+                </a:solidFill>
+              </a:rPr>
+              <a:t>構造</a:t>
+            </a:r>
+            <a:endParaRPr lang="en-US" sz="1300" dirty="0"/>
           </a:p>
         </p:txBody>
       </p:sp>
@@ -24852,31 +25072,45 @@
         </p:nvSpPr>
         <p:spPr>
           <a:xfrm>
-            <a:off x="2743200" y="2103120"/>
-            <a:ext cx="5760720" cy="713232"/>
-          </a:xfrm>
-          <a:prstGeom prst="rect">
-            <a:avLst/>
-          </a:prstGeom>
-          <a:noFill/>
-          <a:ln/>
-        </p:spPr>
-        <p:txBody>
-          <a:bodyPr wrap="square" lIns="0" tIns="0" rIns="0" bIns="0" rtlCol="0" anchor="ctr"/>
+            <a:off x="3474720" y="1828800"/>
+            <a:ext cx="2286000" cy="822960"/>
+          </a:xfrm>
+          <a:prstGeom prst="rect">
+            <a:avLst/>
+          </a:prstGeom>
+          <a:noFill/>
+          <a:ln/>
+        </p:spPr>
+        <p:txBody>
+          <a:bodyPr wrap="square" lIns="0" tIns="0" rIns="0" bIns="0" rtlCol="0" anchor="t"/>
           <a:lstStyle/>
           <a:p>
             <a:pPr indent="0" marL="0">
               <a:buNone/>
             </a:pPr>
             <a:r>
-              <a:rPr lang="en-US" sz="1400" dirty="0">
+              <a:rPr lang="en-US" sz="1500" b="1" dirty="0">
                 <a:solidFill>
                   <a:schemeClr val="tx1"/>
                 </a:solidFill>
               </a:rPr>
-              <a:t>耐用年数内で返済、現金を厚めに保有</a:t>
-            </a:r>
-            <a:endParaRPr lang="en-US" sz="1400" dirty="0"/>
+              <a:t>木造3階を基本</a:t>
+            </a:r>
+            <a:endParaRPr lang="en-US" sz="1500" dirty="0"/>
+          </a:p>
+          <a:p>
+            <a:pPr indent="0" marL="0">
+              <a:buNone/>
+            </a:pPr>
+            <a:r>
+              <a:rPr lang="en-US" sz="1500" b="1" dirty="0">
+                <a:solidFill>
+                  <a:schemeClr val="tx1"/>
+                </a:solidFill>
+              </a:rPr>
+              <a:t>（RCは立地次第）</a:t>
+            </a:r>
+            <a:endParaRPr lang="en-US" sz="1500" dirty="0"/>
           </a:p>
         </p:txBody>
       </p:sp>
@@ -24888,12 +25122,12 @@
         </p:nvSpPr>
         <p:spPr>
           <a:xfrm>
-            <a:off x="457200" y="2926080"/>
-            <a:ext cx="8229600" cy="713232"/>
+            <a:off x="6126480" y="1280160"/>
+            <a:ext cx="2651760" cy="1463040"/>
           </a:xfrm>
           <a:prstGeom prst="roundRect">
             <a:avLst>
-              <a:gd name="adj" fmla="val 10256"/>
+              <a:gd name="adj" fmla="val 5000"/>
             </a:avLst>
           </a:prstGeom>
           <a:solidFill>
@@ -24910,31 +25144,31 @@
         </p:nvSpPr>
         <p:spPr>
           <a:xfrm>
-            <a:off x="685800" y="2926080"/>
-            <a:ext cx="2011680" cy="713232"/>
-          </a:xfrm>
-          <a:prstGeom prst="rect">
-            <a:avLst/>
-          </a:prstGeom>
-          <a:noFill/>
-          <a:ln/>
-        </p:spPr>
-        <p:txBody>
-          <a:bodyPr wrap="square" lIns="0" tIns="0" rIns="0" bIns="0" rtlCol="0" anchor="ctr"/>
+            <a:off x="6309360" y="1417320"/>
+            <a:ext cx="2286000" cy="365760"/>
+          </a:xfrm>
+          <a:prstGeom prst="rect">
+            <a:avLst/>
+          </a:prstGeom>
+          <a:noFill/>
+          <a:ln/>
+        </p:spPr>
+        <p:txBody>
+          <a:bodyPr wrap="square" lIns="0" tIns="0" rIns="0" bIns="0" rtlCol="0" anchor="t"/>
           <a:lstStyle/>
           <a:p>
             <a:pPr indent="0" marL="0">
               <a:buNone/>
             </a:pPr>
             <a:r>
-              <a:rPr lang="en-US" sz="1600" b="1" dirty="0">
-                <a:solidFill>
-                  <a:schemeClr val="accent3"/>
-                </a:solidFill>
-              </a:rPr>
-              <a:t>建築費の高騰</a:t>
-            </a:r>
-            <a:endParaRPr lang="en-US" sz="1600" dirty="0"/>
+              <a:rPr lang="en-US" sz="1300" b="1" dirty="0">
+                <a:solidFill>
+                  <a:schemeClr val="accent2"/>
+                </a:solidFill>
+              </a:rPr>
+              <a:t>有効率</a:t>
+            </a:r>
+            <a:endParaRPr lang="en-US" sz="1300" dirty="0"/>
           </a:p>
         </p:txBody>
       </p:sp>
@@ -24946,31 +25180,31 @@
         </p:nvSpPr>
         <p:spPr>
           <a:xfrm>
-            <a:off x="2743200" y="2926080"/>
-            <a:ext cx="5760720" cy="713232"/>
-          </a:xfrm>
-          <a:prstGeom prst="rect">
-            <a:avLst/>
-          </a:prstGeom>
-          <a:noFill/>
-          <a:ln/>
-        </p:spPr>
-        <p:txBody>
-          <a:bodyPr wrap="square" lIns="0" tIns="0" rIns="0" bIns="0" rtlCol="0" anchor="ctr"/>
+            <a:off x="6309360" y="1828800"/>
+            <a:ext cx="2286000" cy="822960"/>
+          </a:xfrm>
+          <a:prstGeom prst="rect">
+            <a:avLst/>
+          </a:prstGeom>
+          <a:noFill/>
+          <a:ln/>
+        </p:spPr>
+        <p:txBody>
+          <a:bodyPr wrap="square" lIns="0" tIns="0" rIns="0" bIns="0" rtlCol="0" anchor="t"/>
           <a:lstStyle/>
           <a:p>
             <a:pPr indent="0" marL="0">
               <a:buNone/>
             </a:pPr>
             <a:r>
-              <a:rPr lang="en-US" sz="1400" dirty="0">
+              <a:rPr lang="en-US" sz="1500" b="1" dirty="0">
                 <a:solidFill>
                   <a:schemeClr val="tx1"/>
                 </a:solidFill>
               </a:rPr>
-              <a:t>設計段階で積算し、予算に合わせて設計を見直す</a:t>
-            </a:r>
-            <a:endParaRPr lang="en-US" sz="1400" dirty="0"/>
+              <a:t>80%</a:t>
+            </a:r>
+            <a:endParaRPr lang="en-US" sz="1500" dirty="0"/>
           </a:p>
         </p:txBody>
       </p:sp>
@@ -24982,12 +25216,12 @@
         </p:nvSpPr>
         <p:spPr>
           <a:xfrm>
-            <a:off x="457200" y="3749040"/>
-            <a:ext cx="8229600" cy="713232"/>
+            <a:off x="457200" y="2926080"/>
+            <a:ext cx="2651760" cy="1463040"/>
           </a:xfrm>
           <a:prstGeom prst="roundRect">
             <a:avLst>
-              <a:gd name="adj" fmla="val 10256"/>
+              <a:gd name="adj" fmla="val 5000"/>
             </a:avLst>
           </a:prstGeom>
           <a:solidFill>
@@ -25004,31 +25238,31 @@
         </p:nvSpPr>
         <p:spPr>
           <a:xfrm>
-            <a:off x="685800" y="3749040"/>
-            <a:ext cx="2011680" cy="713232"/>
-          </a:xfrm>
-          <a:prstGeom prst="rect">
-            <a:avLst/>
-          </a:prstGeom>
-          <a:noFill/>
-          <a:ln/>
-        </p:spPr>
-        <p:txBody>
-          <a:bodyPr wrap="square" lIns="0" tIns="0" rIns="0" bIns="0" rtlCol="0" anchor="ctr"/>
+            <a:off x="640080" y="3063240"/>
+            <a:ext cx="2286000" cy="365760"/>
+          </a:xfrm>
+          <a:prstGeom prst="rect">
+            <a:avLst/>
+          </a:prstGeom>
+          <a:noFill/>
+          <a:ln/>
+        </p:spPr>
+        <p:txBody>
+          <a:bodyPr wrap="square" lIns="0" tIns="0" rIns="0" bIns="0" rtlCol="0" anchor="t"/>
           <a:lstStyle/>
           <a:p>
             <a:pPr indent="0" marL="0">
               <a:buNone/>
             </a:pPr>
             <a:r>
-              <a:rPr lang="en-US" sz="1600" b="1" dirty="0">
-                <a:solidFill>
-                  <a:schemeClr val="accent3"/>
-                </a:solidFill>
-              </a:rPr>
-              <a:t>出口</a:t>
-            </a:r>
-            <a:endParaRPr lang="en-US" sz="1600" dirty="0"/>
+              <a:rPr lang="en-US" sz="1300" b="1" dirty="0">
+                <a:solidFill>
+                  <a:schemeClr val="accent2"/>
+                </a:solidFill>
+              </a:rPr>
+              <a:t>利回り目安</a:t>
+            </a:r>
+            <a:endParaRPr lang="en-US" sz="1300" dirty="0"/>
           </a:p>
         </p:txBody>
       </p:sp>
@@ -25040,31 +25274,261 @@
         </p:nvSpPr>
         <p:spPr>
           <a:xfrm>
-            <a:off x="2743200" y="3749040"/>
-            <a:ext cx="5760720" cy="713232"/>
-          </a:xfrm>
-          <a:prstGeom prst="rect">
-            <a:avLst/>
-          </a:prstGeom>
-          <a:noFill/>
-          <a:ln/>
-        </p:spPr>
-        <p:txBody>
-          <a:bodyPr wrap="square" lIns="0" tIns="0" rIns="0" bIns="0" rtlCol="0" anchor="ctr"/>
+            <a:off x="640080" y="3474720"/>
+            <a:ext cx="2286000" cy="822960"/>
+          </a:xfrm>
+          <a:prstGeom prst="rect">
+            <a:avLst/>
+          </a:prstGeom>
+          <a:noFill/>
+          <a:ln/>
+        </p:spPr>
+        <p:txBody>
+          <a:bodyPr wrap="square" lIns="0" tIns="0" rIns="0" bIns="0" rtlCol="0" anchor="t"/>
           <a:lstStyle/>
           <a:p>
             <a:pPr indent="0" marL="0">
               <a:buNone/>
             </a:pPr>
             <a:r>
-              <a:rPr lang="en-US" sz="1400" dirty="0">
+              <a:rPr lang="en-US" sz="1500" b="1" dirty="0">
                 <a:solidFill>
                   <a:schemeClr val="tx1"/>
                 </a:solidFill>
               </a:rPr>
-              <a:t>積算が厚く、売っても銀行に説明できる物件を持つ</a:t>
-            </a:r>
-            <a:endParaRPr lang="en-US" sz="1400" dirty="0"/>
+              <a:t>木造は8.5%以上</a:t>
+            </a:r>
+            <a:endParaRPr lang="en-US" sz="1500" dirty="0"/>
+          </a:p>
+          <a:p>
+            <a:pPr indent="0" marL="0">
+              <a:buNone/>
+            </a:pPr>
+            <a:r>
+              <a:rPr lang="en-US" sz="1500" b="1" dirty="0">
+                <a:solidFill>
+                  <a:schemeClr val="tx1"/>
+                </a:solidFill>
+              </a:rPr>
+              <a:t>（16号線内側）</a:t>
+            </a:r>
+            <a:endParaRPr lang="en-US" sz="1500" dirty="0"/>
+          </a:p>
+        </p:txBody>
+      </p:sp>
+      <p:sp>
+        <p:nvSpPr>
+          <p:cNvPr id="16" name="card"/>
+          <p:cNvSpPr/>
+          <p:nvPr/>
+        </p:nvSpPr>
+        <p:spPr>
+          <a:xfrm>
+            <a:off x="3291840" y="2926080"/>
+            <a:ext cx="2651760" cy="1463040"/>
+          </a:xfrm>
+          <a:prstGeom prst="roundRect">
+            <a:avLst>
+              <a:gd name="adj" fmla="val 5000"/>
+            </a:avLst>
+          </a:prstGeom>
+          <a:solidFill>
+            <a:schemeClr val="bg2"/>
+          </a:solidFill>
+          <a:ln/>
+        </p:spPr>
+      </p:sp>
+      <p:sp>
+        <p:nvSpPr>
+          <p:cNvPr id="17" name="Text 14"/>
+          <p:cNvSpPr txBox="1"/>
+          <p:nvPr/>
+        </p:nvSpPr>
+        <p:spPr>
+          <a:xfrm>
+            <a:off x="3474720" y="3063240"/>
+            <a:ext cx="2286000" cy="365760"/>
+          </a:xfrm>
+          <a:prstGeom prst="rect">
+            <a:avLst/>
+          </a:prstGeom>
+          <a:noFill/>
+          <a:ln/>
+        </p:spPr>
+        <p:txBody>
+          <a:bodyPr wrap="square" lIns="0" tIns="0" rIns="0" bIns="0" rtlCol="0" anchor="t"/>
+          <a:lstStyle/>
+          <a:p>
+            <a:pPr indent="0" marL="0">
+              <a:buNone/>
+            </a:pPr>
+            <a:r>
+              <a:rPr lang="en-US" sz="1300" b="1" dirty="0">
+                <a:solidFill>
+                  <a:schemeClr val="accent2"/>
+                </a:solidFill>
+              </a:rPr>
+              <a:t>規制確認</a:t>
+            </a:r>
+            <a:endParaRPr lang="en-US" sz="1300" dirty="0"/>
+          </a:p>
+        </p:txBody>
+      </p:sp>
+      <p:sp>
+        <p:nvSpPr>
+          <p:cNvPr id="18" name="Text 15"/>
+          <p:cNvSpPr txBox="1"/>
+          <p:nvPr/>
+        </p:nvSpPr>
+        <p:spPr>
+          <a:xfrm>
+            <a:off x="3474720" y="3474720"/>
+            <a:ext cx="2286000" cy="822960"/>
+          </a:xfrm>
+          <a:prstGeom prst="rect">
+            <a:avLst/>
+          </a:prstGeom>
+          <a:noFill/>
+          <a:ln/>
+        </p:spPr>
+        <p:txBody>
+          <a:bodyPr wrap="square" lIns="0" tIns="0" rIns="0" bIns="0" rtlCol="0" anchor="t"/>
+          <a:lstStyle/>
+          <a:p>
+            <a:pPr indent="0" marL="0">
+              <a:buNone/>
+            </a:pPr>
+            <a:r>
+              <a:rPr lang="en-US" sz="1500" b="1" dirty="0">
+                <a:solidFill>
+                  <a:schemeClr val="tx1"/>
+                </a:solidFill>
+              </a:rPr>
+              <a:t>区のワンルーム条例・</a:t>
+            </a:r>
+            <a:endParaRPr lang="en-US" sz="1500" dirty="0"/>
+          </a:p>
+          <a:p>
+            <a:pPr indent="0" marL="0">
+              <a:buNone/>
+            </a:pPr>
+            <a:r>
+              <a:rPr lang="en-US" sz="1500" b="1" dirty="0">
+                <a:solidFill>
+                  <a:schemeClr val="tx1"/>
+                </a:solidFill>
+              </a:rPr>
+              <a:t>指導要綱に必ず照合</a:t>
+            </a:r>
+            <a:endParaRPr lang="en-US" sz="1500" dirty="0"/>
+          </a:p>
+        </p:txBody>
+      </p:sp>
+      <p:sp>
+        <p:nvSpPr>
+          <p:cNvPr id="19" name="card"/>
+          <p:cNvSpPr/>
+          <p:nvPr/>
+        </p:nvSpPr>
+        <p:spPr>
+          <a:xfrm>
+            <a:off x="6126480" y="2926080"/>
+            <a:ext cx="2651760" cy="1463040"/>
+          </a:xfrm>
+          <a:prstGeom prst="roundRect">
+            <a:avLst>
+              <a:gd name="adj" fmla="val 5000"/>
+            </a:avLst>
+          </a:prstGeom>
+          <a:solidFill>
+            <a:schemeClr val="bg2"/>
+          </a:solidFill>
+          <a:ln/>
+        </p:spPr>
+      </p:sp>
+      <p:sp>
+        <p:nvSpPr>
+          <p:cNvPr id="20" name="Text 17"/>
+          <p:cNvSpPr txBox="1"/>
+          <p:nvPr/>
+        </p:nvSpPr>
+        <p:spPr>
+          <a:xfrm>
+            <a:off x="6309360" y="3063240"/>
+            <a:ext cx="2286000" cy="365760"/>
+          </a:xfrm>
+          <a:prstGeom prst="rect">
+            <a:avLst/>
+          </a:prstGeom>
+          <a:noFill/>
+          <a:ln/>
+        </p:spPr>
+        <p:txBody>
+          <a:bodyPr wrap="square" lIns="0" tIns="0" rIns="0" bIns="0" rtlCol="0" anchor="t"/>
+          <a:lstStyle/>
+          <a:p>
+            <a:pPr indent="0" marL="0">
+              <a:buNone/>
+            </a:pPr>
+            <a:r>
+              <a:rPr lang="en-US" sz="1300" b="1" dirty="0">
+                <a:solidFill>
+                  <a:schemeClr val="accent2"/>
+                </a:solidFill>
+              </a:rPr>
+              <a:t>建築費</a:t>
+            </a:r>
+            <a:endParaRPr lang="en-US" sz="1300" dirty="0"/>
+          </a:p>
+        </p:txBody>
+      </p:sp>
+      <p:sp>
+        <p:nvSpPr>
+          <p:cNvPr id="21" name="Text 18"/>
+          <p:cNvSpPr txBox="1"/>
+          <p:nvPr/>
+        </p:nvSpPr>
+        <p:spPr>
+          <a:xfrm>
+            <a:off x="6309360" y="3474720"/>
+            <a:ext cx="2286000" cy="822960"/>
+          </a:xfrm>
+          <a:prstGeom prst="rect">
+            <a:avLst/>
+          </a:prstGeom>
+          <a:noFill/>
+          <a:ln/>
+        </p:spPr>
+        <p:txBody>
+          <a:bodyPr wrap="square" lIns="0" tIns="0" rIns="0" bIns="0" rtlCol="0" anchor="t"/>
+          <a:lstStyle/>
+          <a:p>
+            <a:pPr indent="0" marL="0">
+              <a:buNone/>
+            </a:pPr>
+            <a:r>
+              <a:rPr lang="en-US" sz="1500" b="1" dirty="0">
+                <a:solidFill>
+                  <a:schemeClr val="tx1"/>
+                </a:solidFill>
+              </a:rPr>
+              <a:t>木造 坪70万円</a:t>
+            </a:r>
+            <a:endParaRPr lang="en-US" sz="1500" dirty="0"/>
+          </a:p>
+          <a:p>
+            <a:pPr indent="0" marL="0">
+              <a:buNone/>
+            </a:pPr>
+            <a:r>
+              <a:rPr lang="en-US" sz="1500" b="1" dirty="0">
+                <a:solidFill>
+                  <a:schemeClr val="tx1"/>
+                </a:solidFill>
+              </a:rPr>
+              <a:t>（解体・諸費用は別）</a:t>
+            </a:r>
+            <a:endParaRPr lang="en-US" sz="1500" dirty="0"/>
           </a:p>
         </p:txBody>
       </p:sp>
@@ -25518,7 +25982,7 @@
                   <a:schemeClr val="tx1"/>
                 </a:solidFill>
               </a:rPr>
-              <a:t>今後のロードマップ</a:t>
+              <a:t>リスクと、その備え</a:t>
             </a:r>
             <a:endParaRPr lang="en-US" sz="2600" dirty="0"/>
           </a:p>
@@ -25532,12 +25996,12 @@
         </p:nvSpPr>
         <p:spPr>
           <a:xfrm>
-            <a:off x="457200" y="1371600"/>
-            <a:ext cx="2651760" cy="2743200"/>
+            <a:off x="457200" y="1280160"/>
+            <a:ext cx="8229600" cy="713232"/>
           </a:xfrm>
           <a:prstGeom prst="roundRect">
             <a:avLst>
-              <a:gd name="adj" fmla="val 2759"/>
+              <a:gd name="adj" fmla="val 10256"/>
             </a:avLst>
           </a:prstGeom>
           <a:solidFill>
@@ -25548,23 +26012,39 @@
       </p:sp>
       <p:sp>
         <p:nvSpPr>
-          <p:cNvPr id="5" name="badge"/>
-          <p:cNvSpPr/>
-          <p:nvPr/>
-        </p:nvSpPr>
-        <p:spPr>
-          <a:xfrm>
-            <a:off x="685800" y="1554480"/>
-            <a:ext cx="548640" cy="548640"/>
-          </a:xfrm>
-          <a:prstGeom prst="ellipse">
-            <a:avLst/>
-          </a:prstGeom>
-          <a:solidFill>
-            <a:schemeClr val="accent1"/>
-          </a:solidFill>
-          <a:ln/>
-        </p:spPr>
+          <p:cNvPr id="5" name="Text 2"/>
+          <p:cNvSpPr txBox="1"/>
+          <p:nvPr/>
+        </p:nvSpPr>
+        <p:spPr>
+          <a:xfrm>
+            <a:off x="685800" y="1280160"/>
+            <a:ext cx="2011680" cy="713232"/>
+          </a:xfrm>
+          <a:prstGeom prst="rect">
+            <a:avLst/>
+          </a:prstGeom>
+          <a:noFill/>
+          <a:ln/>
+        </p:spPr>
+        <p:txBody>
+          <a:bodyPr wrap="square" lIns="0" tIns="0" rIns="0" bIns="0" rtlCol="0" anchor="ctr"/>
+          <a:lstStyle/>
+          <a:p>
+            <a:pPr indent="0" marL="0">
+              <a:buNone/>
+            </a:pPr>
+            <a:r>
+              <a:rPr lang="en-US" sz="1600" b="1" dirty="0">
+                <a:solidFill>
+                  <a:schemeClr val="accent3"/>
+                </a:solidFill>
+              </a:rPr>
+              <a:t>空室</a:t>
+            </a:r>
+            <a:endParaRPr lang="en-US" sz="1600" dirty="0"/>
+          </a:p>
+        </p:txBody>
       </p:sp>
       <p:sp>
         <p:nvSpPr>
@@ -25574,8 +26054,8 @@
         </p:nvSpPr>
         <p:spPr>
           <a:xfrm>
-            <a:off x="685800" y="1554480"/>
-            <a:ext cx="548640" cy="548640"/>
+            <a:off x="2743200" y="1280160"/>
+            <a:ext cx="5760720" cy="713232"/>
           </a:xfrm>
           <a:prstGeom prst="rect">
             <a:avLst/>
@@ -25587,121 +26067,35 @@
           <a:bodyPr wrap="square" lIns="0" tIns="0" rIns="0" bIns="0" rtlCol="0" anchor="ctr"/>
           <a:lstStyle/>
           <a:p>
-            <a:pPr algn="ctr" indent="0" marL="0">
-              <a:buNone/>
-            </a:pPr>
-            <a:r>
-              <a:rPr lang="en-US" sz="1800" b="1" dirty="0">
+            <a:pPr indent="0" marL="0">
+              <a:buNone/>
+            </a:pPr>
+            <a:r>
+              <a:rPr lang="en-US" sz="1400" dirty="0">
                 <a:solidFill>
                   <a:schemeClr val="tx1"/>
                 </a:solidFill>
               </a:rPr>
-              <a:t>1</a:t>
-            </a:r>
-            <a:endParaRPr lang="en-US" sz="1800" dirty="0"/>
-          </a:p>
-        </p:txBody>
-      </p:sp>
-      <p:sp>
-        <p:nvSpPr>
-          <p:cNvPr id="7" name="Text 4"/>
-          <p:cNvSpPr txBox="1"/>
-          <p:nvPr/>
-        </p:nvSpPr>
-        <p:spPr>
-          <a:xfrm>
-            <a:off x="685800" y="2286000"/>
-            <a:ext cx="2286000" cy="457200"/>
-          </a:xfrm>
-          <a:prstGeom prst="rect">
-            <a:avLst/>
-          </a:prstGeom>
-          <a:noFill/>
-          <a:ln/>
-        </p:spPr>
-        <p:txBody>
-          <a:bodyPr wrap="square" lIns="0" tIns="0" rIns="0" bIns="0" rtlCol="0" anchor="t"/>
-          <a:lstStyle/>
-          <a:p>
-            <a:pPr indent="0" marL="0">
-              <a:buNone/>
-            </a:pPr>
-            <a:r>
-              <a:rPr lang="en-US" sz="1700" b="1" dirty="0">
-                <a:solidFill>
-                  <a:schemeClr val="accent2"/>
-                </a:solidFill>
-              </a:rPr>
-              <a:t>いま〜2027年</a:t>
-            </a:r>
-            <a:endParaRPr lang="en-US" sz="1700" dirty="0"/>
-          </a:p>
-        </p:txBody>
-      </p:sp>
-      <p:sp>
-        <p:nvSpPr>
-          <p:cNvPr id="8" name="Text 5"/>
-          <p:cNvSpPr txBox="1"/>
-          <p:nvPr/>
-        </p:nvSpPr>
-        <p:spPr>
-          <a:xfrm>
-            <a:off x="685800" y="2834640"/>
-            <a:ext cx="2286000" cy="1097280"/>
-          </a:xfrm>
-          <a:prstGeom prst="rect">
-            <a:avLst/>
-          </a:prstGeom>
-          <a:noFill/>
-          <a:ln/>
-        </p:spPr>
-        <p:txBody>
-          <a:bodyPr wrap="square" lIns="0" tIns="0" rIns="0" bIns="0" rtlCol="0" anchor="t"/>
-          <a:lstStyle/>
-          <a:p>
-            <a:pPr indent="0" marL="0">
-              <a:buNone/>
-            </a:pPr>
-            <a:r>
-              <a:rPr lang="en-US" sz="1400" dirty="0">
-                <a:solidFill>
-                  <a:schemeClr val="tx1"/>
-                </a:solidFill>
-              </a:rPr>
-              <a:t>再生を進めつつ</a:t>
+              <a:t>満室想定でなく、安い賃料でも回る物件を選ぶ</a:t>
             </a:r>
             <a:endParaRPr lang="en-US" sz="1400" dirty="0"/>
           </a:p>
-          <a:p>
-            <a:pPr indent="0" marL="0">
-              <a:buNone/>
-            </a:pPr>
-            <a:r>
-              <a:rPr lang="en-US" sz="1400" dirty="0">
-                <a:solidFill>
-                  <a:schemeClr val="tx1"/>
-                </a:solidFill>
-              </a:rPr>
-              <a:t>関町南の設計・確認申請</a:t>
-            </a:r>
-            <a:endParaRPr lang="en-US" sz="1400" dirty="0"/>
-          </a:p>
-        </p:txBody>
-      </p:sp>
-      <p:sp>
-        <p:nvSpPr>
-          <p:cNvPr id="9" name="card"/>
+        </p:txBody>
+      </p:sp>
+      <p:sp>
+        <p:nvSpPr>
+          <p:cNvPr id="7" name="card"/>
           <p:cNvSpPr/>
           <p:nvPr/>
         </p:nvSpPr>
         <p:spPr>
           <a:xfrm>
-            <a:off x="3291840" y="1371600"/>
-            <a:ext cx="2651760" cy="2743200"/>
+            <a:off x="457200" y="2103120"/>
+            <a:ext cx="8229600" cy="713232"/>
           </a:xfrm>
           <a:prstGeom prst="roundRect">
             <a:avLst>
-              <a:gd name="adj" fmla="val 2759"/>
+              <a:gd name="adj" fmla="val 10256"/>
             </a:avLst>
           </a:prstGeom>
           <a:solidFill>
@@ -25712,20 +26106,94 @@
       </p:sp>
       <p:sp>
         <p:nvSpPr>
-          <p:cNvPr id="10" name="badge"/>
+          <p:cNvPr id="8" name="Text 5"/>
+          <p:cNvSpPr txBox="1"/>
+          <p:nvPr/>
+        </p:nvSpPr>
+        <p:spPr>
+          <a:xfrm>
+            <a:off x="685800" y="2103120"/>
+            <a:ext cx="2011680" cy="713232"/>
+          </a:xfrm>
+          <a:prstGeom prst="rect">
+            <a:avLst/>
+          </a:prstGeom>
+          <a:noFill/>
+          <a:ln/>
+        </p:spPr>
+        <p:txBody>
+          <a:bodyPr wrap="square" lIns="0" tIns="0" rIns="0" bIns="0" rtlCol="0" anchor="ctr"/>
+          <a:lstStyle/>
+          <a:p>
+            <a:pPr indent="0" marL="0">
+              <a:buNone/>
+            </a:pPr>
+            <a:r>
+              <a:rPr lang="en-US" sz="1600" b="1" dirty="0">
+                <a:solidFill>
+                  <a:schemeClr val="accent3"/>
+                </a:solidFill>
+              </a:rPr>
+              <a:t>金利上昇</a:t>
+            </a:r>
+            <a:endParaRPr lang="en-US" sz="1600" dirty="0"/>
+          </a:p>
+        </p:txBody>
+      </p:sp>
+      <p:sp>
+        <p:nvSpPr>
+          <p:cNvPr id="9" name="Text 6"/>
+          <p:cNvSpPr txBox="1"/>
+          <p:nvPr/>
+        </p:nvSpPr>
+        <p:spPr>
+          <a:xfrm>
+            <a:off x="2743200" y="2103120"/>
+            <a:ext cx="5760720" cy="713232"/>
+          </a:xfrm>
+          <a:prstGeom prst="rect">
+            <a:avLst/>
+          </a:prstGeom>
+          <a:noFill/>
+          <a:ln/>
+        </p:spPr>
+        <p:txBody>
+          <a:bodyPr wrap="square" lIns="0" tIns="0" rIns="0" bIns="0" rtlCol="0" anchor="ctr"/>
+          <a:lstStyle/>
+          <a:p>
+            <a:pPr indent="0" marL="0">
+              <a:buNone/>
+            </a:pPr>
+            <a:r>
+              <a:rPr lang="en-US" sz="1400" dirty="0">
+                <a:solidFill>
+                  <a:schemeClr val="tx1"/>
+                </a:solidFill>
+              </a:rPr>
+              <a:t>耐用年数内で返済、現金を厚めに保有</a:t>
+            </a:r>
+            <a:endParaRPr lang="en-US" sz="1400" dirty="0"/>
+          </a:p>
+        </p:txBody>
+      </p:sp>
+      <p:sp>
+        <p:nvSpPr>
+          <p:cNvPr id="10" name="card"/>
           <p:cNvSpPr/>
           <p:nvPr/>
         </p:nvSpPr>
         <p:spPr>
           <a:xfrm>
-            <a:off x="3520440" y="1554480"/>
-            <a:ext cx="548640" cy="548640"/>
-          </a:xfrm>
-          <a:prstGeom prst="ellipse">
-            <a:avLst/>
+            <a:off x="457200" y="2926080"/>
+            <a:ext cx="8229600" cy="713232"/>
+          </a:xfrm>
+          <a:prstGeom prst="roundRect">
+            <a:avLst>
+              <a:gd name="adj" fmla="val 10256"/>
+            </a:avLst>
           </a:prstGeom>
           <a:solidFill>
-            <a:schemeClr val="accent1"/>
+            <a:schemeClr val="bg2"/>
           </a:solidFill>
           <a:ln/>
         </p:spPr>
@@ -25738,8 +26206,8 @@
         </p:nvSpPr>
         <p:spPr>
           <a:xfrm>
-            <a:off x="3520440" y="1554480"/>
-            <a:ext cx="548640" cy="548640"/>
+            <a:off x="685800" y="2926080"/>
+            <a:ext cx="2011680" cy="713232"/>
           </a:xfrm>
           <a:prstGeom prst="rect">
             <a:avLst/>
@@ -25751,18 +26219,18 @@
           <a:bodyPr wrap="square" lIns="0" tIns="0" rIns="0" bIns="0" rtlCol="0" anchor="ctr"/>
           <a:lstStyle/>
           <a:p>
-            <a:pPr algn="ctr" indent="0" marL="0">
-              <a:buNone/>
-            </a:pPr>
-            <a:r>
-              <a:rPr lang="en-US" sz="1800" b="1" dirty="0">
-                <a:solidFill>
-                  <a:schemeClr val="tx1"/>
-                </a:solidFill>
-              </a:rPr>
-              <a:t>2</a:t>
-            </a:r>
-            <a:endParaRPr lang="en-US" sz="1800" dirty="0"/>
+            <a:pPr indent="0" marL="0">
+              <a:buNone/>
+            </a:pPr>
+            <a:r>
+              <a:rPr lang="en-US" sz="1600" b="1" dirty="0">
+                <a:solidFill>
+                  <a:schemeClr val="accent3"/>
+                </a:solidFill>
+              </a:rPr>
+              <a:t>建築費の高騰</a:t>
+            </a:r>
+            <a:endParaRPr lang="en-US" sz="1600" dirty="0"/>
           </a:p>
         </p:txBody>
       </p:sp>
@@ -25774,136 +26242,66 @@
         </p:nvSpPr>
         <p:spPr>
           <a:xfrm>
-            <a:off x="3520440" y="2286000"/>
-            <a:ext cx="2286000" cy="457200"/>
-          </a:xfrm>
-          <a:prstGeom prst="rect">
-            <a:avLst/>
-          </a:prstGeom>
-          <a:noFill/>
-          <a:ln/>
-        </p:spPr>
-        <p:txBody>
-          <a:bodyPr wrap="square" lIns="0" tIns="0" rIns="0" bIns="0" rtlCol="0" anchor="t"/>
+            <a:off x="2743200" y="2926080"/>
+            <a:ext cx="5760720" cy="713232"/>
+          </a:xfrm>
+          <a:prstGeom prst="rect">
+            <a:avLst/>
+          </a:prstGeom>
+          <a:noFill/>
+          <a:ln/>
+        </p:spPr>
+        <p:txBody>
+          <a:bodyPr wrap="square" lIns="0" tIns="0" rIns="0" bIns="0" rtlCol="0" anchor="ctr"/>
           <a:lstStyle/>
           <a:p>
             <a:pPr indent="0" marL="0">
               <a:buNone/>
             </a:pPr>
             <a:r>
-              <a:rPr lang="en-US" sz="1700" b="1" dirty="0">
-                <a:solidFill>
-                  <a:schemeClr val="accent2"/>
-                </a:solidFill>
-              </a:rPr>
-              <a:t>2027〜2028年</a:t>
-            </a:r>
-            <a:endParaRPr lang="en-US" sz="1700" dirty="0"/>
-          </a:p>
-        </p:txBody>
-      </p:sp>
-      <p:sp>
-        <p:nvSpPr>
-          <p:cNvPr id="13" name="Text 10"/>
-          <p:cNvSpPr txBox="1"/>
-          <p:nvPr/>
-        </p:nvSpPr>
-        <p:spPr>
-          <a:xfrm>
-            <a:off x="3520440" y="2834640"/>
-            <a:ext cx="2286000" cy="1097280"/>
-          </a:xfrm>
-          <a:prstGeom prst="rect">
-            <a:avLst/>
-          </a:prstGeom>
-          <a:noFill/>
-          <a:ln/>
-        </p:spPr>
-        <p:txBody>
-          <a:bodyPr wrap="square" lIns="0" tIns="0" rIns="0" bIns="0" rtlCol="0" anchor="t"/>
-          <a:lstStyle/>
-          <a:p>
-            <a:pPr indent="0" marL="0">
-              <a:buNone/>
-            </a:pPr>
-            <a:r>
               <a:rPr lang="en-US" sz="1400" dirty="0">
                 <a:solidFill>
                   <a:schemeClr val="tx1"/>
                 </a:solidFill>
               </a:rPr>
-              <a:t>着工・竣工</a:t>
+              <a:t>設計段階で積算し、予算に合わせて設計を見直す</a:t>
             </a:r>
             <a:endParaRPr lang="en-US" sz="1400" dirty="0"/>
           </a:p>
-          <a:p>
-            <a:pPr indent="0" marL="0">
-              <a:buNone/>
-            </a:pPr>
-            <a:r>
-              <a:rPr lang="en-US" sz="1400" dirty="0">
-                <a:solidFill>
-                  <a:schemeClr val="tx1"/>
-                </a:solidFill>
-              </a:rPr>
-              <a:t>満室稼働へ</a:t>
-            </a:r>
-            <a:endParaRPr lang="en-US" sz="1400" dirty="0"/>
-          </a:p>
-        </p:txBody>
-      </p:sp>
-      <p:sp>
-        <p:nvSpPr>
-          <p:cNvPr id="14" name="card"/>
+        </p:txBody>
+      </p:sp>
+      <p:sp>
+        <p:nvSpPr>
+          <p:cNvPr id="13" name="card"/>
           <p:cNvSpPr/>
           <p:nvPr/>
         </p:nvSpPr>
         <p:spPr>
           <a:xfrm>
-            <a:off x="6126480" y="1371600"/>
-            <a:ext cx="2651760" cy="2743200"/>
+            <a:off x="457200" y="3749040"/>
+            <a:ext cx="8229600" cy="713232"/>
           </a:xfrm>
           <a:prstGeom prst="roundRect">
             <a:avLst>
-              <a:gd name="adj" fmla="val 2759"/>
+              <a:gd name="adj" fmla="val 10256"/>
             </a:avLst>
           </a:prstGeom>
           <a:solidFill>
-            <a:schemeClr val="tx1"/>
+            <a:schemeClr val="bg2"/>
           </a:solidFill>
           <a:ln/>
         </p:spPr>
       </p:sp>
       <p:sp>
         <p:nvSpPr>
-          <p:cNvPr id="15" name="badge"/>
-          <p:cNvSpPr/>
-          <p:nvPr/>
-        </p:nvSpPr>
-        <p:spPr>
-          <a:xfrm>
-            <a:off x="6355080" y="1554480"/>
-            <a:ext cx="548640" cy="548640"/>
-          </a:xfrm>
-          <a:prstGeom prst="ellipse">
-            <a:avLst/>
-          </a:prstGeom>
-          <a:solidFill>
-            <a:schemeClr val="accent1"/>
-          </a:solidFill>
-          <a:ln/>
-        </p:spPr>
-      </p:sp>
-      <p:sp>
-        <p:nvSpPr>
-          <p:cNvPr id="16" name="Text 13"/>
+          <p:cNvPr id="14" name="Text 11"/>
           <p:cNvSpPr txBox="1"/>
           <p:nvPr/>
         </p:nvSpPr>
         <p:spPr>
           <a:xfrm>
-            <a:off x="6355080" y="1554480"/>
-            <a:ext cx="548640" cy="548640"/>
+            <a:off x="685800" y="3749040"/>
+            <a:ext cx="2011680" cy="713232"/>
           </a:xfrm>
           <a:prstGeom prst="rect">
             <a:avLst/>
@@ -25915,102 +26313,52 @@
           <a:bodyPr wrap="square" lIns="0" tIns="0" rIns="0" bIns="0" rtlCol="0" anchor="ctr"/>
           <a:lstStyle/>
           <a:p>
-            <a:pPr algn="ctr" indent="0" marL="0">
-              <a:buNone/>
-            </a:pPr>
-            <a:r>
-              <a:rPr lang="en-US" sz="1800" b="1" dirty="0">
+            <a:pPr indent="0" marL="0">
+              <a:buNone/>
+            </a:pPr>
+            <a:r>
+              <a:rPr lang="en-US" sz="1600" b="1" dirty="0">
+                <a:solidFill>
+                  <a:schemeClr val="accent3"/>
+                </a:solidFill>
+              </a:rPr>
+              <a:t>出口</a:t>
+            </a:r>
+            <a:endParaRPr lang="en-US" sz="1600" dirty="0"/>
+          </a:p>
+        </p:txBody>
+      </p:sp>
+      <p:sp>
+        <p:nvSpPr>
+          <p:cNvPr id="15" name="Text 12"/>
+          <p:cNvSpPr txBox="1"/>
+          <p:nvPr/>
+        </p:nvSpPr>
+        <p:spPr>
+          <a:xfrm>
+            <a:off x="2743200" y="3749040"/>
+            <a:ext cx="5760720" cy="713232"/>
+          </a:xfrm>
+          <a:prstGeom prst="rect">
+            <a:avLst/>
+          </a:prstGeom>
+          <a:noFill/>
+          <a:ln/>
+        </p:spPr>
+        <p:txBody>
+          <a:bodyPr wrap="square" lIns="0" tIns="0" rIns="0" bIns="0" rtlCol="0" anchor="ctr"/>
+          <a:lstStyle/>
+          <a:p>
+            <a:pPr indent="0" marL="0">
+              <a:buNone/>
+            </a:pPr>
+            <a:r>
+              <a:rPr lang="en-US" sz="1400" dirty="0">
                 <a:solidFill>
                   <a:schemeClr val="tx1"/>
                 </a:solidFill>
               </a:rPr>
-              <a:t>3</a:t>
-            </a:r>
-            <a:endParaRPr lang="en-US" sz="1800" dirty="0"/>
-          </a:p>
-        </p:txBody>
-      </p:sp>
-      <p:sp>
-        <p:nvSpPr>
-          <p:cNvPr id="17" name="Text 14"/>
-          <p:cNvSpPr txBox="1"/>
-          <p:nvPr/>
-        </p:nvSpPr>
-        <p:spPr>
-          <a:xfrm>
-            <a:off x="6355080" y="2286000"/>
-            <a:ext cx="2286000" cy="457200"/>
-          </a:xfrm>
-          <a:prstGeom prst="rect">
-            <a:avLst/>
-          </a:prstGeom>
-          <a:noFill/>
-          <a:ln/>
-        </p:spPr>
-        <p:txBody>
-          <a:bodyPr wrap="square" lIns="0" tIns="0" rIns="0" bIns="0" rtlCol="0" anchor="t"/>
-          <a:lstStyle/>
-          <a:p>
-            <a:pPr indent="0" marL="0">
-              <a:buNone/>
-            </a:pPr>
-            <a:r>
-              <a:rPr lang="en-US" sz="1700" b="1" dirty="0">
-                <a:solidFill>
-                  <a:schemeClr val="accent1"/>
-                </a:solidFill>
-              </a:rPr>
-              <a:t>その先</a:t>
-            </a:r>
-            <a:endParaRPr lang="en-US" sz="1700" dirty="0"/>
-          </a:p>
-        </p:txBody>
-      </p:sp>
-      <p:sp>
-        <p:nvSpPr>
-          <p:cNvPr id="18" name="Text 15"/>
-          <p:cNvSpPr txBox="1"/>
-          <p:nvPr/>
-        </p:nvSpPr>
-        <p:spPr>
-          <a:xfrm>
-            <a:off x="6355080" y="2834640"/>
-            <a:ext cx="2286000" cy="1097280"/>
-          </a:xfrm>
-          <a:prstGeom prst="rect">
-            <a:avLst/>
-          </a:prstGeom>
-          <a:noFill/>
-          <a:ln/>
-        </p:spPr>
-        <p:txBody>
-          <a:bodyPr wrap="square" lIns="0" tIns="0" rIns="0" bIns="0" rtlCol="0" anchor="t"/>
-          <a:lstStyle/>
-          <a:p>
-            <a:pPr indent="0" marL="0">
-              <a:buNone/>
-            </a:pPr>
-            <a:r>
-              <a:rPr lang="en-US" sz="1400" dirty="0">
-                <a:solidFill>
-                  <a:schemeClr val="bg1"/>
-                </a:solidFill>
-              </a:rPr>
-              <a:t>地方から都市部へ</a:t>
-            </a:r>
-            <a:endParaRPr lang="en-US" sz="1400" dirty="0"/>
-          </a:p>
-          <a:p>
-            <a:pPr indent="0" marL="0">
-              <a:buNone/>
-            </a:pPr>
-            <a:r>
-              <a:rPr lang="en-US" sz="1400" dirty="0">
-                <a:solidFill>
-                  <a:schemeClr val="bg1"/>
-                </a:solidFill>
-              </a:rPr>
-              <a:t>資産を入れ替え</a:t>
+              <a:t>積算が厚く、売っても銀行に説明できる物件を持つ</a:t>
             </a:r>
             <a:endParaRPr lang="en-US" sz="1400" dirty="0"/>
           </a:p>
@@ -26118,7 +26466,7 @@
                   <a:schemeClr val="tx1"/>
                 </a:solidFill>
               </a:rPr>
-              <a:t>初心者の方へ：まず「お金を使わずに」増やす</a:t>
+              <a:t>今後のロードマップ</a:t>
             </a:r>
             <a:endParaRPr lang="en-US" sz="2600" dirty="0"/>
           </a:p>
@@ -26132,12 +26480,12 @@
         </p:nvSpPr>
         <p:spPr>
           <a:xfrm>
-            <a:off x="457200" y="1280160"/>
-            <a:ext cx="8229600" cy="960120"/>
+            <a:off x="457200" y="1371600"/>
+            <a:ext cx="2651760" cy="2743200"/>
           </a:xfrm>
           <a:prstGeom prst="roundRect">
             <a:avLst>
-              <a:gd name="adj" fmla="val 7619"/>
+              <a:gd name="adj" fmla="val 2759"/>
             </a:avLst>
           </a:prstGeom>
           <a:solidFill>
@@ -26154,14 +26502,14 @@
         </p:nvSpPr>
         <p:spPr>
           <a:xfrm>
-            <a:off x="685800" y="1463040"/>
-            <a:ext cx="594360" cy="594360"/>
+            <a:off x="685800" y="1554480"/>
+            <a:ext cx="548640" cy="548640"/>
           </a:xfrm>
           <a:prstGeom prst="ellipse">
             <a:avLst/>
           </a:prstGeom>
           <a:solidFill>
-            <a:schemeClr val="accent2"/>
+            <a:schemeClr val="accent1"/>
           </a:solidFill>
           <a:ln/>
         </p:spPr>
@@ -26174,8 +26522,8 @@
         </p:nvSpPr>
         <p:spPr>
           <a:xfrm>
-            <a:off x="685800" y="1463040"/>
-            <a:ext cx="594360" cy="594360"/>
+            <a:off x="685800" y="1554480"/>
+            <a:ext cx="548640" cy="548640"/>
           </a:xfrm>
           <a:prstGeom prst="rect">
             <a:avLst/>
@@ -26193,7 +26541,7 @@
             <a:r>
               <a:rPr lang="en-US" sz="1800" b="1" dirty="0">
                 <a:solidFill>
-                  <a:schemeClr val="bg1"/>
+                  <a:schemeClr val="tx1"/>
                 </a:solidFill>
               </a:rPr>
               <a:t>1</a:t>
@@ -26210,31 +26558,31 @@
         </p:nvSpPr>
         <p:spPr>
           <a:xfrm>
-            <a:off x="1554480" y="1280160"/>
-            <a:ext cx="2743200" cy="960120"/>
-          </a:xfrm>
-          <a:prstGeom prst="rect">
-            <a:avLst/>
-          </a:prstGeom>
-          <a:noFill/>
-          <a:ln/>
-        </p:spPr>
-        <p:txBody>
-          <a:bodyPr wrap="square" lIns="0" tIns="0" rIns="0" bIns="0" rtlCol="0" anchor="ctr"/>
+            <a:off x="685800" y="2286000"/>
+            <a:ext cx="2286000" cy="457200"/>
+          </a:xfrm>
+          <a:prstGeom prst="rect">
+            <a:avLst/>
+          </a:prstGeom>
+          <a:noFill/>
+          <a:ln/>
+        </p:spPr>
+        <p:txBody>
+          <a:bodyPr wrap="square" lIns="0" tIns="0" rIns="0" bIns="0" rtlCol="0" anchor="t"/>
           <a:lstStyle/>
           <a:p>
             <a:pPr indent="0" marL="0">
               <a:buNone/>
             </a:pPr>
             <a:r>
-              <a:rPr lang="en-US" sz="1800" b="1" dirty="0">
-                <a:solidFill>
-                  <a:schemeClr val="tx1"/>
-                </a:solidFill>
-              </a:rPr>
-              <a:t>お金を使わずに買う</a:t>
-            </a:r>
-            <a:endParaRPr lang="en-US" sz="1800" dirty="0"/>
+              <a:rPr lang="en-US" sz="1700" b="1" dirty="0">
+                <a:solidFill>
+                  <a:schemeClr val="accent2"/>
+                </a:solidFill>
+              </a:rPr>
+              <a:t>いま〜2027年</a:t>
+            </a:r>
+            <a:endParaRPr lang="en-US" sz="1700" dirty="0"/>
           </a:p>
         </p:txBody>
       </p:sp>
@@ -26246,17 +26594,17 @@
         </p:nvSpPr>
         <p:spPr>
           <a:xfrm>
-            <a:off x="4389120" y="1280160"/>
-            <a:ext cx="4114800" cy="960120"/>
-          </a:xfrm>
-          <a:prstGeom prst="rect">
-            <a:avLst/>
-          </a:prstGeom>
-          <a:noFill/>
-          <a:ln/>
-        </p:spPr>
-        <p:txBody>
-          <a:bodyPr wrap="square" lIns="0" tIns="0" rIns="0" bIns="0" rtlCol="0" anchor="ctr"/>
+            <a:off x="685800" y="2834640"/>
+            <a:ext cx="2286000" cy="1097280"/>
+          </a:xfrm>
+          <a:prstGeom prst="rect">
+            <a:avLst/>
+          </a:prstGeom>
+          <a:noFill/>
+          <a:ln/>
+        </p:spPr>
+        <p:txBody>
+          <a:bodyPr wrap="square" lIns="0" tIns="0" rIns="0" bIns="0" rtlCol="0" anchor="t"/>
           <a:lstStyle/>
           <a:p>
             <a:pPr indent="0" marL="0">
@@ -26265,10 +26613,24 @@
             <a:r>
               <a:rPr lang="en-US" sz="1400" dirty="0">
                 <a:solidFill>
-                  <a:schemeClr val="accent4"/>
-                </a:solidFill>
-              </a:rPr>
-              <a:t>積算・利回り・満室・耐用年数内。この条件に合う物件だけを買う</a:t>
+                  <a:schemeClr val="tx1"/>
+                </a:solidFill>
+              </a:rPr>
+              <a:t>再生を進めつつ</a:t>
+            </a:r>
+            <a:endParaRPr lang="en-US" sz="1400" dirty="0"/>
+          </a:p>
+          <a:p>
+            <a:pPr indent="0" marL="0">
+              <a:buNone/>
+            </a:pPr>
+            <a:r>
+              <a:rPr lang="en-US" sz="1400" dirty="0">
+                <a:solidFill>
+                  <a:schemeClr val="tx1"/>
+                </a:solidFill>
+              </a:rPr>
+              <a:t>関町南の設計・確認申請</a:t>
             </a:r>
             <a:endParaRPr lang="en-US" sz="1400" dirty="0"/>
           </a:p>
@@ -26282,12 +26644,12 @@
         </p:nvSpPr>
         <p:spPr>
           <a:xfrm>
-            <a:off x="457200" y="2377440"/>
-            <a:ext cx="8229600" cy="960120"/>
+            <a:off x="3291840" y="1371600"/>
+            <a:ext cx="2651760" cy="2743200"/>
           </a:xfrm>
           <a:prstGeom prst="roundRect">
             <a:avLst>
-              <a:gd name="adj" fmla="val 7619"/>
+              <a:gd name="adj" fmla="val 2759"/>
             </a:avLst>
           </a:prstGeom>
           <a:solidFill>
@@ -26304,14 +26666,14 @@
         </p:nvSpPr>
         <p:spPr>
           <a:xfrm>
-            <a:off x="685800" y="2560320"/>
-            <a:ext cx="594360" cy="594360"/>
+            <a:off x="3520440" y="1554480"/>
+            <a:ext cx="548640" cy="548640"/>
           </a:xfrm>
           <a:prstGeom prst="ellipse">
             <a:avLst/>
           </a:prstGeom>
           <a:solidFill>
-            <a:schemeClr val="accent2"/>
+            <a:schemeClr val="accent1"/>
           </a:solidFill>
           <a:ln/>
         </p:spPr>
@@ -26324,8 +26686,8 @@
         </p:nvSpPr>
         <p:spPr>
           <a:xfrm>
-            <a:off x="685800" y="2560320"/>
-            <a:ext cx="594360" cy="594360"/>
+            <a:off x="3520440" y="1554480"/>
+            <a:ext cx="548640" cy="548640"/>
           </a:xfrm>
           <a:prstGeom prst="rect">
             <a:avLst/>
@@ -26343,7 +26705,7 @@
             <a:r>
               <a:rPr lang="en-US" sz="1800" b="1" dirty="0">
                 <a:solidFill>
-                  <a:schemeClr val="bg1"/>
+                  <a:schemeClr val="tx1"/>
                 </a:solidFill>
               </a:rPr>
               <a:t>2</a:t>
@@ -26360,31 +26722,31 @@
         </p:nvSpPr>
         <p:spPr>
           <a:xfrm>
-            <a:off x="1554480" y="2377440"/>
-            <a:ext cx="2743200" cy="960120"/>
-          </a:xfrm>
-          <a:prstGeom prst="rect">
-            <a:avLst/>
-          </a:prstGeom>
-          <a:noFill/>
-          <a:ln/>
-        </p:spPr>
-        <p:txBody>
-          <a:bodyPr wrap="square" lIns="0" tIns="0" rIns="0" bIns="0" rtlCol="0" anchor="ctr"/>
+            <a:off x="3520440" y="2286000"/>
+            <a:ext cx="2286000" cy="457200"/>
+          </a:xfrm>
+          <a:prstGeom prst="rect">
+            <a:avLst/>
+          </a:prstGeom>
+          <a:noFill/>
+          <a:ln/>
+        </p:spPr>
+        <p:txBody>
+          <a:bodyPr wrap="square" lIns="0" tIns="0" rIns="0" bIns="0" rtlCol="0" anchor="t"/>
           <a:lstStyle/>
           <a:p>
             <a:pPr indent="0" marL="0">
               <a:buNone/>
             </a:pPr>
             <a:r>
-              <a:rPr lang="en-US" sz="1800" b="1" dirty="0">
-                <a:solidFill>
-                  <a:schemeClr val="tx1"/>
-                </a:solidFill>
-              </a:rPr>
-              <a:t>インカムで自力をつける</a:t>
-            </a:r>
-            <a:endParaRPr lang="en-US" sz="1800" dirty="0"/>
+              <a:rPr lang="en-US" sz="1700" b="1" dirty="0">
+                <a:solidFill>
+                  <a:schemeClr val="accent2"/>
+                </a:solidFill>
+              </a:rPr>
+              <a:t>2027〜2028年</a:t>
+            </a:r>
+            <a:endParaRPr lang="en-US" sz="1700" dirty="0"/>
           </a:p>
         </p:txBody>
       </p:sp>
@@ -26396,17 +26758,17 @@
         </p:nvSpPr>
         <p:spPr>
           <a:xfrm>
-            <a:off x="4389120" y="2377440"/>
-            <a:ext cx="4114800" cy="960120"/>
-          </a:xfrm>
-          <a:prstGeom prst="rect">
-            <a:avLst/>
-          </a:prstGeom>
-          <a:noFill/>
-          <a:ln/>
-        </p:spPr>
-        <p:txBody>
-          <a:bodyPr wrap="square" lIns="0" tIns="0" rIns="0" bIns="0" rtlCol="0" anchor="ctr"/>
+            <a:off x="3520440" y="2834640"/>
+            <a:ext cx="2286000" cy="1097280"/>
+          </a:xfrm>
+          <a:prstGeom prst="rect">
+            <a:avLst/>
+          </a:prstGeom>
+          <a:noFill/>
+          <a:ln/>
+        </p:spPr>
+        <p:txBody>
+          <a:bodyPr wrap="square" lIns="0" tIns="0" rIns="0" bIns="0" rtlCol="0" anchor="t"/>
           <a:lstStyle/>
           <a:p>
             <a:pPr indent="0" marL="0">
@@ -26415,10 +26777,24 @@
             <a:r>
               <a:rPr lang="en-US" sz="1400" dirty="0">
                 <a:solidFill>
-                  <a:schemeClr val="accent4"/>
-                </a:solidFill>
-              </a:rPr>
-              <a:t>満室で返済し、決算書を整え、次の融資を引く</a:t>
+                  <a:schemeClr val="tx1"/>
+                </a:solidFill>
+              </a:rPr>
+              <a:t>着工・竣工</a:t>
+            </a:r>
+            <a:endParaRPr lang="en-US" sz="1400" dirty="0"/>
+          </a:p>
+          <a:p>
+            <a:pPr indent="0" marL="0">
+              <a:buNone/>
+            </a:pPr>
+            <a:r>
+              <a:rPr lang="en-US" sz="1400" dirty="0">
+                <a:solidFill>
+                  <a:schemeClr val="tx1"/>
+                </a:solidFill>
+              </a:rPr>
+              <a:t>満室稼働へ</a:t>
             </a:r>
             <a:endParaRPr lang="en-US" sz="1400" dirty="0"/>
           </a:p>
@@ -26432,16 +26808,16 @@
         </p:nvSpPr>
         <p:spPr>
           <a:xfrm>
-            <a:off x="457200" y="3474720"/>
-            <a:ext cx="8229600" cy="960120"/>
+            <a:off x="6126480" y="1371600"/>
+            <a:ext cx="2651760" cy="2743200"/>
           </a:xfrm>
           <a:prstGeom prst="roundRect">
             <a:avLst>
-              <a:gd name="adj" fmla="val 7619"/>
+              <a:gd name="adj" fmla="val 2759"/>
             </a:avLst>
           </a:prstGeom>
           <a:solidFill>
-            <a:schemeClr val="bg2"/>
+            <a:schemeClr val="tx1"/>
           </a:solidFill>
           <a:ln/>
         </p:spPr>
@@ -26454,14 +26830,14 @@
         </p:nvSpPr>
         <p:spPr>
           <a:xfrm>
-            <a:off x="685800" y="3657600"/>
-            <a:ext cx="594360" cy="594360"/>
+            <a:off x="6355080" y="1554480"/>
+            <a:ext cx="548640" cy="548640"/>
           </a:xfrm>
           <a:prstGeom prst="ellipse">
             <a:avLst/>
           </a:prstGeom>
           <a:solidFill>
-            <a:schemeClr val="accent2"/>
+            <a:schemeClr val="accent1"/>
           </a:solidFill>
           <a:ln/>
         </p:spPr>
@@ -26474,8 +26850,8 @@
         </p:nvSpPr>
         <p:spPr>
           <a:xfrm>
-            <a:off x="685800" y="3657600"/>
-            <a:ext cx="594360" cy="594360"/>
+            <a:off x="6355080" y="1554480"/>
+            <a:ext cx="548640" cy="548640"/>
           </a:xfrm>
           <a:prstGeom prst="rect">
             <a:avLst/>
@@ -26493,7 +26869,7 @@
             <a:r>
               <a:rPr lang="en-US" sz="1800" b="1" dirty="0">
                 <a:solidFill>
-                  <a:schemeClr val="bg1"/>
+                  <a:schemeClr val="tx1"/>
                 </a:solidFill>
               </a:rPr>
               <a:t>3</a:t>
@@ -26510,31 +26886,31 @@
         </p:nvSpPr>
         <p:spPr>
           <a:xfrm>
-            <a:off x="1554480" y="3474720"/>
-            <a:ext cx="2743200" cy="960120"/>
-          </a:xfrm>
-          <a:prstGeom prst="rect">
-            <a:avLst/>
-          </a:prstGeom>
-          <a:noFill/>
-          <a:ln/>
-        </p:spPr>
-        <p:txBody>
-          <a:bodyPr wrap="square" lIns="0" tIns="0" rIns="0" bIns="0" rtlCol="0" anchor="ctr"/>
+            <a:off x="6355080" y="2286000"/>
+            <a:ext cx="2286000" cy="457200"/>
+          </a:xfrm>
+          <a:prstGeom prst="rect">
+            <a:avLst/>
+          </a:prstGeom>
+          <a:noFill/>
+          <a:ln/>
+        </p:spPr>
+        <p:txBody>
+          <a:bodyPr wrap="square" lIns="0" tIns="0" rIns="0" bIns="0" rtlCol="0" anchor="t"/>
           <a:lstStyle/>
           <a:p>
             <a:pPr indent="0" marL="0">
               <a:buNone/>
             </a:pPr>
             <a:r>
-              <a:rPr lang="en-US" sz="1800" b="1" dirty="0">
-                <a:solidFill>
-                  <a:schemeClr val="tx1"/>
-                </a:solidFill>
-              </a:rPr>
-              <a:t>再生・新築へ進む</a:t>
-            </a:r>
-            <a:endParaRPr lang="en-US" sz="1800" dirty="0"/>
+              <a:rPr lang="en-US" sz="1700" b="1" dirty="0">
+                <a:solidFill>
+                  <a:schemeClr val="accent1"/>
+                </a:solidFill>
+              </a:rPr>
+              <a:t>その先</a:t>
+            </a:r>
+            <a:endParaRPr lang="en-US" sz="1700" dirty="0"/>
           </a:p>
         </p:txBody>
       </p:sp>
@@ -26546,17 +26922,17 @@
         </p:nvSpPr>
         <p:spPr>
           <a:xfrm>
-            <a:off x="4389120" y="3474720"/>
-            <a:ext cx="4114800" cy="960120"/>
-          </a:xfrm>
-          <a:prstGeom prst="rect">
-            <a:avLst/>
-          </a:prstGeom>
-          <a:noFill/>
-          <a:ln/>
-        </p:spPr>
-        <p:txBody>
-          <a:bodyPr wrap="square" lIns="0" tIns="0" rIns="0" bIns="0" rtlCol="0" anchor="ctr"/>
+            <a:off x="6355080" y="2834640"/>
+            <a:ext cx="2286000" cy="1097280"/>
+          </a:xfrm>
+          <a:prstGeom prst="rect">
+            <a:avLst/>
+          </a:prstGeom>
+          <a:noFill/>
+          <a:ln/>
+        </p:spPr>
+        <p:txBody>
+          <a:bodyPr wrap="square" lIns="0" tIns="0" rIns="0" bIns="0" rtlCol="0" anchor="t"/>
           <a:lstStyle/>
           <a:p>
             <a:pPr indent="0" marL="0">
@@ -26565,10 +26941,24 @@
             <a:r>
               <a:rPr lang="en-US" sz="1400" dirty="0">
                 <a:solidFill>
-                  <a:schemeClr val="accent4"/>
-                </a:solidFill>
-              </a:rPr>
-              <a:t>自力がついてから、価値を自分でつくる段階へ</a:t>
+                  <a:schemeClr val="bg1"/>
+                </a:solidFill>
+              </a:rPr>
+              <a:t>地方から都市部へ</a:t>
+            </a:r>
+            <a:endParaRPr lang="en-US" sz="1400" dirty="0"/>
+          </a:p>
+          <a:p>
+            <a:pPr indent="0" marL="0">
+              <a:buNone/>
+            </a:pPr>
+            <a:r>
+              <a:rPr lang="en-US" sz="1400" dirty="0">
+                <a:solidFill>
+                  <a:schemeClr val="bg1"/>
+                </a:solidFill>
+              </a:rPr>
+              <a:t>資産を入れ替え</a:t>
             </a:r>
             <a:endParaRPr lang="en-US" sz="1400" dirty="0"/>
           </a:p>
@@ -26647,6 +27037,564 @@
       <p:sp>
         <p:nvSpPr>
           <p:cNvPr id="2" name="Text 0"/>
+          <p:cNvSpPr/>
+          <p:nvPr>
+            <p:ph idx="100" type="title" hasCustomPrompt="1"/>
+          </p:nvPr>
+        </p:nvSpPr>
+        <p:spPr>
+          <a:xfrm>
+            <a:off x="457200" y="274320"/>
+            <a:ext cx="8229600" cy="777240"/>
+          </a:xfrm>
+          <a:prstGeom prst="rect">
+            <a:avLst/>
+          </a:prstGeom>
+          <a:noFill/>
+          <a:ln/>
+        </p:spPr>
+        <p:txBody>
+          <a:bodyPr wrap="square" lIns="0" tIns="0" rIns="0" bIns="0" rtlCol="0" anchor="ctr"/>
+          <a:lstStyle/>
+          <a:p>
+            <a:pPr algn="l" indent="0" marL="0">
+              <a:buNone/>
+            </a:pPr>
+            <a:r>
+              <a:rPr lang="en-US" sz="2600" b="1" dirty="0">
+                <a:solidFill>
+                  <a:schemeClr val="tx1"/>
+                </a:solidFill>
+              </a:rPr>
+              <a:t>初心者の方へ：まず「お金を使わずに」増やす</a:t>
+            </a:r>
+            <a:endParaRPr lang="en-US" sz="2600" dirty="0"/>
+          </a:p>
+        </p:txBody>
+      </p:sp>
+      <p:sp>
+        <p:nvSpPr>
+          <p:cNvPr id="4" name="card"/>
+          <p:cNvSpPr/>
+          <p:nvPr/>
+        </p:nvSpPr>
+        <p:spPr>
+          <a:xfrm>
+            <a:off x="457200" y="1280160"/>
+            <a:ext cx="8229600" cy="960120"/>
+          </a:xfrm>
+          <a:prstGeom prst="roundRect">
+            <a:avLst>
+              <a:gd name="adj" fmla="val 7619"/>
+            </a:avLst>
+          </a:prstGeom>
+          <a:solidFill>
+            <a:schemeClr val="bg2"/>
+          </a:solidFill>
+          <a:ln/>
+        </p:spPr>
+      </p:sp>
+      <p:sp>
+        <p:nvSpPr>
+          <p:cNvPr id="5" name="badge"/>
+          <p:cNvSpPr/>
+          <p:nvPr/>
+        </p:nvSpPr>
+        <p:spPr>
+          <a:xfrm>
+            <a:off x="685800" y="1463040"/>
+            <a:ext cx="594360" cy="594360"/>
+          </a:xfrm>
+          <a:prstGeom prst="ellipse">
+            <a:avLst/>
+          </a:prstGeom>
+          <a:solidFill>
+            <a:schemeClr val="accent2"/>
+          </a:solidFill>
+          <a:ln/>
+        </p:spPr>
+      </p:sp>
+      <p:sp>
+        <p:nvSpPr>
+          <p:cNvPr id="6" name="Text 3"/>
+          <p:cNvSpPr txBox="1"/>
+          <p:nvPr/>
+        </p:nvSpPr>
+        <p:spPr>
+          <a:xfrm>
+            <a:off x="685800" y="1463040"/>
+            <a:ext cx="594360" cy="594360"/>
+          </a:xfrm>
+          <a:prstGeom prst="rect">
+            <a:avLst/>
+          </a:prstGeom>
+          <a:noFill/>
+          <a:ln/>
+        </p:spPr>
+        <p:txBody>
+          <a:bodyPr wrap="square" lIns="0" tIns="0" rIns="0" bIns="0" rtlCol="0" anchor="ctr"/>
+          <a:lstStyle/>
+          <a:p>
+            <a:pPr algn="ctr" indent="0" marL="0">
+              <a:buNone/>
+            </a:pPr>
+            <a:r>
+              <a:rPr lang="en-US" sz="1800" b="1" dirty="0">
+                <a:solidFill>
+                  <a:schemeClr val="bg1"/>
+                </a:solidFill>
+              </a:rPr>
+              <a:t>1</a:t>
+            </a:r>
+            <a:endParaRPr lang="en-US" sz="1800" dirty="0"/>
+          </a:p>
+        </p:txBody>
+      </p:sp>
+      <p:sp>
+        <p:nvSpPr>
+          <p:cNvPr id="7" name="Text 4"/>
+          <p:cNvSpPr txBox="1"/>
+          <p:nvPr/>
+        </p:nvSpPr>
+        <p:spPr>
+          <a:xfrm>
+            <a:off x="1554480" y="1280160"/>
+            <a:ext cx="2743200" cy="960120"/>
+          </a:xfrm>
+          <a:prstGeom prst="rect">
+            <a:avLst/>
+          </a:prstGeom>
+          <a:noFill/>
+          <a:ln/>
+        </p:spPr>
+        <p:txBody>
+          <a:bodyPr wrap="square" lIns="0" tIns="0" rIns="0" bIns="0" rtlCol="0" anchor="ctr"/>
+          <a:lstStyle/>
+          <a:p>
+            <a:pPr indent="0" marL="0">
+              <a:buNone/>
+            </a:pPr>
+            <a:r>
+              <a:rPr lang="en-US" sz="1800" b="1" dirty="0">
+                <a:solidFill>
+                  <a:schemeClr val="tx1"/>
+                </a:solidFill>
+              </a:rPr>
+              <a:t>お金を使わずに買う</a:t>
+            </a:r>
+            <a:endParaRPr lang="en-US" sz="1800" dirty="0"/>
+          </a:p>
+        </p:txBody>
+      </p:sp>
+      <p:sp>
+        <p:nvSpPr>
+          <p:cNvPr id="8" name="Text 5"/>
+          <p:cNvSpPr txBox="1"/>
+          <p:nvPr/>
+        </p:nvSpPr>
+        <p:spPr>
+          <a:xfrm>
+            <a:off x="4389120" y="1280160"/>
+            <a:ext cx="4114800" cy="960120"/>
+          </a:xfrm>
+          <a:prstGeom prst="rect">
+            <a:avLst/>
+          </a:prstGeom>
+          <a:noFill/>
+          <a:ln/>
+        </p:spPr>
+        <p:txBody>
+          <a:bodyPr wrap="square" lIns="0" tIns="0" rIns="0" bIns="0" rtlCol="0" anchor="ctr"/>
+          <a:lstStyle/>
+          <a:p>
+            <a:pPr indent="0" marL="0">
+              <a:buNone/>
+            </a:pPr>
+            <a:r>
+              <a:rPr lang="en-US" sz="1400" dirty="0">
+                <a:solidFill>
+                  <a:schemeClr val="accent4"/>
+                </a:solidFill>
+              </a:rPr>
+              <a:t>積算・利回り・満室・耐用年数内。この条件に合う物件だけを買う</a:t>
+            </a:r>
+            <a:endParaRPr lang="en-US" sz="1400" dirty="0"/>
+          </a:p>
+        </p:txBody>
+      </p:sp>
+      <p:sp>
+        <p:nvSpPr>
+          <p:cNvPr id="9" name="card"/>
+          <p:cNvSpPr/>
+          <p:nvPr/>
+        </p:nvSpPr>
+        <p:spPr>
+          <a:xfrm>
+            <a:off x="457200" y="2377440"/>
+            <a:ext cx="8229600" cy="960120"/>
+          </a:xfrm>
+          <a:prstGeom prst="roundRect">
+            <a:avLst>
+              <a:gd name="adj" fmla="val 7619"/>
+            </a:avLst>
+          </a:prstGeom>
+          <a:solidFill>
+            <a:schemeClr val="bg2"/>
+          </a:solidFill>
+          <a:ln/>
+        </p:spPr>
+      </p:sp>
+      <p:sp>
+        <p:nvSpPr>
+          <p:cNvPr id="10" name="badge"/>
+          <p:cNvSpPr/>
+          <p:nvPr/>
+        </p:nvSpPr>
+        <p:spPr>
+          <a:xfrm>
+            <a:off x="685800" y="2560320"/>
+            <a:ext cx="594360" cy="594360"/>
+          </a:xfrm>
+          <a:prstGeom prst="ellipse">
+            <a:avLst/>
+          </a:prstGeom>
+          <a:solidFill>
+            <a:schemeClr val="accent2"/>
+          </a:solidFill>
+          <a:ln/>
+        </p:spPr>
+      </p:sp>
+      <p:sp>
+        <p:nvSpPr>
+          <p:cNvPr id="11" name="Text 8"/>
+          <p:cNvSpPr txBox="1"/>
+          <p:nvPr/>
+        </p:nvSpPr>
+        <p:spPr>
+          <a:xfrm>
+            <a:off x="685800" y="2560320"/>
+            <a:ext cx="594360" cy="594360"/>
+          </a:xfrm>
+          <a:prstGeom prst="rect">
+            <a:avLst/>
+          </a:prstGeom>
+          <a:noFill/>
+          <a:ln/>
+        </p:spPr>
+        <p:txBody>
+          <a:bodyPr wrap="square" lIns="0" tIns="0" rIns="0" bIns="0" rtlCol="0" anchor="ctr"/>
+          <a:lstStyle/>
+          <a:p>
+            <a:pPr algn="ctr" indent="0" marL="0">
+              <a:buNone/>
+            </a:pPr>
+            <a:r>
+              <a:rPr lang="en-US" sz="1800" b="1" dirty="0">
+                <a:solidFill>
+                  <a:schemeClr val="bg1"/>
+                </a:solidFill>
+              </a:rPr>
+              <a:t>2</a:t>
+            </a:r>
+            <a:endParaRPr lang="en-US" sz="1800" dirty="0"/>
+          </a:p>
+        </p:txBody>
+      </p:sp>
+      <p:sp>
+        <p:nvSpPr>
+          <p:cNvPr id="12" name="Text 9"/>
+          <p:cNvSpPr txBox="1"/>
+          <p:nvPr/>
+        </p:nvSpPr>
+        <p:spPr>
+          <a:xfrm>
+            <a:off x="1554480" y="2377440"/>
+            <a:ext cx="2743200" cy="960120"/>
+          </a:xfrm>
+          <a:prstGeom prst="rect">
+            <a:avLst/>
+          </a:prstGeom>
+          <a:noFill/>
+          <a:ln/>
+        </p:spPr>
+        <p:txBody>
+          <a:bodyPr wrap="square" lIns="0" tIns="0" rIns="0" bIns="0" rtlCol="0" anchor="ctr"/>
+          <a:lstStyle/>
+          <a:p>
+            <a:pPr indent="0" marL="0">
+              <a:buNone/>
+            </a:pPr>
+            <a:r>
+              <a:rPr lang="en-US" sz="1800" b="1" dirty="0">
+                <a:solidFill>
+                  <a:schemeClr val="tx1"/>
+                </a:solidFill>
+              </a:rPr>
+              <a:t>インカムで自力をつける</a:t>
+            </a:r>
+            <a:endParaRPr lang="en-US" sz="1800" dirty="0"/>
+          </a:p>
+        </p:txBody>
+      </p:sp>
+      <p:sp>
+        <p:nvSpPr>
+          <p:cNvPr id="13" name="Text 10"/>
+          <p:cNvSpPr txBox="1"/>
+          <p:nvPr/>
+        </p:nvSpPr>
+        <p:spPr>
+          <a:xfrm>
+            <a:off x="4389120" y="2377440"/>
+            <a:ext cx="4114800" cy="960120"/>
+          </a:xfrm>
+          <a:prstGeom prst="rect">
+            <a:avLst/>
+          </a:prstGeom>
+          <a:noFill/>
+          <a:ln/>
+        </p:spPr>
+        <p:txBody>
+          <a:bodyPr wrap="square" lIns="0" tIns="0" rIns="0" bIns="0" rtlCol="0" anchor="ctr"/>
+          <a:lstStyle/>
+          <a:p>
+            <a:pPr indent="0" marL="0">
+              <a:buNone/>
+            </a:pPr>
+            <a:r>
+              <a:rPr lang="en-US" sz="1400" dirty="0">
+                <a:solidFill>
+                  <a:schemeClr val="accent4"/>
+                </a:solidFill>
+              </a:rPr>
+              <a:t>満室で返済し、決算書を整え、次の融資を引く</a:t>
+            </a:r>
+            <a:endParaRPr lang="en-US" sz="1400" dirty="0"/>
+          </a:p>
+        </p:txBody>
+      </p:sp>
+      <p:sp>
+        <p:nvSpPr>
+          <p:cNvPr id="14" name="card"/>
+          <p:cNvSpPr/>
+          <p:nvPr/>
+        </p:nvSpPr>
+        <p:spPr>
+          <a:xfrm>
+            <a:off x="457200" y="3474720"/>
+            <a:ext cx="8229600" cy="960120"/>
+          </a:xfrm>
+          <a:prstGeom prst="roundRect">
+            <a:avLst>
+              <a:gd name="adj" fmla="val 7619"/>
+            </a:avLst>
+          </a:prstGeom>
+          <a:solidFill>
+            <a:schemeClr val="bg2"/>
+          </a:solidFill>
+          <a:ln/>
+        </p:spPr>
+      </p:sp>
+      <p:sp>
+        <p:nvSpPr>
+          <p:cNvPr id="15" name="badge"/>
+          <p:cNvSpPr/>
+          <p:nvPr/>
+        </p:nvSpPr>
+        <p:spPr>
+          <a:xfrm>
+            <a:off x="685800" y="3657600"/>
+            <a:ext cx="594360" cy="594360"/>
+          </a:xfrm>
+          <a:prstGeom prst="ellipse">
+            <a:avLst/>
+          </a:prstGeom>
+          <a:solidFill>
+            <a:schemeClr val="accent2"/>
+          </a:solidFill>
+          <a:ln/>
+        </p:spPr>
+      </p:sp>
+      <p:sp>
+        <p:nvSpPr>
+          <p:cNvPr id="16" name="Text 13"/>
+          <p:cNvSpPr txBox="1"/>
+          <p:nvPr/>
+        </p:nvSpPr>
+        <p:spPr>
+          <a:xfrm>
+            <a:off x="685800" y="3657600"/>
+            <a:ext cx="594360" cy="594360"/>
+          </a:xfrm>
+          <a:prstGeom prst="rect">
+            <a:avLst/>
+          </a:prstGeom>
+          <a:noFill/>
+          <a:ln/>
+        </p:spPr>
+        <p:txBody>
+          <a:bodyPr wrap="square" lIns="0" tIns="0" rIns="0" bIns="0" rtlCol="0" anchor="ctr"/>
+          <a:lstStyle/>
+          <a:p>
+            <a:pPr algn="ctr" indent="0" marL="0">
+              <a:buNone/>
+            </a:pPr>
+            <a:r>
+              <a:rPr lang="en-US" sz="1800" b="1" dirty="0">
+                <a:solidFill>
+                  <a:schemeClr val="bg1"/>
+                </a:solidFill>
+              </a:rPr>
+              <a:t>3</a:t>
+            </a:r>
+            <a:endParaRPr lang="en-US" sz="1800" dirty="0"/>
+          </a:p>
+        </p:txBody>
+      </p:sp>
+      <p:sp>
+        <p:nvSpPr>
+          <p:cNvPr id="17" name="Text 14"/>
+          <p:cNvSpPr txBox="1"/>
+          <p:nvPr/>
+        </p:nvSpPr>
+        <p:spPr>
+          <a:xfrm>
+            <a:off x="1554480" y="3474720"/>
+            <a:ext cx="2743200" cy="960120"/>
+          </a:xfrm>
+          <a:prstGeom prst="rect">
+            <a:avLst/>
+          </a:prstGeom>
+          <a:noFill/>
+          <a:ln/>
+        </p:spPr>
+        <p:txBody>
+          <a:bodyPr wrap="square" lIns="0" tIns="0" rIns="0" bIns="0" rtlCol="0" anchor="ctr"/>
+          <a:lstStyle/>
+          <a:p>
+            <a:pPr indent="0" marL="0">
+              <a:buNone/>
+            </a:pPr>
+            <a:r>
+              <a:rPr lang="en-US" sz="1800" b="1" dirty="0">
+                <a:solidFill>
+                  <a:schemeClr val="tx1"/>
+                </a:solidFill>
+              </a:rPr>
+              <a:t>再生・新築へ進む</a:t>
+            </a:r>
+            <a:endParaRPr lang="en-US" sz="1800" dirty="0"/>
+          </a:p>
+        </p:txBody>
+      </p:sp>
+      <p:sp>
+        <p:nvSpPr>
+          <p:cNvPr id="18" name="Text 15"/>
+          <p:cNvSpPr txBox="1"/>
+          <p:nvPr/>
+        </p:nvSpPr>
+        <p:spPr>
+          <a:xfrm>
+            <a:off x="4389120" y="3474720"/>
+            <a:ext cx="4114800" cy="960120"/>
+          </a:xfrm>
+          <a:prstGeom prst="rect">
+            <a:avLst/>
+          </a:prstGeom>
+          <a:noFill/>
+          <a:ln/>
+        </p:spPr>
+        <p:txBody>
+          <a:bodyPr wrap="square" lIns="0" tIns="0" rIns="0" bIns="0" rtlCol="0" anchor="ctr"/>
+          <a:lstStyle/>
+          <a:p>
+            <a:pPr indent="0" marL="0">
+              <a:buNone/>
+            </a:pPr>
+            <a:r>
+              <a:rPr lang="en-US" sz="1400" dirty="0">
+                <a:solidFill>
+                  <a:schemeClr val="accent4"/>
+                </a:solidFill>
+              </a:rPr>
+              <a:t>自力がついてから、価値を自分でつくる段階へ</a:t>
+            </a:r>
+            <a:endParaRPr lang="en-US" sz="1400" dirty="0"/>
+          </a:p>
+        </p:txBody>
+      </p:sp>
+      <p:sp>
+        <p:nvSpPr>
+          <p:cNvPr id="25" name="Slide Number Placeholder 0"/>
+          <p:cNvSpPr>
+            <a:spLocks noGrp="1"/>
+          </p:cNvSpPr>
+          <p:nvPr>
+            <p:ph type="sldNum" sz="quarter" idx="4294967295"/>
+          </p:nvPr>
+        </p:nvSpPr>
+        <p:spPr>
+          <a:xfrm>
+            <a:off x="8321040" y="4754880"/>
+            <a:ext cx="457200" cy="274320"/>
+          </a:xfrm>
+          <a:prstGeom prst="rect">
+            <a:avLst/>
+          </a:prstGeom>
+          <a:extLst>
+            <a:ext uri="{C572A759-6A51-4108-AA02-DFA0A04FC94B}">
+              <ma14:wrappingTextBoxFlag xmlns:ma14="http://schemas.microsoft.com/office/mac/drawingml/2011/main" val="0"/>
+            </a:ext>
+          </a:extLst>
+        </p:spPr>
+        <p:txBody>
+          <a:bodyPr/>
+          <a:lstStyle>
+            <a:lvl1pPr>
+              <a:defRPr sz="1000">
+                <a:solidFill>
+                  <a:schemeClr val="accent4"/>
+                </a:solidFill>
+              </a:defRPr>
+            </a:lvl1pPr>
+          </a:lstStyle>
+          <a:p>
+            <a:pPr algn="r"/>
+            <a:fld id="{F7021451-1387-4CA6-816F-3879F97B5CBC}" type="slidenum">
+              <a:rPr b="0" lang="en-US"/>
+              <a:t>32</a:t>
+            </a:fld>
+            <a:endParaRPr lang="en-US"/>
+          </a:p>
+        </p:txBody>
+      </p:sp>
+    </p:spTree>
+  </p:cSld>
+  <p:clrMapOvr>
+    <a:masterClrMapping/>
+  </p:clrMapOvr>
+</p:sld>
+</file>
+
+<file path=ppt/slides/slide33.xml><?xml version="1.0" encoding="utf-8"?>
+<p:sld xmlns:a="http://schemas.openxmlformats.org/drawingml/2006/main" xmlns:r="http://schemas.openxmlformats.org/officeDocument/2006/relationships" xmlns:p="http://schemas.openxmlformats.org/presentationml/2006/main">
+  <p:cSld name="Slide 33">
+    <p:spTree>
+      <p:nvGrpSpPr>
+        <p:cNvPr id="1" name=""/>
+        <p:cNvGrpSpPr/>
+        <p:nvPr/>
+      </p:nvGrpSpPr>
+      <p:grpSpPr>
+        <a:xfrm>
+          <a:off x="0" y="0"/>
+          <a:ext cx="0" cy="0"/>
+          <a:chOff x="0" y="0"/>
+          <a:chExt cx="0" cy="0"/>
+        </a:xfrm>
+      </p:grpSpPr>
+      <p:sp>
+        <p:nvSpPr>
+          <p:cNvPr id="2" name="Text 0"/>
           <p:cNvSpPr txBox="1"/>
           <p:nvPr/>
         </p:nvSpPr>
@@ -27658,14 +28606,14 @@
               <a:buNone/>
             </a:pPr>
             <a:r>
-              <a:rPr lang="en-US" sz="3200" b="1" dirty="0">
+              <a:rPr lang="en-US" sz="2800" b="1" dirty="0">
                 <a:solidFill>
                   <a:schemeClr val="accent1"/>
                 </a:solidFill>
               </a:rPr>
               <a:t>14店舗</a:t>
             </a:r>
-            <a:endParaRPr lang="en-US" sz="3200" dirty="0"/>
+            <a:endParaRPr lang="en-US" sz="2800" dirty="0"/>
           </a:p>
         </p:txBody>
       </p:sp>
@@ -27766,14 +28714,14 @@
               <a:buNone/>
             </a:pPr>
             <a:r>
-              <a:rPr lang="en-US" sz="3200" b="1" dirty="0">
+              <a:rPr lang="en-US" sz="2800" b="1" dirty="0">
                 <a:solidFill>
                   <a:schemeClr val="accent3"/>
                 </a:solidFill>
               </a:rPr>
               <a:t>7店舗</a:t>
             </a:r>
-            <a:endParaRPr lang="en-US" sz="3200" dirty="0"/>
+            <a:endParaRPr lang="en-US" sz="2800" dirty="0"/>
           </a:p>
         </p:txBody>
       </p:sp>

--- a/presentations/20261023_弱者の戦略_発表資料.pptx
+++ b/presentations/20261023_弱者の戦略_発表資料.pptx
@@ -139,7 +139,7 @@
   <p:extLst>
     <p:ext uri="{521415D9-36F7-43E2-AB2F-B90AF26B5E84}">
       <p14:sectionLst xmlns:p14="http://schemas.microsoft.com/office/powerpoint/2010/main">
-        <p14:section name="発表資料" id="{e53c2cd0-55f2-33bc-b729-c95f102827d0}">
+        <p14:section name="発表資料" id="{f9eee45f-b2f8-d785-20e6-5bd1c0a8a375}">
           <p14:sldIdLst>
             <p14:sldId id="256"/>
             <p14:sldId id="257"/>
@@ -186,6 +186,282 @@
 </file>
 
 <file path=ppt/charts/chart1.xml><?xml version="1.0" encoding="utf-8"?>
+<c:chartSpace xmlns:c="http://schemas.openxmlformats.org/drawingml/2006/chart" xmlns:a="http://schemas.openxmlformats.org/drawingml/2006/main" xmlns:r="http://schemas.openxmlformats.org/officeDocument/2006/relationships">
+  <c:date1904 val="0"/>
+  <c:roundedCorners val="1"/>
+  <c:chart>
+    <c:title>
+      <c:tx>
+        <c:rich>
+          <a:bodyPr/>
+          <a:lstStyle/>
+          <a:p>
+            <a:pPr>
+              <a:defRPr sz="1400" b="0" i="0" u="none" strike="noStrike">
+                <a:solidFill>
+                  <a:srgbClr val="1B1F2A"/>
+                </a:solidFill>
+                <a:latin typeface="+mn-lt"/>
+              </a:defRPr>
+            </a:pPr>
+            <a:r>
+              <a:rPr sz="1400" b="0" i="0" u="none" strike="noStrike">
+                <a:solidFill>
+                  <a:srgbClr val="1B1F2A"/>
+                </a:solidFill>
+                <a:latin typeface="+mn-lt"/>
+              </a:rPr>
+              <a:t>3年間・10物件（万円）</a:t>
+            </a:r>
+          </a:p>
+        </c:rich>
+      </c:tx>
+      <c:layout/>
+      <c:overlay val="0"/>
+    </c:title>
+    <c:autoTitleDeleted val="0"/>
+    <c:plotArea>
+      <c:layout/>
+      <c:barChart>
+        <c:barDir val="col"/>
+        <c:grouping val="clustered"/>
+        <c:varyColors val="0"/>
+        <c:ser>
+          <c:idx val="0"/>
+          <c:order val="0"/>
+          <c:tx>
+            <c:strRef>
+              <c:f>Sheet1!$B$1</c:f>
+              <c:strCache>
+                <c:ptCount val="1"/>
+                <c:pt idx="0">
+                  <c:v>金額（万円）</c:v>
+                </c:pt>
+              </c:strCache>
+            </c:strRef>
+          </c:tx>
+          <c:spPr>
+            <a:solidFill>
+              <a:srgbClr val="6B7A90"/>
+            </a:solidFill>
+            <a:effectLst/>
+          </c:spPr>
+          <c:invertIfNegative val="0"/>
+          <c:dLbls>
+            <c:numFmt formatCode="#,##0" sourceLinked="0"/>
+            <c:txPr>
+              <a:bodyPr/>
+              <a:lstStyle/>
+              <a:p>
+                <a:pPr>
+                  <a:defRPr b="0" i="0" strike="noStrike" sz="1200" u="none">
+                    <a:solidFill>
+                      <a:srgbClr val="1B1F2A"/>
+                    </a:solidFill>
+                    <a:latin typeface="+mn-lt"/>
+                  </a:defRPr>
+                </a:pPr>
+              </a:p>
+            </c:txPr>
+            <c:showLegendKey val="0"/>
+            <c:showVal val="1"/>
+            <c:showCatName val="0"/>
+            <c:showSerName val="0"/>
+            <c:showPercent val="0"/>
+            <c:showBubbleSize val="0"/>
+            <c:showLeaderLines val="0"/>
+          </c:dLbls>
+          <c:dPt>
+            <c:idx val="0"/>
+            <c:invertIfNegative val="0"/>
+            <c:bubble3D val="0"/>
+            <c:spPr>
+              <a:solidFill>
+                <a:srgbClr val="6B7A90"/>
+              </a:solidFill>
+              <a:effectLst/>
+            </c:spPr>
+          </c:dPt>
+          <c:dPt>
+            <c:idx val="1"/>
+            <c:invertIfNegative val="0"/>
+            <c:bubble3D val="0"/>
+            <c:spPr>
+              <a:solidFill>
+                <a:srgbClr val="2E7D6B"/>
+              </a:solidFill>
+              <a:effectLst/>
+            </c:spPr>
+          </c:dPt>
+          <c:cat>
+            <c:multiLvlStrRef>
+              <c:f>Sheet1!$A$2:$A$3</c:f>
+              <c:multiLvlStrCache>
+                <c:ptCount val="2"/>
+                <c:lvl>
+                  <c:pt idx="0">
+                    <c:v>購入価格の合計</c:v>
+                  </c:pt>
+                  <c:pt idx="1">
+                    <c:v>融資額の合計</c:v>
+                  </c:pt>
+                </c:lvl>
+              </c:multiLvlStrCache>
+            </c:multiLvlStrRef>
+          </c:cat>
+          <c:val>
+            <c:numRef>
+              <c:f>Sheet1!$B$2:$B$3</c:f>
+              <c:numCache>
+                <c:formatCode>General</c:formatCode>
+                <c:ptCount val="2"/>
+                <c:pt idx="0">
+                  <c:v>121200</c:v>
+                </c:pt>
+                <c:pt idx="1">
+                  <c:v>120200</c:v>
+                </c:pt>
+              </c:numCache>
+            </c:numRef>
+          </c:val>
+        </c:ser>
+        <c:dLbls>
+          <c:numFmt formatCode="#,##0" sourceLinked="0"/>
+          <c:txPr>
+            <a:bodyPr/>
+            <a:lstStyle/>
+            <a:p>
+              <a:pPr>
+                <a:defRPr b="0" i="0" strike="noStrike" sz="1200" u="none">
+                  <a:solidFill>
+                    <a:srgbClr val="1B1F2A"/>
+                  </a:solidFill>
+                  <a:latin typeface="+mn-lt"/>
+                </a:defRPr>
+              </a:pPr>
+            </a:p>
+          </c:txPr>
+          <c:showLegendKey val="0"/>
+          <c:showVal val="1"/>
+          <c:showCatName val="0"/>
+          <c:showSerName val="0"/>
+          <c:showPercent val="0"/>
+          <c:showBubbleSize val="0"/>
+          <c:showLeaderLines val="0"/>
+        </c:dLbls>
+        <c:gapWidth val="150"/>
+        <c:overlap val="0"/>
+        <c:axId val="2094734554"/>
+        <c:axId val="2094734552"/>
+        <c:axId val="2094734556"/>
+      </c:barChart>
+      <c:catAx>
+        <c:axId val="2094734554"/>
+        <c:scaling>
+          <c:orientation val="minMax"/>
+        </c:scaling>
+        <c:delete val="0"/>
+        <c:axPos val="b"/>
+        <c:numFmt formatCode="General" sourceLinked="1"/>
+        <c:majorTickMark val="out"/>
+        <c:minorTickMark val="none"/>
+        <c:tickLblPos val="low"/>
+        <c:spPr>
+          <a:ln w="12700" cap="flat">
+            <a:solidFill>
+              <a:srgbClr val="888888"/>
+            </a:solidFill>
+            <a:prstDash val="solid"/>
+            <a:round/>
+          </a:ln>
+        </c:spPr>
+        <c:txPr>
+          <a:bodyPr/>
+          <a:lstStyle/>
+          <a:p>
+            <a:pPr>
+              <a:defRPr sz="1200" b="0" i="0" u="none" strike="noStrike">
+                <a:solidFill>
+                  <a:srgbClr val="2B3445"/>
+                </a:solidFill>
+                <a:latin typeface="+mn-lt"/>
+              </a:defRPr>
+            </a:pPr>
+            <a:endParaRPr lang="en-US"/>
+          </a:p>
+        </c:txPr>
+        <c:crossAx val="2094734552"/>
+        <c:crosses val="autoZero"/>
+        <c:auto val="1"/>
+        <c:lblAlgn val="ctr"/>
+        <c:noMultiLvlLbl val="1"/>
+      </c:catAx>
+      <c:valAx>
+        <c:axId val="2094734552"/>
+        <c:scaling>
+          <c:orientation val="minMax"/>
+          <c:max val="150000"/>
+          <c:min val="0"/>
+        </c:scaling>
+        <c:delete val="1"/>
+        <c:axPos val="l"/>
+        <c:numFmt formatCode="General" sourceLinked="0"/>
+        <c:majorTickMark val="out"/>
+        <c:minorTickMark val="none"/>
+        <c:tickLblPos val="nextTo"/>
+        <c:spPr>
+          <a:ln w="12700" cap="flat">
+            <a:solidFill>
+              <a:srgbClr val="888888"/>
+            </a:solidFill>
+            <a:prstDash val="solid"/>
+            <a:round/>
+          </a:ln>
+        </c:spPr>
+        <c:txPr>
+          <a:bodyPr/>
+          <a:lstStyle/>
+          <a:p>
+            <a:pPr>
+              <a:defRPr sz="1200" b="0" i="0" u="none" strike="noStrike">
+                <a:solidFill>
+                  <a:srgbClr val="000000"/>
+                </a:solidFill>
+                <a:latin typeface="Arial"/>
+              </a:defRPr>
+            </a:pPr>
+            <a:endParaRPr lang="en-US"/>
+          </a:p>
+        </c:txPr>
+        <c:crossAx val="2094734554"/>
+        <c:crosses val="autoZero"/>
+        <c:crossBetween val="between"/>
+      </c:valAx>
+      <c:spPr>
+        <a:noFill/>
+        <a:ln>
+          <a:noFill/>
+        </a:ln>
+        <a:effectLst/>
+      </c:spPr>
+    </c:plotArea>
+    <c:plotVisOnly val="1"/>
+    <c:dispBlanksAs val="span"/>
+  </c:chart>
+  <c:spPr>
+    <a:noFill/>
+    <a:ln>
+      <a:noFill/>
+    </a:ln>
+    <a:effectLst/>
+  </c:spPr>
+  <c:externalData r:id="rId1">
+    <c:autoUpdate val="0"/>
+  </c:externalData>
+</c:chartSpace>
+</file>
+
+<file path=ppt/charts/chart2.xml><?xml version="1.0" encoding="utf-8"?>
 <c:chartSpace xmlns:c="http://schemas.openxmlformats.org/drawingml/2006/chart" xmlns:a="http://schemas.openxmlformats.org/drawingml/2006/main" xmlns:r="http://schemas.openxmlformats.org/officeDocument/2006/relationships">
   <c:date1904 val="0"/>
   <c:roundedCorners val="1"/>
@@ -477,7 +753,7 @@
 </c:chartSpace>
 </file>
 
-<file path=ppt/charts/chart2.xml><?xml version="1.0" encoding="utf-8"?>
+<file path=ppt/charts/chart3.xml><?xml version="1.0" encoding="utf-8"?>
 <c:chartSpace xmlns:c="http://schemas.openxmlformats.org/drawingml/2006/chart" xmlns:a="http://schemas.openxmlformats.org/drawingml/2006/main" xmlns:r="http://schemas.openxmlformats.org/officeDocument/2006/relationships">
   <c:date1904 val="0"/>
   <c:roundedCorners val="1"/>
@@ -1389,7 +1665,7 @@
           <a:p>
             <a:r>
               <a:rPr lang="en-US" dirty="0"/>
-              <a:t>【3分】今日の話は、この3段階で貫いています。1段階目は、お金を使わずに物件を増やす。積算が価格を上回る物件を、フルローンやオーバーローンで買う。頭金は10物件で4,000万円だけです。2段階目は、自力をつける。満室で返済し、決算書を整えて、追加融資を引き続ける。3段階目は、自力がついてから、再生と新築に進む。この順番がMDさん流です。</a:t>
+              <a:t>【3分】今日の話は、この3段階で貫いています。1段階目は、お金を使わずに物件を増やす。積算が価格を上回る物件を、フルローンやオーバーローンで買う。10物件の購入価格に対して、融資は約99%でした。2段階目は、自力をつける。満室で返済し、決算書を整えて、追加融資を引き続ける。3段階目は、自力がついてから、再生と新築に進む。この順番がMDさん流です。</a:t>
             </a:r>
             <a:endParaRPr lang="en-US" dirty="0"/>
           </a:p>
@@ -2269,7 +2545,7 @@
           <a:p>
             <a:r>
               <a:rPr lang="en-US" dirty="0"/>
-              <a:t>【2分】2021年6月から2024年12月までの約3年間で10物件を購入。年間家賃収入は1億円を超え、2024年12月時点で約1.3億円になりました。その後、2025年11月の亀山を加えて、現在は約1.44億円です。この間に入れた頭金は合計4,000万円。購入総額12.1億円に対して3.3%です。ほとんどを融資でまかない、家賃で返していくのが、MDさん流の弱者の戦略です。</a:t>
+              <a:t>【2分】2021年6月から2024年12月までの約3年間で10物件を購入しました。購入価格の合計は12.12億円。これに対して引いた融資の合計は12.02億円で、購入価格の約99%です。つまり、ほぼ全額を融資でまかないました。個別に見ると、価格と同額以上の融資が付いた物件も多くあります。この物件群の年間家賃は約1.3億円。その後、2025年11月の亀山を加えて、現在は約1.44億円です。</a:t>
             </a:r>
             <a:endParaRPr lang="en-US" dirty="0"/>
           </a:p>
@@ -5135,7 +5411,7 @@
                   <a:schemeClr val="tx1"/>
                 </a:solidFill>
               </a:rPr>
-              <a:t>頭金は10物件で4,000万円</a:t>
+              <a:t>購入価格の約99%を融資</a:t>
             </a:r>
             <a:endParaRPr lang="en-US" sz="1200" dirty="0"/>
           </a:p>
@@ -8802,7 +9078,7 @@
         <p:spPr>
           <a:xfrm>
             <a:off x="457200" y="4617720"/>
-            <a:ext cx="4572000" cy="274320"/>
+            <a:ext cx="7863840" cy="274320"/>
           </a:xfrm>
           <a:prstGeom prst="rect">
             <a:avLst/>
@@ -8823,7 +9099,7 @@
                   <a:schemeClr val="accent4"/>
                 </a:solidFill>
               </a:rPr>
-              <a:t>※比率は頭金控除後の融資額÷購入価格</a:t>
+              <a:t>※比率は融資額÷購入価格。10物件の合計は、価格12.12億円に対し融資12.02億円（99%）</a:t>
             </a:r>
             <a:endParaRPr lang="en-US" sz="1000" dirty="0"/>
           </a:p>
@@ -17981,26 +18257,42 @@
                   <a:schemeClr val="tx1"/>
                 </a:solidFill>
               </a:rPr>
-              <a:t>結論：お金を使わずに増やし、自力をつけてから次へ</a:t>
+              <a:t>結論：購入価格のほぼ全額を融資で、家賃1億円超へ</a:t>
             </a:r>
             <a:endParaRPr lang="en-US" sz="2600" dirty="0"/>
           </a:p>
         </p:txBody>
       </p:sp>
-      <p:sp>
-        <p:nvSpPr>
-          <p:cNvPr id="4" name="card"/>
+      <p:graphicFrame>
+        <p:nvGraphicFramePr>
+          <p:cNvPr id="4" name="Chart 0" descr=""/>
+          <p:cNvGraphicFramePr/>
+          <p:nvPr/>
+        </p:nvGraphicFramePr>
+        <p:xfrm>
+          <a:off x="365760" y="1188720"/>
+          <a:ext cx="4480560" cy="3291840"/>
+        </p:xfrm>
+        <a:graphic xmlns:a="http://schemas.openxmlformats.org/drawingml/2006/main">
+          <a:graphicData uri="http://schemas.openxmlformats.org/drawingml/2006/chart">
+            <c:chart xmlns:c="http://schemas.openxmlformats.org/drawingml/2006/chart" r:id="rId1"/>
+          </a:graphicData>
+        </a:graphic>
+      </p:graphicFrame>
+      <p:sp>
+        <p:nvSpPr>
+          <p:cNvPr id="5" name="card"/>
           <p:cNvSpPr/>
           <p:nvPr/>
         </p:nvSpPr>
         <p:spPr>
           <a:xfrm>
-            <a:off x="457200" y="1280160"/>
-            <a:ext cx="1920240" cy="2286000"/>
+            <a:off x="5120640" y="1234440"/>
+            <a:ext cx="3566160" cy="960120"/>
           </a:xfrm>
           <a:prstGeom prst="roundRect">
             <a:avLst>
-              <a:gd name="adj" fmla="val 3810"/>
+              <a:gd name="adj" fmla="val 7619"/>
             </a:avLst>
           </a:prstGeom>
           <a:solidFill>
@@ -18011,104 +18303,104 @@
       </p:sp>
       <p:sp>
         <p:nvSpPr>
-          <p:cNvPr id="5" name="Text 2"/>
+          <p:cNvPr id="6" name="Text 2"/>
           <p:cNvSpPr txBox="1"/>
           <p:nvPr/>
         </p:nvSpPr>
         <p:spPr>
           <a:xfrm>
-            <a:off x="594360" y="1371600"/>
-            <a:ext cx="1691640" cy="822960"/>
-          </a:xfrm>
-          <a:prstGeom prst="rect">
-            <a:avLst/>
-          </a:prstGeom>
-          <a:noFill/>
-          <a:ln/>
-        </p:spPr>
-        <p:txBody>
-          <a:bodyPr wrap="square" lIns="0" tIns="0" rIns="0" bIns="0" rtlCol="0" anchor="b"/>
+            <a:off x="5303520" y="1280160"/>
+            <a:ext cx="1554480" cy="868680"/>
+          </a:xfrm>
+          <a:prstGeom prst="rect">
+            <a:avLst/>
+          </a:prstGeom>
+          <a:noFill/>
+          <a:ln/>
+        </p:spPr>
+        <p:txBody>
+          <a:bodyPr wrap="square" lIns="0" tIns="0" rIns="0" bIns="0" rtlCol="0" anchor="ctr"/>
           <a:lstStyle/>
           <a:p>
             <a:pPr indent="0" marL="0">
               <a:buNone/>
             </a:pPr>
             <a:r>
-              <a:rPr lang="en-US" sz="2800" b="1" dirty="0">
-                <a:solidFill>
-                  <a:schemeClr val="accent2"/>
-                </a:solidFill>
-              </a:rPr>
-              <a:t>3年間</a:t>
-            </a:r>
-            <a:endParaRPr lang="en-US" sz="2800" dirty="0"/>
-          </a:p>
-        </p:txBody>
-      </p:sp>
-      <p:sp>
-        <p:nvSpPr>
-          <p:cNvPr id="6" name="Text 3"/>
+              <a:rPr lang="en-US" sz="2400" b="1" dirty="0">
+                <a:solidFill>
+                  <a:schemeClr val="accent3"/>
+                </a:solidFill>
+              </a:rPr>
+              <a:t>約99%</a:t>
+            </a:r>
+            <a:endParaRPr lang="en-US" sz="2400" dirty="0"/>
+          </a:p>
+        </p:txBody>
+      </p:sp>
+      <p:sp>
+        <p:nvSpPr>
+          <p:cNvPr id="7" name="Text 3"/>
           <p:cNvSpPr txBox="1"/>
           <p:nvPr/>
         </p:nvSpPr>
         <p:spPr>
           <a:xfrm>
-            <a:off x="594360" y="2240280"/>
-            <a:ext cx="1691640" cy="548640"/>
-          </a:xfrm>
-          <a:prstGeom prst="rect">
-            <a:avLst/>
-          </a:prstGeom>
-          <a:noFill/>
-          <a:ln/>
-        </p:spPr>
-        <p:txBody>
-          <a:bodyPr wrap="square" lIns="0" tIns="0" rIns="0" bIns="0" rtlCol="0" anchor="t"/>
+            <a:off x="6858000" y="1280160"/>
+            <a:ext cx="1783080" cy="868680"/>
+          </a:xfrm>
+          <a:prstGeom prst="rect">
+            <a:avLst/>
+          </a:prstGeom>
+          <a:noFill/>
+          <a:ln/>
+        </p:spPr>
+        <p:txBody>
+          <a:bodyPr wrap="square" lIns="0" tIns="0" rIns="0" bIns="0" rtlCol="0" anchor="ctr"/>
           <a:lstStyle/>
           <a:p>
             <a:pPr indent="0" marL="0">
               <a:buNone/>
             </a:pPr>
             <a:r>
-              <a:rPr lang="en-US" sz="1300" dirty="0">
+              <a:rPr lang="en-US" sz="1100" dirty="0">
                 <a:solidFill>
                   <a:schemeClr val="tx2"/>
                 </a:solidFill>
               </a:rPr>
-              <a:t>2021年6月〜2024年12月</a:t>
-            </a:r>
-            <a:endParaRPr lang="en-US" sz="1300" dirty="0"/>
+              <a:t>購入価格に対する</a:t>
+            </a:r>
+            <a:endParaRPr lang="en-US" sz="1100" dirty="0"/>
           </a:p>
           <a:p>
             <a:pPr indent="0" marL="0">
               <a:buNone/>
             </a:pPr>
             <a:r>
-              <a:rPr lang="en-US" sz="1300" dirty="0">
+              <a:rPr lang="en-US" sz="1100" dirty="0">
                 <a:solidFill>
                   <a:schemeClr val="tx2"/>
                 </a:solidFill>
               </a:rPr>
-              <a:t>この期間に10物件を購入</a:t>
-            </a:r>
-            <a:endParaRPr lang="en-US" sz="1300" dirty="0"/>
-          </a:p>
-        </p:txBody>
-      </p:sp>
-      <p:sp>
-        <p:nvSpPr>
-          <p:cNvPr id="7" name="card"/>
+              <a:t>融資額の割合</a:t>
+            </a:r>
+            <a:endParaRPr lang="en-US" sz="1100" dirty="0"/>
+          </a:p>
+        </p:txBody>
+      </p:sp>
+      <p:sp>
+        <p:nvSpPr>
+          <p:cNvPr id="8" name="card"/>
           <p:cNvSpPr/>
           <p:nvPr/>
         </p:nvSpPr>
         <p:spPr>
           <a:xfrm>
-            <a:off x="2542032" y="1280160"/>
-            <a:ext cx="1920240" cy="2286000"/>
+            <a:off x="5120640" y="2331720"/>
+            <a:ext cx="3566160" cy="960120"/>
           </a:xfrm>
           <a:prstGeom prst="roundRect">
             <a:avLst>
-              <a:gd name="adj" fmla="val 3810"/>
+              <a:gd name="adj" fmla="val 7619"/>
             </a:avLst>
           </a:prstGeom>
           <a:solidFill>
@@ -18119,104 +18411,104 @@
       </p:sp>
       <p:sp>
         <p:nvSpPr>
-          <p:cNvPr id="8" name="Text 5"/>
+          <p:cNvPr id="9" name="Text 5"/>
           <p:cNvSpPr txBox="1"/>
           <p:nvPr/>
         </p:nvSpPr>
         <p:spPr>
           <a:xfrm>
-            <a:off x="2679192" y="1371600"/>
-            <a:ext cx="1691640" cy="822960"/>
-          </a:xfrm>
-          <a:prstGeom prst="rect">
-            <a:avLst/>
-          </a:prstGeom>
-          <a:noFill/>
-          <a:ln/>
-        </p:spPr>
-        <p:txBody>
-          <a:bodyPr wrap="square" lIns="0" tIns="0" rIns="0" bIns="0" rtlCol="0" anchor="b"/>
+            <a:off x="5303520" y="2377440"/>
+            <a:ext cx="1554480" cy="868680"/>
+          </a:xfrm>
+          <a:prstGeom prst="rect">
+            <a:avLst/>
+          </a:prstGeom>
+          <a:noFill/>
+          <a:ln/>
+        </p:spPr>
+        <p:txBody>
+          <a:bodyPr wrap="square" lIns="0" tIns="0" rIns="0" bIns="0" rtlCol="0" anchor="ctr"/>
           <a:lstStyle/>
           <a:p>
             <a:pPr indent="0" marL="0">
               <a:buNone/>
             </a:pPr>
             <a:r>
-              <a:rPr lang="en-US" sz="2800" b="1" dirty="0">
+              <a:rPr lang="en-US" sz="2400" b="1" dirty="0">
                 <a:solidFill>
                   <a:schemeClr val="accent2"/>
                 </a:solidFill>
               </a:rPr>
               <a:t>1億円超</a:t>
             </a:r>
-            <a:endParaRPr lang="en-US" sz="2800" dirty="0"/>
-          </a:p>
-        </p:txBody>
-      </p:sp>
-      <p:sp>
-        <p:nvSpPr>
-          <p:cNvPr id="9" name="Text 6"/>
+            <a:endParaRPr lang="en-US" sz="2400" dirty="0"/>
+          </a:p>
+        </p:txBody>
+      </p:sp>
+      <p:sp>
+        <p:nvSpPr>
+          <p:cNvPr id="10" name="Text 6"/>
           <p:cNvSpPr txBox="1"/>
           <p:nvPr/>
         </p:nvSpPr>
         <p:spPr>
           <a:xfrm>
-            <a:off x="2679192" y="2240280"/>
-            <a:ext cx="1691640" cy="548640"/>
-          </a:xfrm>
-          <a:prstGeom prst="rect">
-            <a:avLst/>
-          </a:prstGeom>
-          <a:noFill/>
-          <a:ln/>
-        </p:spPr>
-        <p:txBody>
-          <a:bodyPr wrap="square" lIns="0" tIns="0" rIns="0" bIns="0" rtlCol="0" anchor="t"/>
+            <a:off x="6858000" y="2377440"/>
+            <a:ext cx="1783080" cy="868680"/>
+          </a:xfrm>
+          <a:prstGeom prst="rect">
+            <a:avLst/>
+          </a:prstGeom>
+          <a:noFill/>
+          <a:ln/>
+        </p:spPr>
+        <p:txBody>
+          <a:bodyPr wrap="square" lIns="0" tIns="0" rIns="0" bIns="0" rtlCol="0" anchor="ctr"/>
           <a:lstStyle/>
           <a:p>
             <a:pPr indent="0" marL="0">
               <a:buNone/>
             </a:pPr>
             <a:r>
-              <a:rPr lang="en-US" sz="1300" dirty="0">
+              <a:rPr lang="en-US" sz="1100" dirty="0">
                 <a:solidFill>
                   <a:schemeClr val="tx2"/>
                 </a:solidFill>
               </a:rPr>
               <a:t>3年間でつくった</a:t>
             </a:r>
-            <a:endParaRPr lang="en-US" sz="1300" dirty="0"/>
+            <a:endParaRPr lang="en-US" sz="1100" dirty="0"/>
           </a:p>
           <a:p>
             <a:pPr indent="0" marL="0">
               <a:buNone/>
             </a:pPr>
             <a:r>
-              <a:rPr lang="en-US" sz="1300" dirty="0">
+              <a:rPr lang="en-US" sz="1100" dirty="0">
                 <a:solidFill>
                   <a:schemeClr val="tx2"/>
                 </a:solidFill>
               </a:rPr>
               <a:t>年間家賃収入（約1.3億円）</a:t>
             </a:r>
-            <a:endParaRPr lang="en-US" sz="1300" dirty="0"/>
-          </a:p>
-        </p:txBody>
-      </p:sp>
-      <p:sp>
-        <p:nvSpPr>
-          <p:cNvPr id="10" name="card"/>
+            <a:endParaRPr lang="en-US" sz="1100" dirty="0"/>
+          </a:p>
+        </p:txBody>
+      </p:sp>
+      <p:sp>
+        <p:nvSpPr>
+          <p:cNvPr id="11" name="card"/>
           <p:cNvSpPr/>
           <p:nvPr/>
         </p:nvSpPr>
         <p:spPr>
           <a:xfrm>
-            <a:off x="4626864" y="1280160"/>
-            <a:ext cx="1920240" cy="2286000"/>
+            <a:off x="5120640" y="3429000"/>
+            <a:ext cx="3566160" cy="960120"/>
           </a:xfrm>
           <a:prstGeom prst="roundRect">
             <a:avLst>
-              <a:gd name="adj" fmla="val 3810"/>
+              <a:gd name="adj" fmla="val 7619"/>
             </a:avLst>
           </a:prstGeom>
           <a:solidFill>
@@ -18227,50 +18519,100 @@
       </p:sp>
       <p:sp>
         <p:nvSpPr>
-          <p:cNvPr id="11" name="Text 8"/>
+          <p:cNvPr id="12" name="Text 8"/>
           <p:cNvSpPr txBox="1"/>
           <p:nvPr/>
         </p:nvSpPr>
         <p:spPr>
           <a:xfrm>
-            <a:off x="4764024" y="1371600"/>
-            <a:ext cx="1691640" cy="822960"/>
-          </a:xfrm>
-          <a:prstGeom prst="rect">
-            <a:avLst/>
-          </a:prstGeom>
-          <a:noFill/>
-          <a:ln/>
-        </p:spPr>
-        <p:txBody>
-          <a:bodyPr wrap="square" lIns="0" tIns="0" rIns="0" bIns="0" rtlCol="0" anchor="b"/>
+            <a:off x="5303520" y="3474720"/>
+            <a:ext cx="1554480" cy="868680"/>
+          </a:xfrm>
+          <a:prstGeom prst="rect">
+            <a:avLst/>
+          </a:prstGeom>
+          <a:noFill/>
+          <a:ln/>
+        </p:spPr>
+        <p:txBody>
+          <a:bodyPr wrap="square" lIns="0" tIns="0" rIns="0" bIns="0" rtlCol="0" anchor="ctr"/>
           <a:lstStyle/>
           <a:p>
             <a:pPr indent="0" marL="0">
               <a:buNone/>
             </a:pPr>
             <a:r>
-              <a:rPr lang="en-US" sz="2800" b="1" dirty="0">
+              <a:rPr lang="en-US" sz="2400" b="1" dirty="0">
                 <a:solidFill>
                   <a:schemeClr val="accent2"/>
                 </a:solidFill>
               </a:rPr>
               <a:t>1.44億円</a:t>
             </a:r>
-            <a:endParaRPr lang="en-US" sz="2800" dirty="0"/>
-          </a:p>
-        </p:txBody>
-      </p:sp>
-      <p:sp>
-        <p:nvSpPr>
-          <p:cNvPr id="12" name="Text 9"/>
+            <a:endParaRPr lang="en-US" sz="2400" dirty="0"/>
+          </a:p>
+        </p:txBody>
+      </p:sp>
+      <p:sp>
+        <p:nvSpPr>
+          <p:cNvPr id="13" name="Text 9"/>
           <p:cNvSpPr txBox="1"/>
           <p:nvPr/>
         </p:nvSpPr>
         <p:spPr>
           <a:xfrm>
-            <a:off x="4764024" y="2240280"/>
-            <a:ext cx="1691640" cy="548640"/>
+            <a:off x="6858000" y="3474720"/>
+            <a:ext cx="1783080" cy="868680"/>
+          </a:xfrm>
+          <a:prstGeom prst="rect">
+            <a:avLst/>
+          </a:prstGeom>
+          <a:noFill/>
+          <a:ln/>
+        </p:spPr>
+        <p:txBody>
+          <a:bodyPr wrap="square" lIns="0" tIns="0" rIns="0" bIns="0" rtlCol="0" anchor="ctr"/>
+          <a:lstStyle/>
+          <a:p>
+            <a:pPr indent="0" marL="0">
+              <a:buNone/>
+            </a:pPr>
+            <a:r>
+              <a:rPr lang="en-US" sz="1100" dirty="0">
+                <a:solidFill>
+                  <a:schemeClr val="tx2"/>
+                </a:solidFill>
+              </a:rPr>
+              <a:t>現在の年間家賃収入</a:t>
+            </a:r>
+            <a:endParaRPr lang="en-US" sz="1100" dirty="0"/>
+          </a:p>
+          <a:p>
+            <a:pPr indent="0" marL="0">
+              <a:buNone/>
+            </a:pPr>
+            <a:r>
+              <a:rPr lang="en-US" sz="1100" dirty="0">
+                <a:solidFill>
+                  <a:schemeClr val="tx2"/>
+                </a:solidFill>
+              </a:rPr>
+              <a:t>（2025年11月の亀山を加えて）</a:t>
+            </a:r>
+            <a:endParaRPr lang="en-US" sz="1100" dirty="0"/>
+          </a:p>
+        </p:txBody>
+      </p:sp>
+      <p:sp>
+        <p:nvSpPr>
+          <p:cNvPr id="14" name="Text 10"/>
+          <p:cNvSpPr txBox="1"/>
+          <p:nvPr/>
+        </p:nvSpPr>
+        <p:spPr>
+          <a:xfrm>
+            <a:off x="457200" y="4617720"/>
+            <a:ext cx="8046720" cy="274320"/>
           </a:xfrm>
           <a:prstGeom prst="rect">
             <a:avLst/>
@@ -18286,206 +18628,12 @@
               <a:buNone/>
             </a:pPr>
             <a:r>
-              <a:rPr lang="en-US" sz="1300" dirty="0">
-                <a:solidFill>
-                  <a:schemeClr val="tx2"/>
-                </a:solidFill>
-              </a:rPr>
-              <a:t>現在の年間家賃収入</a:t>
-            </a:r>
-            <a:endParaRPr lang="en-US" sz="1300" dirty="0"/>
-          </a:p>
-          <a:p>
-            <a:pPr indent="0" marL="0">
-              <a:buNone/>
-            </a:pPr>
-            <a:r>
-              <a:rPr lang="en-US" sz="1300" dirty="0">
-                <a:solidFill>
-                  <a:schemeClr val="tx2"/>
-                </a:solidFill>
-              </a:rPr>
-              <a:t>（2025年11月の亀山を加えて）</a:t>
-            </a:r>
-            <a:endParaRPr lang="en-US" sz="1300" dirty="0"/>
-          </a:p>
-        </p:txBody>
-      </p:sp>
-      <p:sp>
-        <p:nvSpPr>
-          <p:cNvPr id="13" name="card"/>
-          <p:cNvSpPr/>
-          <p:nvPr/>
-        </p:nvSpPr>
-        <p:spPr>
-          <a:xfrm>
-            <a:off x="6711696" y="1280160"/>
-            <a:ext cx="1920240" cy="2286000"/>
-          </a:xfrm>
-          <a:prstGeom prst="roundRect">
-            <a:avLst>
-              <a:gd name="adj" fmla="val 3810"/>
-            </a:avLst>
-          </a:prstGeom>
-          <a:solidFill>
-            <a:schemeClr val="bg2"/>
-          </a:solidFill>
-          <a:ln/>
-        </p:spPr>
-      </p:sp>
-      <p:sp>
-        <p:nvSpPr>
-          <p:cNvPr id="14" name="Text 11"/>
-          <p:cNvSpPr txBox="1"/>
-          <p:nvPr/>
-        </p:nvSpPr>
-        <p:spPr>
-          <a:xfrm>
-            <a:off x="6848856" y="1371600"/>
-            <a:ext cx="1691640" cy="822960"/>
-          </a:xfrm>
-          <a:prstGeom prst="rect">
-            <a:avLst/>
-          </a:prstGeom>
-          <a:noFill/>
-          <a:ln/>
-        </p:spPr>
-        <p:txBody>
-          <a:bodyPr wrap="square" lIns="0" tIns="0" rIns="0" bIns="0" rtlCol="0" anchor="b"/>
-          <a:lstStyle/>
-          <a:p>
-            <a:pPr indent="0" marL="0">
-              <a:buNone/>
-            </a:pPr>
-            <a:r>
-              <a:rPr lang="en-US" sz="2800" b="1" dirty="0">
-                <a:solidFill>
-                  <a:schemeClr val="accent3"/>
-                </a:solidFill>
-              </a:rPr>
-              <a:t>3.3%</a:t>
-            </a:r>
-            <a:endParaRPr lang="en-US" sz="2800" dirty="0"/>
-          </a:p>
-        </p:txBody>
-      </p:sp>
-      <p:sp>
-        <p:nvSpPr>
-          <p:cNvPr id="15" name="Text 12"/>
-          <p:cNvSpPr txBox="1"/>
-          <p:nvPr/>
-        </p:nvSpPr>
-        <p:spPr>
-          <a:xfrm>
-            <a:off x="6848856" y="2240280"/>
-            <a:ext cx="1691640" cy="548640"/>
-          </a:xfrm>
-          <a:prstGeom prst="rect">
-            <a:avLst/>
-          </a:prstGeom>
-          <a:noFill/>
-          <a:ln/>
-        </p:spPr>
-        <p:txBody>
-          <a:bodyPr wrap="square" lIns="0" tIns="0" rIns="0" bIns="0" rtlCol="0" anchor="t"/>
-          <a:lstStyle/>
-          <a:p>
-            <a:pPr indent="0" marL="0">
-              <a:buNone/>
-            </a:pPr>
-            <a:r>
-              <a:rPr lang="en-US" sz="1300" dirty="0">
-                <a:solidFill>
-                  <a:schemeClr val="tx2"/>
-                </a:solidFill>
-              </a:rPr>
-              <a:t>頭金の比率</a:t>
-            </a:r>
-            <a:endParaRPr lang="en-US" sz="1300" dirty="0"/>
-          </a:p>
-          <a:p>
-            <a:pPr indent="0" marL="0">
-              <a:buNone/>
-            </a:pPr>
-            <a:r>
-              <a:rPr lang="en-US" sz="1300" dirty="0">
-                <a:solidFill>
-                  <a:schemeClr val="tx2"/>
-                </a:solidFill>
-              </a:rPr>
-              <a:t>（3年間の購入12.1億円に対し4,000万円）</a:t>
-            </a:r>
-            <a:endParaRPr lang="en-US" sz="1300" dirty="0"/>
-          </a:p>
-        </p:txBody>
-      </p:sp>
-      <p:sp>
-        <p:nvSpPr>
-          <p:cNvPr id="16" name="Text 13"/>
-          <p:cNvSpPr txBox="1"/>
-          <p:nvPr/>
-        </p:nvSpPr>
-        <p:spPr>
-          <a:xfrm>
-            <a:off x="457200" y="3840480"/>
-            <a:ext cx="8229600" cy="640080"/>
-          </a:xfrm>
-          <a:prstGeom prst="rect">
-            <a:avLst/>
-          </a:prstGeom>
-          <a:noFill/>
-          <a:ln/>
-        </p:spPr>
-        <p:txBody>
-          <a:bodyPr wrap="square" lIns="0" tIns="0" rIns="0" bIns="0" rtlCol="0" anchor="t"/>
-          <a:lstStyle/>
-          <a:p>
-            <a:pPr indent="0" marL="0">
-              <a:buNone/>
-            </a:pPr>
-            <a:r>
-              <a:rPr lang="en-US" sz="1600" b="1" dirty="0">
-                <a:solidFill>
-                  <a:schemeClr val="tx1"/>
-                </a:solidFill>
-              </a:rPr>
-              <a:t>すべての鍵は、「いかにお金を使わずに増やすか」。自力がついたら、再生と新築へ進む。</a:t>
-            </a:r>
-            <a:endParaRPr lang="en-US" sz="1600" dirty="0"/>
-          </a:p>
-        </p:txBody>
-      </p:sp>
-      <p:sp>
-        <p:nvSpPr>
-          <p:cNvPr id="17" name="Text 14"/>
-          <p:cNvSpPr txBox="1"/>
-          <p:nvPr/>
-        </p:nvSpPr>
-        <p:spPr>
-          <a:xfrm>
-            <a:off x="457200" y="4617720"/>
-            <a:ext cx="7589520" cy="274320"/>
-          </a:xfrm>
-          <a:prstGeom prst="rect">
-            <a:avLst/>
-          </a:prstGeom>
-          <a:noFill/>
-          <a:ln/>
-        </p:spPr>
-        <p:txBody>
-          <a:bodyPr wrap="square" lIns="0" tIns="0" rIns="0" bIns="0" rtlCol="0" anchor="t"/>
-          <a:lstStyle/>
-          <a:p>
-            <a:pPr indent="0" marL="0">
-              <a:buNone/>
-            </a:pPr>
-            <a:r>
               <a:rPr lang="en-US" sz="1000" dirty="0">
                 <a:solidFill>
                   <a:schemeClr val="accent4"/>
                 </a:solidFill>
               </a:rPr>
-              <a:t>※年間家賃は市原（売却済み）を除く。現在の1.44億円は14,415万円。購入総額・頭金は2024年12月までの10物件</a:t>
+              <a:t>※2021年6月〜2024年12月の10物件（市原を含む）。年間家賃は市原（売却済み）を除く。現在の1.44億円は14,415万円</a:t>
             </a:r>
             <a:endParaRPr lang="en-US" sz="1000" dirty="0"/>
           </a:p>

--- a/presentations/20261023_弱者の戦略_発表資料.pptx
+++ b/presentations/20261023_弱者の戦略_発表資料.pptx
@@ -139,7 +139,7 @@
   <p:extLst>
     <p:ext uri="{521415D9-36F7-43E2-AB2F-B90AF26B5E84}">
       <p14:sectionLst xmlns:p14="http://schemas.microsoft.com/office/powerpoint/2010/main">
-        <p14:section name="発表資料" id="{f9eee45f-b2f8-d785-20e6-5bd1c0a8a375}">
+        <p14:section name="発表資料" id="{1a563e09-269e-5fe6-fe97-0ddce81762a6}">
           <p14:sldIdLst>
             <p14:sldId id="256"/>
             <p14:sldId id="257"/>
@@ -319,7 +319,7 @@
                   <c:v>121200</c:v>
                 </c:pt>
                 <c:pt idx="1">
-                  <c:v>120200</c:v>
+                  <c:v>121700</c:v>
                 </c:pt>
               </c:numCache>
             </c:numRef>
@@ -944,7 +944,7 @@
             <c:bubble3D val="0"/>
             <c:spPr>
               <a:solidFill>
-                <a:srgbClr val="6B7A90"/>
+                <a:srgbClr val="2E7D6B"/>
               </a:solidFill>
               <a:effectLst/>
             </c:spPr>
@@ -1037,7 +1037,7 @@
                   <c:v>96</c:v>
                 </c:pt>
                 <c:pt idx="9">
-                  <c:v>87.5</c:v>
+                  <c:v>125</c:v>
                 </c:pt>
                 <c:pt idx="10">
                   <c:v>100</c:v>
@@ -1121,7 +1121,7 @@
         <c:axId val="2094734552"/>
         <c:scaling>
           <c:orientation val="minMax"/>
-          <c:max val="125"/>
+          <c:max val="140"/>
           <c:min val="0"/>
         </c:scaling>
         <c:delete val="1"/>
@@ -1665,7 +1665,7 @@
           <a:p>
             <a:r>
               <a:rPr lang="en-US" dirty="0"/>
-              <a:t>【3分】今日の話は、この3段階で貫いています。1段階目は、お金を使わずに物件を増やす。積算が価格を上回る物件を、フルローンやオーバーローンで買う。10物件の購入価格に対して、融資は約99%でした。2段階目は、自力をつける。満室で返済し、決算書を整えて、追加融資を引き続ける。3段階目は、自力がついてから、再生と新築に進む。この順番がMDさん流です。</a:t>
+              <a:t>【3分】今日の話は、この3段階で貫いています。1段階目は、お金を使わずに物件を増やす。積算が価格を上回る物件を、フルローンやオーバーローンで買う。10物件の購入価格に対して、融資は100.4%でした。2段階目は、自力をつける。満室で返済し、決算書を整えて、追加融資を引き続ける。3段階目は、自力がついてから、再生と新築に進む。この順番がMDさん流です。</a:t>
             </a:r>
             <a:endParaRPr lang="en-US" dirty="0"/>
           </a:p>
@@ -2193,7 +2193,7 @@
           <a:p>
             <a:r>
               <a:rPr lang="en-US" dirty="0"/>
-              <a:t>【3分】これが弱者の戦略の核心です。購入価格に対する融資額の比率を並べました。100%を超える物件、つまり諸費用まで含めて融資が付いた物件が7つあります。物件の積算と収益力が評価され、自己資金をほとんど入れずに買えています。※比率は融資額÷購入価格（頭金控除後）です。</a:t>
+              <a:t>【3分】これが弱者の戦略の核心です。購入価格に対する融資額の比率を並べました。100%を超える物件、つまり諸費用まで含めて融資が付いた物件が8つあります。物件の積算と収益力が評価され、自己資金をほとんど入れずに買えています。※比率は融資額÷購入価格（頭金控除後）です。</a:t>
             </a:r>
             <a:endParaRPr lang="en-US" dirty="0"/>
           </a:p>
@@ -2545,7 +2545,7 @@
           <a:p>
             <a:r>
               <a:rPr lang="en-US" dirty="0"/>
-              <a:t>【2分】2021年6月から2024年12月までの約3年間で10物件を購入しました。購入価格の合計は12.12億円。これに対して引いた融資の合計は12.02億円で、購入価格の約99%です。つまり、ほぼ全額を融資でまかないました。個別に見ると、価格と同額以上の融資が付いた物件も多くあります。この物件群の年間家賃は約1.3億円。その後、2025年11月の亀山を加えて、現在は約1.44億円です。</a:t>
+              <a:t>【2分】2021年6月から2024年12月までの約3年間で10物件を購入しました。購入価格の合計は12.12億円。これに対して引いた融資の合計は12.17億円で、購入価格の100.4%です。瑞穂市の物件では、公庫から1,500万円の追加融資も引いています。つまり、購入価格の全額を融資でまかない、さらに上回っています。個別に見ても、価格と同額以上の融資が付いた物件が8つあります。この物件群の年間家賃は約1.3億円。その後、2025年11月の亀山を加えて、現在は約1.44億円です。</a:t>
             </a:r>
             <a:endParaRPr lang="en-US" dirty="0"/>
           </a:p>
@@ -5411,7 +5411,7 @@
                   <a:schemeClr val="tx1"/>
                 </a:solidFill>
               </a:rPr>
-              <a:t>購入価格の約99%を融資</a:t>
+              <a:t>購入価格以上の融資を引く</a:t>
             </a:r>
             <a:endParaRPr lang="en-US" sz="1200" dirty="0"/>
           </a:p>
@@ -8765,7 +8765,7 @@
                   <a:schemeClr val="tx1"/>
                 </a:solidFill>
               </a:rPr>
-              <a:t>11物件中7物件が、フルローン以上</a:t>
+              <a:t>11物件中8物件が、フルローン以上</a:t>
             </a:r>
             <a:endParaRPr lang="en-US" sz="2600" dirty="0"/>
           </a:p>
@@ -8839,7 +8839,7 @@
                   <a:schemeClr val="accent1"/>
                 </a:solidFill>
               </a:rPr>
-              <a:t>7/11</a:t>
+              <a:t>8/11</a:t>
             </a:r>
             <a:endParaRPr lang="en-US" sz="1700" dirty="0"/>
           </a:p>
@@ -9099,7 +9099,7 @@
                   <a:schemeClr val="accent4"/>
                 </a:solidFill>
               </a:rPr>
-              <a:t>※比率は融資額÷購入価格。10物件の合計は、価格12.12億円に対し融資12.02億円（99%）</a:t>
+              <a:t>※比率は融資額÷購入価格。10物件の合計は、価格12.12億円に対し融資12.17億円（100.4%）</a:t>
             </a:r>
             <a:endParaRPr lang="en-US" sz="1000" dirty="0"/>
           </a:p>
@@ -15880,7 +15880,7 @@
                           <a:ea typeface="+mn-lt" pitchFamily="34" charset="-122"/>
                           <a:cs typeface="+mn-lt" pitchFamily="34" charset="-120"/>
                         </a:rPr>
-                        <a:t>3,500</a:t>
+                        <a:t>5,000</a:t>
                       </a:r>
                       <a:endParaRPr lang="en-US" sz="1000" dirty="0">
                         <a:latin typeface="+mn-lt" charset="0"/>
@@ -15948,7 +15948,7 @@
                           <a:ea typeface="+mn-lt" pitchFamily="34" charset="-122"/>
                           <a:cs typeface="+mn-lt" pitchFamily="34" charset="-120"/>
                         </a:rPr>
-                        <a:t>3.5% / 15年</a:t>
+                        <a:t>3.5% / 15年＋公庫</a:t>
                       </a:r>
                       <a:endParaRPr lang="en-US" sz="1000" dirty="0">
                         <a:latin typeface="+mn-lt" charset="0"/>
@@ -16648,7 +16648,7 @@
                   <a:schemeClr val="accent4"/>
                 </a:solidFill>
               </a:rPr>
-              <a:t>現在：178室＋テナント4／年間家賃収入 14,415万円（市原売却後）。融資額は頭金控除後。金融機関名は非公開</a:t>
+              <a:t>現在：178室＋テナント4／年間家賃収入 14,415万円（市原売却後）。融資額は頭金控除後。瑞穂市は公庫の追加融資1,500万円を含む。金融機関名は非公開</a:t>
             </a:r>
             <a:endParaRPr lang="en-US" sz="1000" dirty="0"/>
           </a:p>
@@ -18257,7 +18257,7 @@
                   <a:schemeClr val="tx1"/>
                 </a:solidFill>
               </a:rPr>
-              <a:t>結論：購入価格のほぼ全額を融資で、家賃1億円超へ</a:t>
+              <a:t>結論：購入価格を上回る融資で、家賃1億円超へ</a:t>
             </a:r>
             <a:endParaRPr lang="en-US" sz="2600" dirty="0"/>
           </a:p>
@@ -18331,7 +18331,7 @@
                   <a:schemeClr val="accent3"/>
                 </a:solidFill>
               </a:rPr>
-              <a:t>約99%</a:t>
+              <a:t>100.4%</a:t>
             </a:r>
             <a:endParaRPr lang="en-US" sz="2400" dirty="0"/>
           </a:p>
@@ -18633,7 +18633,7 @@
                   <a:schemeClr val="accent4"/>
                 </a:solidFill>
               </a:rPr>
-              <a:t>※2021年6月〜2024年12月の10物件（市原を含む）。年間家賃は市原（売却済み）を除く。現在の1.44億円は14,415万円</a:t>
+              <a:t>※2021年6月〜2024年12月の10物件（市原を含む）。融資額は瑞穂市の公庫追加融資1,500万円を含む。年間家賃は市原を除く。現在の1.44億円は14,415万円</a:t>
             </a:r>
             <a:endParaRPr lang="en-US" sz="1000" dirty="0"/>
           </a:p>
